--- a/Materjalid/Day5 Employee report DAX/5-paev-andmetarkus-esitlus.pptx
+++ b/Materjalid/Day5 Employee report DAX/5-paev-andmetarkus-esitlus.pptx
@@ -5,58 +5,59 @@
     <p:sldMasterId id="2147483648" r:id="rId4"/>
   </p:sldMasterIdLst>
   <p:notesMasterIdLst>
-    <p:notesMasterId r:id="rId25"/>
+    <p:notesMasterId r:id="rId26"/>
   </p:notesMasterIdLst>
   <p:handoutMasterIdLst>
-    <p:handoutMasterId r:id="rId26"/>
+    <p:handoutMasterId r:id="rId27"/>
   </p:handoutMasterIdLst>
   <p:sldIdLst>
     <p:sldId id="417" r:id="rId5"/>
     <p:sldId id="544" r:id="rId6"/>
     <p:sldId id="607" r:id="rId7"/>
     <p:sldId id="608" r:id="rId8"/>
-    <p:sldId id="589" r:id="rId9"/>
-    <p:sldId id="590" r:id="rId10"/>
-    <p:sldId id="591" r:id="rId11"/>
-    <p:sldId id="605" r:id="rId12"/>
-    <p:sldId id="592" r:id="rId13"/>
-    <p:sldId id="594" r:id="rId14"/>
-    <p:sldId id="604" r:id="rId15"/>
-    <p:sldId id="595" r:id="rId16"/>
-    <p:sldId id="593" r:id="rId17"/>
-    <p:sldId id="596" r:id="rId18"/>
-    <p:sldId id="598" r:id="rId19"/>
-    <p:sldId id="599" r:id="rId20"/>
-    <p:sldId id="600" r:id="rId21"/>
-    <p:sldId id="601" r:id="rId22"/>
-    <p:sldId id="602" r:id="rId23"/>
-    <p:sldId id="606" r:id="rId24"/>
+    <p:sldId id="609" r:id="rId9"/>
+    <p:sldId id="589" r:id="rId10"/>
+    <p:sldId id="590" r:id="rId11"/>
+    <p:sldId id="591" r:id="rId12"/>
+    <p:sldId id="605" r:id="rId13"/>
+    <p:sldId id="592" r:id="rId14"/>
+    <p:sldId id="594" r:id="rId15"/>
+    <p:sldId id="604" r:id="rId16"/>
+    <p:sldId id="595" r:id="rId17"/>
+    <p:sldId id="593" r:id="rId18"/>
+    <p:sldId id="596" r:id="rId19"/>
+    <p:sldId id="598" r:id="rId20"/>
+    <p:sldId id="599" r:id="rId21"/>
+    <p:sldId id="600" r:id="rId22"/>
+    <p:sldId id="601" r:id="rId23"/>
+    <p:sldId id="602" r:id="rId24"/>
+    <p:sldId id="606" r:id="rId25"/>
   </p:sldIdLst>
   <p:sldSz cx="12192000" cy="6858000"/>
   <p:notesSz cx="6858000" cy="9144000"/>
   <p:embeddedFontLst>
     <p:embeddedFont>
       <p:font typeface="Consolas" panose="020B0609020204030204" pitchFamily="49" charset="0"/>
-      <p:regular r:id="rId27"/>
-      <p:bold r:id="rId28"/>
-      <p:italic r:id="rId29"/>
-      <p:boldItalic r:id="rId30"/>
+      <p:regular r:id="rId28"/>
+      <p:bold r:id="rId29"/>
+      <p:italic r:id="rId30"/>
+      <p:boldItalic r:id="rId31"/>
     </p:embeddedFont>
     <p:embeddedFont>
       <p:font typeface="Inter" panose="020B0604020202020204" charset="0"/>
-      <p:regular r:id="rId31"/>
-      <p:bold r:id="rId32"/>
-      <p:italic r:id="rId33"/>
-      <p:boldItalic r:id="rId34"/>
+      <p:regular r:id="rId32"/>
+      <p:bold r:id="rId33"/>
+      <p:italic r:id="rId34"/>
+      <p:boldItalic r:id="rId35"/>
     </p:embeddedFont>
     <p:embeddedFont>
       <p:font typeface="Inter Bold" panose="020B0604020202020204" charset="0"/>
-      <p:bold r:id="rId35"/>
+      <p:bold r:id="rId36"/>
     </p:embeddedFont>
     <p:embeddedFont>
       <p:font typeface="Poppins SemiBold" panose="00000700000000000000" pitchFamily="2" charset="-70"/>
-      <p:bold r:id="rId36"/>
-      <p:boldItalic r:id="rId37"/>
+      <p:bold r:id="rId37"/>
+      <p:boldItalic r:id="rId38"/>
     </p:embeddedFont>
   </p:embeddedFontLst>
   <p:defaultTextStyle>
@@ -259,7 +260,7 @@
           <a:p>
             <a:fld id="{F9D2AD6E-DEDD-49A0-A4BE-7A081A9112DA}" type="datetimeFigureOut">
               <a:rPr lang="en-US" smtClean="0"/>
-              <a:t>8/27/2026</a:t>
+              <a:t>8/29/2026</a:t>
             </a:fld>
             <a:endParaRPr lang="en-US"/>
           </a:p>
@@ -435,7 +436,7 @@
           </a:lstStyle>
           <a:p>
             <a:fld id="{2AF9C1A6-4321-41FA-B001-4140F0E2457F}" type="datetimeFigureOut">
-              <a:t>27.08.2026</a:t>
+              <a:t>29.08.2026</a:t>
             </a:fld>
             <a:endParaRPr lang="en-US"/>
           </a:p>
@@ -11914,7 +11915,7 @@
           <a:p>
             <a:fld id="{DE840A40-73C8-4048-8140-49F5D65BB431}" type="datetimeFigureOut">
               <a:rPr lang="et-EE" smtClean="0"/>
-              <a:t>27.08.2026</a:t>
+              <a:t>29.08.2026</a:t>
             </a:fld>
             <a:endParaRPr lang="et-EE"/>
           </a:p>
@@ -23935,6 +23936,334 @@
         <p:cNvPr id="1" name="">
           <a:extLst>
             <a:ext uri="{FF2B5EF4-FFF2-40B4-BE49-F238E27FC236}">
+              <a16:creationId xmlns:a16="http://schemas.microsoft.com/office/drawing/2014/main" id="{2571FB46-CD7F-56F2-1278-63CD2BBA6D43}"/>
+            </a:ext>
+          </a:extLst>
+        </p:cNvPr>
+        <p:cNvGrpSpPr/>
+        <p:nvPr/>
+      </p:nvGrpSpPr>
+      <p:grpSpPr>
+        <a:xfrm>
+          <a:off x="0" y="0"/>
+          <a:ext cx="0" cy="0"/>
+          <a:chOff x="0" y="0"/>
+          <a:chExt cx="0" cy="0"/>
+        </a:xfrm>
+      </p:grpSpPr>
+      <p:sp>
+        <p:nvSpPr>
+          <p:cNvPr id="2" name="Title 1">
+            <a:extLst>
+              <a:ext uri="{FF2B5EF4-FFF2-40B4-BE49-F238E27FC236}">
+                <a16:creationId xmlns:a16="http://schemas.microsoft.com/office/drawing/2014/main" id="{EEAE7AFC-7430-F378-C0C9-AB6FB6301149}"/>
+              </a:ext>
+            </a:extLst>
+          </p:cNvPr>
+          <p:cNvSpPr>
+            <a:spLocks noGrp="1"/>
+          </p:cNvSpPr>
+          <p:nvPr>
+            <p:ph type="ctrTitle"/>
+          </p:nvPr>
+        </p:nvSpPr>
+        <p:spPr/>
+        <p:txBody>
+          <a:bodyPr/>
+          <a:lstStyle/>
+          <a:p>
+            <a:r>
+              <a:rPr lang="en-US" sz="2800" b="1" err="1">
+                <a:ea typeface="+mj-lt"/>
+                <a:cs typeface="+mj-lt"/>
+              </a:rPr>
+              <a:t>Aktiivsete</a:t>
+            </a:r>
+            <a:r>
+              <a:rPr lang="en-US" sz="2800" b="1">
+                <a:ea typeface="+mj-lt"/>
+                <a:cs typeface="+mj-lt"/>
+              </a:rPr>
+              <a:t> </a:t>
+            </a:r>
+            <a:r>
+              <a:rPr lang="en-US" sz="2800" b="1" err="1">
+                <a:ea typeface="+mj-lt"/>
+                <a:cs typeface="+mj-lt"/>
+              </a:rPr>
+              <a:t>töötajate</a:t>
+            </a:r>
+            <a:r>
+              <a:rPr lang="en-US" sz="2800" b="1">
+                <a:ea typeface="+mj-lt"/>
+                <a:cs typeface="+mj-lt"/>
+              </a:rPr>
+              <a:t> </a:t>
+            </a:r>
+            <a:r>
+              <a:rPr lang="en-US" sz="2800" b="1" err="1">
+                <a:ea typeface="+mj-lt"/>
+                <a:cs typeface="+mj-lt"/>
+              </a:rPr>
+              <a:t>arv</a:t>
+            </a:r>
+            <a:r>
+              <a:rPr lang="en-US" sz="2800" b="1">
+                <a:ea typeface="+mj-lt"/>
+                <a:cs typeface="+mj-lt"/>
+              </a:rPr>
+              <a:t> </a:t>
+            </a:r>
+            <a:r>
+              <a:rPr lang="en-US" sz="2800" b="1" err="1">
+                <a:ea typeface="+mj-lt"/>
+                <a:cs typeface="+mj-lt"/>
+              </a:rPr>
+              <a:t>osakondade</a:t>
+            </a:r>
+            <a:r>
+              <a:rPr lang="en-US" sz="2800" b="1">
+                <a:ea typeface="+mj-lt"/>
+                <a:cs typeface="+mj-lt"/>
+              </a:rPr>
+              <a:t> ja </a:t>
+            </a:r>
+            <a:r>
+              <a:rPr lang="en-US" sz="2800" b="1" err="1">
+                <a:ea typeface="+mj-lt"/>
+                <a:cs typeface="+mj-lt"/>
+              </a:rPr>
+              <a:t>aja</a:t>
+            </a:r>
+            <a:r>
+              <a:rPr lang="en-US" sz="2800" b="1">
+                <a:ea typeface="+mj-lt"/>
+                <a:cs typeface="+mj-lt"/>
+              </a:rPr>
+              <a:t> </a:t>
+            </a:r>
+            <a:r>
+              <a:rPr lang="en-US" sz="2800" b="1" err="1">
+                <a:ea typeface="+mj-lt"/>
+                <a:cs typeface="+mj-lt"/>
+              </a:rPr>
+              <a:t>lõikes</a:t>
+            </a:r>
+            <a:endParaRPr lang="en-US" sz="2800" b="1" err="1">
+              <a:ea typeface="Inter Bold"/>
+            </a:endParaRPr>
+          </a:p>
+        </p:txBody>
+      </p:sp>
+      <p:sp>
+        <p:nvSpPr>
+          <p:cNvPr id="4" name="Content Placeholder 3">
+            <a:extLst>
+              <a:ext uri="{FF2B5EF4-FFF2-40B4-BE49-F238E27FC236}">
+                <a16:creationId xmlns:a16="http://schemas.microsoft.com/office/drawing/2014/main" id="{055D6F38-6BB9-6CCB-6FC0-EEFF0379C1D1}"/>
+              </a:ext>
+            </a:extLst>
+          </p:cNvPr>
+          <p:cNvSpPr>
+            <a:spLocks noGrp="1"/>
+          </p:cNvSpPr>
+          <p:nvPr>
+            <p:ph sz="quarter" idx="10"/>
+          </p:nvPr>
+        </p:nvSpPr>
+        <p:spPr/>
+        <p:txBody>
+          <a:bodyPr/>
+          <a:lstStyle/>
+          <a:p>
+            <a:pPr marL="628650" indent="-342900">
+              <a:lnSpc>
+                <a:spcPct val="100000"/>
+              </a:lnSpc>
+              <a:buClr>
+                <a:srgbClr val="121212"/>
+              </a:buClr>
+            </a:pPr>
+            <a:r>
+              <a:rPr lang="en-US" sz="2000">
+                <a:ea typeface="Inter"/>
+              </a:rPr>
+              <a:t>Risttabel</a:t>
+            </a:r>
+            <a:br>
+              <a:rPr lang="en-US"/>
+            </a:br>
+            <a:endParaRPr lang="en-US"/>
+          </a:p>
+          <a:p>
+            <a:pPr marL="1143000" lvl="1">
+              <a:lnSpc>
+                <a:spcPct val="150000"/>
+              </a:lnSpc>
+              <a:buClr>
+                <a:srgbClr val="121212"/>
+              </a:buClr>
+            </a:pPr>
+            <a:endParaRPr lang="en-US" sz="2000"/>
+          </a:p>
+          <a:p>
+            <a:pPr marL="628650" indent="-342900">
+              <a:lnSpc>
+                <a:spcPct val="150000"/>
+              </a:lnSpc>
+              <a:buClr>
+                <a:srgbClr val="121212"/>
+              </a:buClr>
+            </a:pPr>
+            <a:endParaRPr lang="en-US" sz="2000"/>
+          </a:p>
+          <a:p>
+            <a:pPr marL="1428750" lvl="2">
+              <a:lnSpc>
+                <a:spcPct val="150000"/>
+              </a:lnSpc>
+              <a:buFont typeface="Wingdings" panose="020B0502030000000004" pitchFamily="34" charset="0"/>
+              <a:buChar char="§"/>
+            </a:pPr>
+            <a:endParaRPr lang="en-US" sz="2000"/>
+          </a:p>
+          <a:p>
+            <a:pPr marL="1428750" lvl="2">
+              <a:lnSpc>
+                <a:spcPct val="150000"/>
+              </a:lnSpc>
+              <a:buFont typeface="Wingdings" panose="020B0502030000000004" pitchFamily="34" charset="0"/>
+              <a:buChar char="§"/>
+            </a:pPr>
+            <a:endParaRPr lang="en-US" sz="2000"/>
+          </a:p>
+          <a:p>
+            <a:pPr marL="514350">
+              <a:lnSpc>
+                <a:spcPct val="150000"/>
+              </a:lnSpc>
+              <a:buClr>
+                <a:srgbClr val="121212"/>
+              </a:buClr>
+            </a:pPr>
+            <a:endParaRPr lang="en-US" sz="2000"/>
+          </a:p>
+          <a:p>
+            <a:pPr marL="514350">
+              <a:lnSpc>
+                <a:spcPct val="150000"/>
+              </a:lnSpc>
+              <a:buClr>
+                <a:srgbClr val="121212"/>
+              </a:buClr>
+            </a:pPr>
+            <a:endParaRPr lang="en-US" sz="2000"/>
+          </a:p>
+        </p:txBody>
+      </p:sp>
+    </p:spTree>
+    <p:extLst>
+      <p:ext uri="{BB962C8B-B14F-4D97-AF65-F5344CB8AC3E}">
+        <p14:creationId xmlns:p14="http://schemas.microsoft.com/office/powerpoint/2010/main" val="2573875744"/>
+      </p:ext>
+    </p:extLst>
+  </p:cSld>
+  <p:clrMapOvr>
+    <a:masterClrMapping/>
+  </p:clrMapOvr>
+  <p:timing>
+    <p:tnLst>
+      <p:par>
+        <p:cTn id="1" dur="indefinite" restart="never" nodeType="tmRoot">
+          <p:childTnLst>
+            <p:seq concurrent="1" nextAc="seek">
+              <p:cTn id="2" dur="indefinite" nodeType="mainSeq">
+                <p:childTnLst>
+                  <p:par>
+                    <p:cTn id="3" fill="hold">
+                      <p:stCondLst>
+                        <p:cond delay="indefinite"/>
+                      </p:stCondLst>
+                      <p:childTnLst>
+                        <p:par>
+                          <p:cTn id="4" fill="hold">
+                            <p:stCondLst>
+                              <p:cond delay="0"/>
+                            </p:stCondLst>
+                            <p:childTnLst>
+                              <p:par>
+                                <p:cTn id="5" presetID="1" presetClass="entr" presetSubtype="0" fill="hold" grpId="0" nodeType="clickEffect">
+                                  <p:stCondLst>
+                                    <p:cond delay="0"/>
+                                  </p:stCondLst>
+                                  <p:childTnLst>
+                                    <p:set>
+                                      <p:cBhvr>
+                                        <p:cTn id="6" dur="1" fill="hold">
+                                          <p:stCondLst>
+                                            <p:cond delay="0"/>
+                                          </p:stCondLst>
+                                        </p:cTn>
+                                        <p:tgtEl>
+                                          <p:spTgt spid="4">
+                                            <p:txEl>
+                                              <p:pRg st="0" end="0"/>
+                                            </p:txEl>
+                                          </p:spTgt>
+                                        </p:tgtEl>
+                                        <p:attrNameLst>
+                                          <p:attrName>style.visibility</p:attrName>
+                                        </p:attrNameLst>
+                                      </p:cBhvr>
+                                      <p:to>
+                                        <p:strVal val="visible"/>
+                                      </p:to>
+                                    </p:set>
+                                  </p:childTnLst>
+                                </p:cTn>
+                              </p:par>
+                            </p:childTnLst>
+                          </p:cTn>
+                        </p:par>
+                      </p:childTnLst>
+                    </p:cTn>
+                  </p:par>
+                </p:childTnLst>
+              </p:cTn>
+              <p:prevCondLst>
+                <p:cond evt="onPrev" delay="0">
+                  <p:tgtEl>
+                    <p:sldTgt/>
+                  </p:tgtEl>
+                </p:cond>
+              </p:prevCondLst>
+              <p:nextCondLst>
+                <p:cond evt="onNext" delay="0">
+                  <p:tgtEl>
+                    <p:sldTgt/>
+                  </p:tgtEl>
+                </p:cond>
+              </p:nextCondLst>
+            </p:seq>
+          </p:childTnLst>
+        </p:cTn>
+      </p:par>
+    </p:tnLst>
+    <p:bldLst>
+      <p:bldP spid="4" grpId="0" build="p"/>
+    </p:bldLst>
+  </p:timing>
+</p:sld>
+</file>
+
+<file path=ppt/slides/slide11.xml><?xml version="1.0" encoding="utf-8"?>
+<p:sld xmlns:a="http://schemas.openxmlformats.org/drawingml/2006/main" xmlns:r="http://schemas.openxmlformats.org/officeDocument/2006/relationships" xmlns:p="http://schemas.openxmlformats.org/presentationml/2006/main">
+  <p:cSld>
+    <p:spTree>
+      <p:nvGrpSpPr>
+        <p:cNvPr id="1" name="">
+          <a:extLst>
+            <a:ext uri="{FF2B5EF4-FFF2-40B4-BE49-F238E27FC236}">
               <a16:creationId xmlns:a16="http://schemas.microsoft.com/office/drawing/2014/main" id="{B398607C-1CBD-609C-2DD5-82DEC1A10475}"/>
             </a:ext>
           </a:extLst>
@@ -24040,7 +24369,7 @@
 </p:sld>
 </file>
 
-<file path=ppt/slides/slide11.xml><?xml version="1.0" encoding="utf-8"?>
+<file path=ppt/slides/slide12.xml><?xml version="1.0" encoding="utf-8"?>
 <p:sld xmlns:a="http://schemas.openxmlformats.org/drawingml/2006/main" xmlns:r="http://schemas.openxmlformats.org/officeDocument/2006/relationships" xmlns:p="http://schemas.openxmlformats.org/presentationml/2006/main">
   <p:cSld>
     <p:spTree>
@@ -24280,7 +24609,7 @@
 </p:sld>
 </file>
 
-<file path=ppt/slides/slide12.xml><?xml version="1.0" encoding="utf-8"?>
+<file path=ppt/slides/slide13.xml><?xml version="1.0" encoding="utf-8"?>
 <p:sld xmlns:a="http://schemas.openxmlformats.org/drawingml/2006/main" xmlns:r="http://schemas.openxmlformats.org/officeDocument/2006/relationships" xmlns:p="http://schemas.openxmlformats.org/presentationml/2006/main">
   <p:cSld>
     <p:spTree>
@@ -25360,7 +25689,7 @@
 </p:sld>
 </file>
 
-<file path=ppt/slides/slide13.xml><?xml version="1.0" encoding="utf-8"?>
+<file path=ppt/slides/slide14.xml><?xml version="1.0" encoding="utf-8"?>
 <p:sld xmlns:a="http://schemas.openxmlformats.org/drawingml/2006/main" xmlns:r="http://schemas.openxmlformats.org/officeDocument/2006/relationships" xmlns:p="http://schemas.openxmlformats.org/presentationml/2006/main">
   <p:cSld>
     <p:spTree>
@@ -28176,7 +28505,7 @@
 </p:sld>
 </file>
 
-<file path=ppt/slides/slide14.xml><?xml version="1.0" encoding="utf-8"?>
+<file path=ppt/slides/slide15.xml><?xml version="1.0" encoding="utf-8"?>
 <p:sld xmlns:a="http://schemas.openxmlformats.org/drawingml/2006/main" xmlns:r="http://schemas.openxmlformats.org/officeDocument/2006/relationships" xmlns:p="http://schemas.openxmlformats.org/presentationml/2006/main">
   <p:cSld>
     <p:spTree>
@@ -28293,7 +28622,7 @@
 </p:sld>
 </file>
 
-<file path=ppt/slides/slide15.xml><?xml version="1.0" encoding="utf-8"?>
+<file path=ppt/slides/slide16.xml><?xml version="1.0" encoding="utf-8"?>
 <p:sld xmlns:a="http://schemas.openxmlformats.org/drawingml/2006/main" xmlns:r="http://schemas.openxmlformats.org/officeDocument/2006/relationships" xmlns:p="http://schemas.openxmlformats.org/presentationml/2006/main">
   <p:cSld>
     <p:spTree>
@@ -29425,7 +29754,7 @@
 </p:sld>
 </file>
 
-<file path=ppt/slides/slide16.xml><?xml version="1.0" encoding="utf-8"?>
+<file path=ppt/slides/slide17.xml><?xml version="1.0" encoding="utf-8"?>
 <p:sld xmlns:a="http://schemas.openxmlformats.org/drawingml/2006/main" xmlns:r="http://schemas.openxmlformats.org/officeDocument/2006/relationships" xmlns:p="http://schemas.openxmlformats.org/presentationml/2006/main">
   <p:cSld>
     <p:spTree>
@@ -30354,7 +30683,7 @@
 </p:sld>
 </file>
 
-<file path=ppt/slides/slide17.xml><?xml version="1.0" encoding="utf-8"?>
+<file path=ppt/slides/slide18.xml><?xml version="1.0" encoding="utf-8"?>
 <p:sld xmlns:a="http://schemas.openxmlformats.org/drawingml/2006/main" xmlns:r="http://schemas.openxmlformats.org/officeDocument/2006/relationships" xmlns:p="http://schemas.openxmlformats.org/presentationml/2006/main">
   <p:cSld>
     <p:spTree>
@@ -30467,7 +30796,7 @@
 </p:sld>
 </file>
 
-<file path=ppt/slides/slide18.xml><?xml version="1.0" encoding="utf-8"?>
+<file path=ppt/slides/slide19.xml><?xml version="1.0" encoding="utf-8"?>
 <p:sld xmlns:a="http://schemas.openxmlformats.org/drawingml/2006/main" xmlns:r="http://schemas.openxmlformats.org/officeDocument/2006/relationships" xmlns:p="http://schemas.openxmlformats.org/presentationml/2006/main">
   <p:cSld>
     <p:spTree>
@@ -31350,341 +31679,6 @@
                                           <p:spTgt spid="4">
                                             <p:txEl>
                                               <p:pRg st="5" end="5"/>
-                                            </p:txEl>
-                                          </p:spTgt>
-                                        </p:tgtEl>
-                                        <p:attrNameLst>
-                                          <p:attrName>style.visibility</p:attrName>
-                                        </p:attrNameLst>
-                                      </p:cBhvr>
-                                      <p:to>
-                                        <p:strVal val="visible"/>
-                                      </p:to>
-                                    </p:set>
-                                  </p:childTnLst>
-                                </p:cTn>
-                              </p:par>
-                            </p:childTnLst>
-                          </p:cTn>
-                        </p:par>
-                      </p:childTnLst>
-                    </p:cTn>
-                  </p:par>
-                </p:childTnLst>
-              </p:cTn>
-              <p:prevCondLst>
-                <p:cond evt="onPrev" delay="0">
-                  <p:tgtEl>
-                    <p:sldTgt/>
-                  </p:tgtEl>
-                </p:cond>
-              </p:prevCondLst>
-              <p:nextCondLst>
-                <p:cond evt="onNext" delay="0">
-                  <p:tgtEl>
-                    <p:sldTgt/>
-                  </p:tgtEl>
-                </p:cond>
-              </p:nextCondLst>
-            </p:seq>
-          </p:childTnLst>
-        </p:cTn>
-      </p:par>
-    </p:tnLst>
-    <p:bldLst>
-      <p:bldP spid="4" grpId="0" build="p"/>
-    </p:bldLst>
-  </p:timing>
-</p:sld>
-</file>
-
-<file path=ppt/slides/slide19.xml><?xml version="1.0" encoding="utf-8"?>
-<p:sld xmlns:a="http://schemas.openxmlformats.org/drawingml/2006/main" xmlns:r="http://schemas.openxmlformats.org/officeDocument/2006/relationships" xmlns:p="http://schemas.openxmlformats.org/presentationml/2006/main">
-  <p:cSld>
-    <p:spTree>
-      <p:nvGrpSpPr>
-        <p:cNvPr id="1" name="">
-          <a:extLst>
-            <a:ext uri="{FF2B5EF4-FFF2-40B4-BE49-F238E27FC236}">
-              <a16:creationId xmlns:a16="http://schemas.microsoft.com/office/drawing/2014/main" id="{D101F94B-C51D-F5D0-EA6E-B59170145DDC}"/>
-            </a:ext>
-          </a:extLst>
-        </p:cNvPr>
-        <p:cNvGrpSpPr/>
-        <p:nvPr/>
-      </p:nvGrpSpPr>
-      <p:grpSpPr>
-        <a:xfrm>
-          <a:off x="0" y="0"/>
-          <a:ext cx="0" cy="0"/>
-          <a:chOff x="0" y="0"/>
-          <a:chExt cx="0" cy="0"/>
-        </a:xfrm>
-      </p:grpSpPr>
-      <p:sp>
-        <p:nvSpPr>
-          <p:cNvPr id="2" name="Title 1">
-            <a:extLst>
-              <a:ext uri="{FF2B5EF4-FFF2-40B4-BE49-F238E27FC236}">
-                <a16:creationId xmlns:a16="http://schemas.microsoft.com/office/drawing/2014/main" id="{1DC57E66-9AE4-19EB-285E-E5AFB83715E6}"/>
-              </a:ext>
-            </a:extLst>
-          </p:cNvPr>
-          <p:cNvSpPr>
-            <a:spLocks noGrp="1"/>
-          </p:cNvSpPr>
-          <p:nvPr>
-            <p:ph type="ctrTitle"/>
-          </p:nvPr>
-        </p:nvSpPr>
-        <p:spPr/>
-        <p:txBody>
-          <a:bodyPr/>
-          <a:lstStyle/>
-          <a:p>
-            <a:r>
-              <a:rPr lang="en-US" sz="2800" b="1" err="1">
-                <a:ea typeface="+mj-lt"/>
-                <a:cs typeface="+mj-lt"/>
-              </a:rPr>
-              <a:t>Personaliosakond</a:t>
-            </a:r>
-            <a:r>
-              <a:rPr lang="en-US" sz="2800" b="1">
-                <a:ea typeface="+mj-lt"/>
-                <a:cs typeface="+mj-lt"/>
-              </a:rPr>
-              <a:t> – </a:t>
-            </a:r>
-            <a:r>
-              <a:rPr lang="en-US" sz="2800" b="1" err="1">
-                <a:ea typeface="+mj-lt"/>
-                <a:cs typeface="+mj-lt"/>
-              </a:rPr>
-              <a:t>rahuloluküsitlus</a:t>
-            </a:r>
-            <a:r>
-              <a:rPr lang="en-US" sz="2800" b="1">
-                <a:ea typeface="+mj-lt"/>
-                <a:cs typeface="+mj-lt"/>
-              </a:rPr>
-              <a:t> - </a:t>
-            </a:r>
-            <a:r>
-              <a:rPr lang="en-US" sz="2800" b="1" err="1">
-                <a:ea typeface="+mj-lt"/>
-                <a:cs typeface="+mj-lt"/>
-              </a:rPr>
-              <a:t>raporti</a:t>
-            </a:r>
-            <a:r>
-              <a:rPr lang="en-US" sz="2800" b="1">
-                <a:ea typeface="+mj-lt"/>
-                <a:cs typeface="+mj-lt"/>
-              </a:rPr>
-              <a:t> </a:t>
-            </a:r>
-            <a:r>
-              <a:rPr lang="en-US" sz="2800" b="1" err="1">
-                <a:ea typeface="+mj-lt"/>
-                <a:cs typeface="+mj-lt"/>
-              </a:rPr>
-              <a:t>leht</a:t>
-            </a:r>
-            <a:r>
-              <a:rPr lang="en-US" sz="2800" b="1">
-                <a:ea typeface="+mj-lt"/>
-                <a:cs typeface="+mj-lt"/>
-              </a:rPr>
-              <a:t> </a:t>
-            </a:r>
-            <a:endParaRPr lang="en-US" sz="2800" b="1">
-              <a:ea typeface="Inter Bold"/>
-            </a:endParaRPr>
-          </a:p>
-        </p:txBody>
-      </p:sp>
-      <p:sp>
-        <p:nvSpPr>
-          <p:cNvPr id="4" name="Content Placeholder 3">
-            <a:extLst>
-              <a:ext uri="{FF2B5EF4-FFF2-40B4-BE49-F238E27FC236}">
-                <a16:creationId xmlns:a16="http://schemas.microsoft.com/office/drawing/2014/main" id="{1D71896A-D27C-8337-FE2C-84CCEB0B165B}"/>
-              </a:ext>
-            </a:extLst>
-          </p:cNvPr>
-          <p:cNvSpPr>
-            <a:spLocks noGrp="1"/>
-          </p:cNvSpPr>
-          <p:nvPr>
-            <p:ph sz="quarter" idx="10"/>
-          </p:nvPr>
-        </p:nvSpPr>
-        <p:spPr/>
-        <p:txBody>
-          <a:bodyPr/>
-          <a:lstStyle/>
-          <a:p>
-            <a:pPr marL="628650" indent="-342900">
-              <a:lnSpc>
-                <a:spcPct val="150000"/>
-              </a:lnSpc>
-              <a:buClr>
-                <a:srgbClr val="121212"/>
-              </a:buClr>
-            </a:pPr>
-            <a:r>
-              <a:rPr lang="en-US" sz="2000" err="1">
-                <a:ea typeface="Inter"/>
-              </a:rPr>
-              <a:t>Näitame</a:t>
-            </a:r>
-            <a:r>
-              <a:rPr lang="en-US" sz="2000">
-                <a:ea typeface="Inter"/>
-              </a:rPr>
-              <a:t> </a:t>
-            </a:r>
-            <a:r>
-              <a:rPr lang="en-US" sz="2000" err="1">
-                <a:ea typeface="Inter"/>
-              </a:rPr>
-              <a:t>kvartalite</a:t>
-            </a:r>
-            <a:r>
-              <a:rPr lang="en-US" sz="2000">
-                <a:ea typeface="Inter"/>
-              </a:rPr>
-              <a:t> </a:t>
-            </a:r>
-            <a:r>
-              <a:rPr lang="en-US" sz="2000" err="1">
-                <a:ea typeface="Inter"/>
-              </a:rPr>
-              <a:t>kaupa</a:t>
-            </a:r>
-            <a:r>
-              <a:rPr lang="en-US" sz="2000">
-                <a:ea typeface="Inter"/>
-              </a:rPr>
-              <a:t> </a:t>
-            </a:r>
-            <a:r>
-              <a:rPr lang="en-US" sz="2000" err="1">
-                <a:ea typeface="Inter"/>
-              </a:rPr>
-              <a:t>rahuloluküsitluse</a:t>
-            </a:r>
-            <a:r>
-              <a:rPr lang="en-US" sz="2000">
-                <a:ea typeface="Inter"/>
-              </a:rPr>
-              <a:t> </a:t>
-            </a:r>
-            <a:r>
-              <a:rPr lang="en-US" sz="2000" err="1">
-                <a:ea typeface="Inter"/>
-              </a:rPr>
-              <a:t>tulemusi</a:t>
-            </a:r>
-            <a:endParaRPr lang="en-US" sz="2000" err="1">
-              <a:solidFill>
-                <a:srgbClr val="121212"/>
-              </a:solidFill>
-              <a:latin typeface="Inter" panose="02000503000000020004" pitchFamily="2" charset="0"/>
-            </a:endParaRPr>
-          </a:p>
-          <a:p>
-            <a:pPr marL="1428750" lvl="2">
-              <a:lnSpc>
-                <a:spcPct val="150000"/>
-              </a:lnSpc>
-              <a:buFont typeface="Wingdings" panose="020B0502030000000004" pitchFamily="34" charset="0"/>
-              <a:buChar char="§"/>
-            </a:pPr>
-            <a:endParaRPr lang="en-US" sz="2000"/>
-          </a:p>
-          <a:p>
-            <a:pPr marL="1428750" lvl="2">
-              <a:lnSpc>
-                <a:spcPct val="150000"/>
-              </a:lnSpc>
-              <a:buFont typeface="Wingdings" panose="020B0502030000000004" pitchFamily="34" charset="0"/>
-              <a:buChar char="§"/>
-            </a:pPr>
-            <a:endParaRPr lang="en-US" sz="2000"/>
-          </a:p>
-          <a:p>
-            <a:pPr marL="514350">
-              <a:lnSpc>
-                <a:spcPct val="150000"/>
-              </a:lnSpc>
-              <a:buClr>
-                <a:srgbClr val="121212"/>
-              </a:buClr>
-            </a:pPr>
-            <a:endParaRPr lang="en-US" sz="2000"/>
-          </a:p>
-          <a:p>
-            <a:pPr marL="514350">
-              <a:lnSpc>
-                <a:spcPct val="150000"/>
-              </a:lnSpc>
-              <a:buClr>
-                <a:srgbClr val="121212"/>
-              </a:buClr>
-            </a:pPr>
-            <a:endParaRPr lang="en-US" sz="2000"/>
-          </a:p>
-        </p:txBody>
-      </p:sp>
-    </p:spTree>
-    <p:extLst>
-      <p:ext uri="{BB962C8B-B14F-4D97-AF65-F5344CB8AC3E}">
-        <p14:creationId xmlns:p14="http://schemas.microsoft.com/office/powerpoint/2010/main" val="935899354"/>
-      </p:ext>
-    </p:extLst>
-  </p:cSld>
-  <p:clrMapOvr>
-    <a:masterClrMapping/>
-  </p:clrMapOvr>
-  <p:timing>
-    <p:tnLst>
-      <p:par>
-        <p:cTn id="1" dur="indefinite" restart="never" nodeType="tmRoot">
-          <p:childTnLst>
-            <p:seq concurrent="1" nextAc="seek">
-              <p:cTn id="2" dur="indefinite" nodeType="mainSeq">
-                <p:childTnLst>
-                  <p:par>
-                    <p:cTn id="3" fill="hold">
-                      <p:stCondLst>
-                        <p:cond delay="indefinite"/>
-                      </p:stCondLst>
-                      <p:childTnLst>
-                        <p:par>
-                          <p:cTn id="4" fill="hold">
-                            <p:stCondLst>
-                              <p:cond delay="0"/>
-                            </p:stCondLst>
-                            <p:childTnLst>
-                              <p:par>
-                                <p:cTn id="5" presetID="1" presetClass="entr" presetSubtype="0" fill="hold" grpId="0" nodeType="clickEffect">
-                                  <p:stCondLst>
-                                    <p:cond delay="0"/>
-                                  </p:stCondLst>
-                                  <p:childTnLst>
-                                    <p:set>
-                                      <p:cBhvr>
-                                        <p:cTn id="6" dur="1" fill="hold">
-                                          <p:stCondLst>
-                                            <p:cond delay="0"/>
-                                          </p:stCondLst>
-                                        </p:cTn>
-                                        <p:tgtEl>
-                                          <p:spTgt spid="4">
-                                            <p:txEl>
-                                              <p:pRg st="0" end="0"/>
                                             </p:txEl>
                                           </p:spTgt>
                                         </p:tgtEl>
@@ -32685,6 +32679,341 @@
   <p:cSld>
     <p:spTree>
       <p:nvGrpSpPr>
+        <p:cNvPr id="1" name="">
+          <a:extLst>
+            <a:ext uri="{FF2B5EF4-FFF2-40B4-BE49-F238E27FC236}">
+              <a16:creationId xmlns:a16="http://schemas.microsoft.com/office/drawing/2014/main" id="{D101F94B-C51D-F5D0-EA6E-B59170145DDC}"/>
+            </a:ext>
+          </a:extLst>
+        </p:cNvPr>
+        <p:cNvGrpSpPr/>
+        <p:nvPr/>
+      </p:nvGrpSpPr>
+      <p:grpSpPr>
+        <a:xfrm>
+          <a:off x="0" y="0"/>
+          <a:ext cx="0" cy="0"/>
+          <a:chOff x="0" y="0"/>
+          <a:chExt cx="0" cy="0"/>
+        </a:xfrm>
+      </p:grpSpPr>
+      <p:sp>
+        <p:nvSpPr>
+          <p:cNvPr id="2" name="Title 1">
+            <a:extLst>
+              <a:ext uri="{FF2B5EF4-FFF2-40B4-BE49-F238E27FC236}">
+                <a16:creationId xmlns:a16="http://schemas.microsoft.com/office/drawing/2014/main" id="{1DC57E66-9AE4-19EB-285E-E5AFB83715E6}"/>
+              </a:ext>
+            </a:extLst>
+          </p:cNvPr>
+          <p:cNvSpPr>
+            <a:spLocks noGrp="1"/>
+          </p:cNvSpPr>
+          <p:nvPr>
+            <p:ph type="ctrTitle"/>
+          </p:nvPr>
+        </p:nvSpPr>
+        <p:spPr/>
+        <p:txBody>
+          <a:bodyPr/>
+          <a:lstStyle/>
+          <a:p>
+            <a:r>
+              <a:rPr lang="en-US" sz="2800" b="1" err="1">
+                <a:ea typeface="+mj-lt"/>
+                <a:cs typeface="+mj-lt"/>
+              </a:rPr>
+              <a:t>Personaliosakond</a:t>
+            </a:r>
+            <a:r>
+              <a:rPr lang="en-US" sz="2800" b="1">
+                <a:ea typeface="+mj-lt"/>
+                <a:cs typeface="+mj-lt"/>
+              </a:rPr>
+              <a:t> – </a:t>
+            </a:r>
+            <a:r>
+              <a:rPr lang="en-US" sz="2800" b="1" err="1">
+                <a:ea typeface="+mj-lt"/>
+                <a:cs typeface="+mj-lt"/>
+              </a:rPr>
+              <a:t>rahuloluküsitlus</a:t>
+            </a:r>
+            <a:r>
+              <a:rPr lang="en-US" sz="2800" b="1">
+                <a:ea typeface="+mj-lt"/>
+                <a:cs typeface="+mj-lt"/>
+              </a:rPr>
+              <a:t> - </a:t>
+            </a:r>
+            <a:r>
+              <a:rPr lang="en-US" sz="2800" b="1" err="1">
+                <a:ea typeface="+mj-lt"/>
+                <a:cs typeface="+mj-lt"/>
+              </a:rPr>
+              <a:t>raporti</a:t>
+            </a:r>
+            <a:r>
+              <a:rPr lang="en-US" sz="2800" b="1">
+                <a:ea typeface="+mj-lt"/>
+                <a:cs typeface="+mj-lt"/>
+              </a:rPr>
+              <a:t> </a:t>
+            </a:r>
+            <a:r>
+              <a:rPr lang="en-US" sz="2800" b="1" err="1">
+                <a:ea typeface="+mj-lt"/>
+                <a:cs typeface="+mj-lt"/>
+              </a:rPr>
+              <a:t>leht</a:t>
+            </a:r>
+            <a:r>
+              <a:rPr lang="en-US" sz="2800" b="1">
+                <a:ea typeface="+mj-lt"/>
+                <a:cs typeface="+mj-lt"/>
+              </a:rPr>
+              <a:t> </a:t>
+            </a:r>
+            <a:endParaRPr lang="en-US" sz="2800" b="1">
+              <a:ea typeface="Inter Bold"/>
+            </a:endParaRPr>
+          </a:p>
+        </p:txBody>
+      </p:sp>
+      <p:sp>
+        <p:nvSpPr>
+          <p:cNvPr id="4" name="Content Placeholder 3">
+            <a:extLst>
+              <a:ext uri="{FF2B5EF4-FFF2-40B4-BE49-F238E27FC236}">
+                <a16:creationId xmlns:a16="http://schemas.microsoft.com/office/drawing/2014/main" id="{1D71896A-D27C-8337-FE2C-84CCEB0B165B}"/>
+              </a:ext>
+            </a:extLst>
+          </p:cNvPr>
+          <p:cNvSpPr>
+            <a:spLocks noGrp="1"/>
+          </p:cNvSpPr>
+          <p:nvPr>
+            <p:ph sz="quarter" idx="10"/>
+          </p:nvPr>
+        </p:nvSpPr>
+        <p:spPr/>
+        <p:txBody>
+          <a:bodyPr/>
+          <a:lstStyle/>
+          <a:p>
+            <a:pPr marL="628650" indent="-342900">
+              <a:lnSpc>
+                <a:spcPct val="150000"/>
+              </a:lnSpc>
+              <a:buClr>
+                <a:srgbClr val="121212"/>
+              </a:buClr>
+            </a:pPr>
+            <a:r>
+              <a:rPr lang="en-US" sz="2000" err="1">
+                <a:ea typeface="Inter"/>
+              </a:rPr>
+              <a:t>Näitame</a:t>
+            </a:r>
+            <a:r>
+              <a:rPr lang="en-US" sz="2000">
+                <a:ea typeface="Inter"/>
+              </a:rPr>
+              <a:t> </a:t>
+            </a:r>
+            <a:r>
+              <a:rPr lang="en-US" sz="2000" err="1">
+                <a:ea typeface="Inter"/>
+              </a:rPr>
+              <a:t>kvartalite</a:t>
+            </a:r>
+            <a:r>
+              <a:rPr lang="en-US" sz="2000">
+                <a:ea typeface="Inter"/>
+              </a:rPr>
+              <a:t> </a:t>
+            </a:r>
+            <a:r>
+              <a:rPr lang="en-US" sz="2000" err="1">
+                <a:ea typeface="Inter"/>
+              </a:rPr>
+              <a:t>kaupa</a:t>
+            </a:r>
+            <a:r>
+              <a:rPr lang="en-US" sz="2000">
+                <a:ea typeface="Inter"/>
+              </a:rPr>
+              <a:t> </a:t>
+            </a:r>
+            <a:r>
+              <a:rPr lang="en-US" sz="2000" err="1">
+                <a:ea typeface="Inter"/>
+              </a:rPr>
+              <a:t>rahuloluküsitluse</a:t>
+            </a:r>
+            <a:r>
+              <a:rPr lang="en-US" sz="2000">
+                <a:ea typeface="Inter"/>
+              </a:rPr>
+              <a:t> </a:t>
+            </a:r>
+            <a:r>
+              <a:rPr lang="en-US" sz="2000" err="1">
+                <a:ea typeface="Inter"/>
+              </a:rPr>
+              <a:t>tulemusi</a:t>
+            </a:r>
+            <a:endParaRPr lang="en-US" sz="2000" err="1">
+              <a:solidFill>
+                <a:srgbClr val="121212"/>
+              </a:solidFill>
+              <a:latin typeface="Inter" panose="02000503000000020004" pitchFamily="2" charset="0"/>
+            </a:endParaRPr>
+          </a:p>
+          <a:p>
+            <a:pPr marL="1428750" lvl="2">
+              <a:lnSpc>
+                <a:spcPct val="150000"/>
+              </a:lnSpc>
+              <a:buFont typeface="Wingdings" panose="020B0502030000000004" pitchFamily="34" charset="0"/>
+              <a:buChar char="§"/>
+            </a:pPr>
+            <a:endParaRPr lang="en-US" sz="2000"/>
+          </a:p>
+          <a:p>
+            <a:pPr marL="1428750" lvl="2">
+              <a:lnSpc>
+                <a:spcPct val="150000"/>
+              </a:lnSpc>
+              <a:buFont typeface="Wingdings" panose="020B0502030000000004" pitchFamily="34" charset="0"/>
+              <a:buChar char="§"/>
+            </a:pPr>
+            <a:endParaRPr lang="en-US" sz="2000"/>
+          </a:p>
+          <a:p>
+            <a:pPr marL="514350">
+              <a:lnSpc>
+                <a:spcPct val="150000"/>
+              </a:lnSpc>
+              <a:buClr>
+                <a:srgbClr val="121212"/>
+              </a:buClr>
+            </a:pPr>
+            <a:endParaRPr lang="en-US" sz="2000"/>
+          </a:p>
+          <a:p>
+            <a:pPr marL="514350">
+              <a:lnSpc>
+                <a:spcPct val="150000"/>
+              </a:lnSpc>
+              <a:buClr>
+                <a:srgbClr val="121212"/>
+              </a:buClr>
+            </a:pPr>
+            <a:endParaRPr lang="en-US" sz="2000"/>
+          </a:p>
+        </p:txBody>
+      </p:sp>
+    </p:spTree>
+    <p:extLst>
+      <p:ext uri="{BB962C8B-B14F-4D97-AF65-F5344CB8AC3E}">
+        <p14:creationId xmlns:p14="http://schemas.microsoft.com/office/powerpoint/2010/main" val="935899354"/>
+      </p:ext>
+    </p:extLst>
+  </p:cSld>
+  <p:clrMapOvr>
+    <a:masterClrMapping/>
+  </p:clrMapOvr>
+  <p:timing>
+    <p:tnLst>
+      <p:par>
+        <p:cTn id="1" dur="indefinite" restart="never" nodeType="tmRoot">
+          <p:childTnLst>
+            <p:seq concurrent="1" nextAc="seek">
+              <p:cTn id="2" dur="indefinite" nodeType="mainSeq">
+                <p:childTnLst>
+                  <p:par>
+                    <p:cTn id="3" fill="hold">
+                      <p:stCondLst>
+                        <p:cond delay="indefinite"/>
+                      </p:stCondLst>
+                      <p:childTnLst>
+                        <p:par>
+                          <p:cTn id="4" fill="hold">
+                            <p:stCondLst>
+                              <p:cond delay="0"/>
+                            </p:stCondLst>
+                            <p:childTnLst>
+                              <p:par>
+                                <p:cTn id="5" presetID="1" presetClass="entr" presetSubtype="0" fill="hold" grpId="0" nodeType="clickEffect">
+                                  <p:stCondLst>
+                                    <p:cond delay="0"/>
+                                  </p:stCondLst>
+                                  <p:childTnLst>
+                                    <p:set>
+                                      <p:cBhvr>
+                                        <p:cTn id="6" dur="1" fill="hold">
+                                          <p:stCondLst>
+                                            <p:cond delay="0"/>
+                                          </p:stCondLst>
+                                        </p:cTn>
+                                        <p:tgtEl>
+                                          <p:spTgt spid="4">
+                                            <p:txEl>
+                                              <p:pRg st="0" end="0"/>
+                                            </p:txEl>
+                                          </p:spTgt>
+                                        </p:tgtEl>
+                                        <p:attrNameLst>
+                                          <p:attrName>style.visibility</p:attrName>
+                                        </p:attrNameLst>
+                                      </p:cBhvr>
+                                      <p:to>
+                                        <p:strVal val="visible"/>
+                                      </p:to>
+                                    </p:set>
+                                  </p:childTnLst>
+                                </p:cTn>
+                              </p:par>
+                            </p:childTnLst>
+                          </p:cTn>
+                        </p:par>
+                      </p:childTnLst>
+                    </p:cTn>
+                  </p:par>
+                </p:childTnLst>
+              </p:cTn>
+              <p:prevCondLst>
+                <p:cond evt="onPrev" delay="0">
+                  <p:tgtEl>
+                    <p:sldTgt/>
+                  </p:tgtEl>
+                </p:cond>
+              </p:prevCondLst>
+              <p:nextCondLst>
+                <p:cond evt="onNext" delay="0">
+                  <p:tgtEl>
+                    <p:sldTgt/>
+                  </p:tgtEl>
+                </p:cond>
+              </p:nextCondLst>
+            </p:seq>
+          </p:childTnLst>
+        </p:cTn>
+      </p:par>
+    </p:tnLst>
+    <p:bldLst>
+      <p:bldP spid="4" grpId="0" build="p"/>
+    </p:bldLst>
+  </p:timing>
+</p:sld>
+</file>
+
+<file path=ppt/slides/slide21.xml><?xml version="1.0" encoding="utf-8"?>
+<p:sld xmlns:a="http://schemas.openxmlformats.org/drawingml/2006/main" xmlns:r="http://schemas.openxmlformats.org/officeDocument/2006/relationships" xmlns:p="http://schemas.openxmlformats.org/presentationml/2006/main">
+  <p:cSld>
+    <p:spTree>
+      <p:nvGrpSpPr>
         <p:cNvPr id="1" name=""/>
         <p:cNvGrpSpPr/>
         <p:nvPr/>
@@ -32970,7 +33299,7 @@
         </p:blipFill>
         <p:spPr>
           <a:xfrm>
-            <a:off x="6094413" y="267166"/>
+            <a:off x="3937001" y="224303"/>
             <a:ext cx="4817110" cy="6021387"/>
           </a:xfrm>
           <a:prstGeom prst="rect">
@@ -32992,6 +33321,228 @@
 </file>
 
 <file path=ppt/slides/slide5.xml><?xml version="1.0" encoding="utf-8"?>
+<p:sld xmlns:a="http://schemas.openxmlformats.org/drawingml/2006/main" xmlns:r="http://schemas.openxmlformats.org/officeDocument/2006/relationships" xmlns:p="http://schemas.openxmlformats.org/presentationml/2006/main">
+  <p:cSld>
+    <p:spTree>
+      <p:nvGrpSpPr>
+        <p:cNvPr id="1" name=""/>
+        <p:cNvGrpSpPr/>
+        <p:nvPr/>
+      </p:nvGrpSpPr>
+      <p:grpSpPr>
+        <a:xfrm>
+          <a:off x="0" y="0"/>
+          <a:ext cx="0" cy="0"/>
+          <a:chOff x="0" y="0"/>
+          <a:chExt cx="0" cy="0"/>
+        </a:xfrm>
+      </p:grpSpPr>
+      <p:sp>
+        <p:nvSpPr>
+          <p:cNvPr id="2" name="Title 1">
+            <a:extLst>
+              <a:ext uri="{FF2B5EF4-FFF2-40B4-BE49-F238E27FC236}">
+                <a16:creationId xmlns:a16="http://schemas.microsoft.com/office/drawing/2014/main" id="{97ADBAAE-D5E8-07A0-2DA7-4591A75F7B75}"/>
+              </a:ext>
+            </a:extLst>
+          </p:cNvPr>
+          <p:cNvSpPr>
+            <a:spLocks noGrp="1"/>
+          </p:cNvSpPr>
+          <p:nvPr>
+            <p:ph type="ctrTitle"/>
+          </p:nvPr>
+        </p:nvSpPr>
+        <p:spPr/>
+        <p:txBody>
+          <a:bodyPr/>
+          <a:lstStyle/>
+          <a:p>
+            <a:r>
+              <a:rPr lang="et-EE" dirty="0"/>
+              <a:t>Soovituslikud materjalid</a:t>
+            </a:r>
+          </a:p>
+        </p:txBody>
+      </p:sp>
+      <p:sp>
+        <p:nvSpPr>
+          <p:cNvPr id="3" name="Content Placeholder 2">
+            <a:extLst>
+              <a:ext uri="{FF2B5EF4-FFF2-40B4-BE49-F238E27FC236}">
+                <a16:creationId xmlns:a16="http://schemas.microsoft.com/office/drawing/2014/main" id="{594AAA36-50E7-94BE-049E-85EBF6FB0229}"/>
+              </a:ext>
+            </a:extLst>
+          </p:cNvPr>
+          <p:cNvSpPr>
+            <a:spLocks noGrp="1"/>
+          </p:cNvSpPr>
+          <p:nvPr>
+            <p:ph sz="quarter" idx="10"/>
+          </p:nvPr>
+        </p:nvSpPr>
+        <p:spPr/>
+        <p:txBody>
+          <a:bodyPr/>
+          <a:lstStyle/>
+          <a:p>
+            <a:r>
+              <a:rPr lang="et-EE" dirty="0"/>
+              <a:t>Power BI Microsoft Learn koolitus </a:t>
+            </a:r>
+            <a:br>
+              <a:rPr lang="et-EE" dirty="0"/>
+            </a:br>
+            <a:r>
+              <a:rPr lang="et-EE" dirty="0">
+                <a:hlinkClick r:id="rId2"/>
+              </a:rPr>
+              <a:t>https://learn.microsoft.com/en-us/credentials/certifications/data-analyst-associate/?practice-assessment-type=certification</a:t>
+            </a:r>
+            <a:br>
+              <a:rPr lang="et-EE" dirty="0"/>
+            </a:br>
+            <a:br>
+              <a:rPr lang="et-EE" dirty="0"/>
+            </a:br>
+            <a:br>
+              <a:rPr lang="et-EE" dirty="0"/>
+            </a:br>
+            <a:br>
+              <a:rPr lang="et-EE" dirty="0"/>
+            </a:br>
+            <a:endParaRPr lang="et-EE" dirty="0"/>
+          </a:p>
+          <a:p>
+            <a:r>
+              <a:rPr lang="et-EE" dirty="0"/>
+              <a:t>Raamat The Data Warehouse Toolkit, Ralph Kimball</a:t>
+            </a:r>
+            <a:br>
+              <a:rPr lang="et-EE" dirty="0"/>
+            </a:br>
+            <a:r>
+              <a:rPr lang="et-EE" b="1" dirty="0"/>
+              <a:t>„The Data Warehouse Toolkit“</a:t>
+            </a:r>
+            <a:r>
+              <a:rPr lang="et-EE" dirty="0"/>
+              <a:t> on Ralph Kimballi kirjutatud andmelao disaini </a:t>
+            </a:r>
+            <a:br>
+              <a:rPr lang="et-EE" dirty="0"/>
+            </a:br>
+            <a:r>
+              <a:rPr lang="et-EE" dirty="0"/>
+              <a:t>käsiraamat, mida peetakse dimensioonilise modelleerimise ja </a:t>
+            </a:r>
+            <a:br>
+              <a:rPr lang="et-EE" dirty="0"/>
+            </a:br>
+            <a:r>
+              <a:rPr lang="et-EE" dirty="0"/>
+              <a:t>tähetüüpi skeemi (star schema) ülemaailmseks standardiks. </a:t>
+            </a:r>
+            <a:br>
+              <a:rPr lang="et-EE" dirty="0"/>
+            </a:br>
+            <a:r>
+              <a:rPr lang="et-EE" dirty="0"/>
+              <a:t>Raamat õpetab äriprotsesse tõhusalt andmetabeliteks struktureerima, et </a:t>
+            </a:r>
+            <a:br>
+              <a:rPr lang="et-EE" dirty="0"/>
+            </a:br>
+            <a:r>
+              <a:rPr lang="et-EE" dirty="0"/>
+              <a:t>tagada infosüsteemides kiire päringute jõudlus ja kasutajasõbralik aruandlus.</a:t>
+            </a:r>
+          </a:p>
+          <a:p>
+            <a:endParaRPr lang="et-EE" dirty="0"/>
+          </a:p>
+          <a:p>
+            <a:endParaRPr lang="et-EE" dirty="0"/>
+          </a:p>
+          <a:p>
+            <a:endParaRPr lang="et-EE" dirty="0"/>
+          </a:p>
+        </p:txBody>
+      </p:sp>
+      <p:pic>
+        <p:nvPicPr>
+          <p:cNvPr id="4" name="Picture 3" descr="The Data Warehouse Toolkit, 3rd Edition">
+            <a:extLst>
+              <a:ext uri="{FF2B5EF4-FFF2-40B4-BE49-F238E27FC236}">
+                <a16:creationId xmlns:a16="http://schemas.microsoft.com/office/drawing/2014/main" id="{1A2062F4-0C0B-6A58-7CEC-239EF0EFB700}"/>
+              </a:ext>
+            </a:extLst>
+          </p:cNvPr>
+          <p:cNvPicPr>
+            <a:picLocks noChangeAspect="1"/>
+          </p:cNvPicPr>
+          <p:nvPr/>
+        </p:nvPicPr>
+        <p:blipFill>
+          <a:blip r:embed="rId3"/>
+          <a:stretch>
+            <a:fillRect/>
+          </a:stretch>
+        </p:blipFill>
+        <p:spPr>
+          <a:xfrm>
+            <a:off x="879476" y="4793456"/>
+            <a:ext cx="1280659" cy="1584974"/>
+          </a:xfrm>
+          <a:prstGeom prst="rect">
+            <a:avLst/>
+          </a:prstGeom>
+        </p:spPr>
+      </p:pic>
+      <p:pic>
+        <p:nvPicPr>
+          <p:cNvPr id="6" name="Picture 5">
+            <a:extLst>
+              <a:ext uri="{FF2B5EF4-FFF2-40B4-BE49-F238E27FC236}">
+                <a16:creationId xmlns:a16="http://schemas.microsoft.com/office/drawing/2014/main" id="{E88AE414-8736-3160-6B39-3EF403371F41}"/>
+              </a:ext>
+            </a:extLst>
+          </p:cNvPr>
+          <p:cNvPicPr>
+            <a:picLocks noChangeAspect="1"/>
+          </p:cNvPicPr>
+          <p:nvPr/>
+        </p:nvPicPr>
+        <p:blipFill>
+          <a:blip r:embed="rId4"/>
+          <a:stretch>
+            <a:fillRect/>
+          </a:stretch>
+        </p:blipFill>
+        <p:spPr>
+          <a:xfrm>
+            <a:off x="8380705" y="2059781"/>
+            <a:ext cx="3689378" cy="3750469"/>
+          </a:xfrm>
+          <a:prstGeom prst="rect">
+            <a:avLst/>
+          </a:prstGeom>
+        </p:spPr>
+      </p:pic>
+    </p:spTree>
+    <p:extLst>
+      <p:ext uri="{BB962C8B-B14F-4D97-AF65-F5344CB8AC3E}">
+        <p14:creationId xmlns:p14="http://schemas.microsoft.com/office/powerpoint/2010/main" val="1535280254"/>
+      </p:ext>
+    </p:extLst>
+  </p:cSld>
+  <p:clrMapOvr>
+    <a:masterClrMapping/>
+  </p:clrMapOvr>
+</p:sld>
+</file>
+
+<file path=ppt/slides/slide6.xml><?xml version="1.0" encoding="utf-8"?>
 <p:sld xmlns:a="http://schemas.openxmlformats.org/drawingml/2006/main" xmlns:r="http://schemas.openxmlformats.org/officeDocument/2006/relationships" xmlns:p="http://schemas.openxmlformats.org/presentationml/2006/main">
   <p:cSld>
     <p:spTree>
@@ -33545,7 +34096,7 @@
 </p:sld>
 </file>
 
-<file path=ppt/slides/slide6.xml><?xml version="1.0" encoding="utf-8"?>
+<file path=ppt/slides/slide7.xml><?xml version="1.0" encoding="utf-8"?>
 <p:sld xmlns:a="http://schemas.openxmlformats.org/drawingml/2006/main" xmlns:r="http://schemas.openxmlformats.org/officeDocument/2006/relationships" xmlns:p="http://schemas.openxmlformats.org/presentationml/2006/main">
   <p:cSld>
     <p:spTree>
@@ -34329,7 +34880,7 @@
 </p:sld>
 </file>
 
-<file path=ppt/slides/slide7.xml><?xml version="1.0" encoding="utf-8"?>
+<file path=ppt/slides/slide8.xml><?xml version="1.0" encoding="utf-8"?>
 <p:sld xmlns:a="http://schemas.openxmlformats.org/drawingml/2006/main" xmlns:r="http://schemas.openxmlformats.org/officeDocument/2006/relationships" xmlns:p="http://schemas.openxmlformats.org/presentationml/2006/main">
   <p:cSld>
     <p:spTree>
@@ -36327,7 +36878,7 @@
 </p:sld>
 </file>
 
-<file path=ppt/slides/slide8.xml><?xml version="1.0" encoding="utf-8"?>
+<file path=ppt/slides/slide9.xml><?xml version="1.0" encoding="utf-8"?>
 <p:sld xmlns:a="http://schemas.openxmlformats.org/drawingml/2006/main" xmlns:r="http://schemas.openxmlformats.org/officeDocument/2006/relationships" xmlns:p="http://schemas.openxmlformats.org/presentationml/2006/main">
   <p:cSld>
     <p:spTree>
@@ -36404,334 +36955,6 @@
   <p:clrMapOvr>
     <a:masterClrMapping/>
   </p:clrMapOvr>
-</p:sld>
-</file>
-
-<file path=ppt/slides/slide9.xml><?xml version="1.0" encoding="utf-8"?>
-<p:sld xmlns:a="http://schemas.openxmlformats.org/drawingml/2006/main" xmlns:r="http://schemas.openxmlformats.org/officeDocument/2006/relationships" xmlns:p="http://schemas.openxmlformats.org/presentationml/2006/main">
-  <p:cSld>
-    <p:spTree>
-      <p:nvGrpSpPr>
-        <p:cNvPr id="1" name="">
-          <a:extLst>
-            <a:ext uri="{FF2B5EF4-FFF2-40B4-BE49-F238E27FC236}">
-              <a16:creationId xmlns:a16="http://schemas.microsoft.com/office/drawing/2014/main" id="{2571FB46-CD7F-56F2-1278-63CD2BBA6D43}"/>
-            </a:ext>
-          </a:extLst>
-        </p:cNvPr>
-        <p:cNvGrpSpPr/>
-        <p:nvPr/>
-      </p:nvGrpSpPr>
-      <p:grpSpPr>
-        <a:xfrm>
-          <a:off x="0" y="0"/>
-          <a:ext cx="0" cy="0"/>
-          <a:chOff x="0" y="0"/>
-          <a:chExt cx="0" cy="0"/>
-        </a:xfrm>
-      </p:grpSpPr>
-      <p:sp>
-        <p:nvSpPr>
-          <p:cNvPr id="2" name="Title 1">
-            <a:extLst>
-              <a:ext uri="{FF2B5EF4-FFF2-40B4-BE49-F238E27FC236}">
-                <a16:creationId xmlns:a16="http://schemas.microsoft.com/office/drawing/2014/main" id="{EEAE7AFC-7430-F378-C0C9-AB6FB6301149}"/>
-              </a:ext>
-            </a:extLst>
-          </p:cNvPr>
-          <p:cNvSpPr>
-            <a:spLocks noGrp="1"/>
-          </p:cNvSpPr>
-          <p:nvPr>
-            <p:ph type="ctrTitle"/>
-          </p:nvPr>
-        </p:nvSpPr>
-        <p:spPr/>
-        <p:txBody>
-          <a:bodyPr/>
-          <a:lstStyle/>
-          <a:p>
-            <a:r>
-              <a:rPr lang="en-US" sz="2800" b="1" err="1">
-                <a:ea typeface="+mj-lt"/>
-                <a:cs typeface="+mj-lt"/>
-              </a:rPr>
-              <a:t>Aktiivsete</a:t>
-            </a:r>
-            <a:r>
-              <a:rPr lang="en-US" sz="2800" b="1">
-                <a:ea typeface="+mj-lt"/>
-                <a:cs typeface="+mj-lt"/>
-              </a:rPr>
-              <a:t> </a:t>
-            </a:r>
-            <a:r>
-              <a:rPr lang="en-US" sz="2800" b="1" err="1">
-                <a:ea typeface="+mj-lt"/>
-                <a:cs typeface="+mj-lt"/>
-              </a:rPr>
-              <a:t>töötajate</a:t>
-            </a:r>
-            <a:r>
-              <a:rPr lang="en-US" sz="2800" b="1">
-                <a:ea typeface="+mj-lt"/>
-                <a:cs typeface="+mj-lt"/>
-              </a:rPr>
-              <a:t> </a:t>
-            </a:r>
-            <a:r>
-              <a:rPr lang="en-US" sz="2800" b="1" err="1">
-                <a:ea typeface="+mj-lt"/>
-                <a:cs typeface="+mj-lt"/>
-              </a:rPr>
-              <a:t>arv</a:t>
-            </a:r>
-            <a:r>
-              <a:rPr lang="en-US" sz="2800" b="1">
-                <a:ea typeface="+mj-lt"/>
-                <a:cs typeface="+mj-lt"/>
-              </a:rPr>
-              <a:t> </a:t>
-            </a:r>
-            <a:r>
-              <a:rPr lang="en-US" sz="2800" b="1" err="1">
-                <a:ea typeface="+mj-lt"/>
-                <a:cs typeface="+mj-lt"/>
-              </a:rPr>
-              <a:t>osakondade</a:t>
-            </a:r>
-            <a:r>
-              <a:rPr lang="en-US" sz="2800" b="1">
-                <a:ea typeface="+mj-lt"/>
-                <a:cs typeface="+mj-lt"/>
-              </a:rPr>
-              <a:t> ja </a:t>
-            </a:r>
-            <a:r>
-              <a:rPr lang="en-US" sz="2800" b="1" err="1">
-                <a:ea typeface="+mj-lt"/>
-                <a:cs typeface="+mj-lt"/>
-              </a:rPr>
-              <a:t>aja</a:t>
-            </a:r>
-            <a:r>
-              <a:rPr lang="en-US" sz="2800" b="1">
-                <a:ea typeface="+mj-lt"/>
-                <a:cs typeface="+mj-lt"/>
-              </a:rPr>
-              <a:t> </a:t>
-            </a:r>
-            <a:r>
-              <a:rPr lang="en-US" sz="2800" b="1" err="1">
-                <a:ea typeface="+mj-lt"/>
-                <a:cs typeface="+mj-lt"/>
-              </a:rPr>
-              <a:t>lõikes</a:t>
-            </a:r>
-            <a:endParaRPr lang="en-US" sz="2800" b="1" err="1">
-              <a:ea typeface="Inter Bold"/>
-            </a:endParaRPr>
-          </a:p>
-        </p:txBody>
-      </p:sp>
-      <p:sp>
-        <p:nvSpPr>
-          <p:cNvPr id="4" name="Content Placeholder 3">
-            <a:extLst>
-              <a:ext uri="{FF2B5EF4-FFF2-40B4-BE49-F238E27FC236}">
-                <a16:creationId xmlns:a16="http://schemas.microsoft.com/office/drawing/2014/main" id="{055D6F38-6BB9-6CCB-6FC0-EEFF0379C1D1}"/>
-              </a:ext>
-            </a:extLst>
-          </p:cNvPr>
-          <p:cNvSpPr>
-            <a:spLocks noGrp="1"/>
-          </p:cNvSpPr>
-          <p:nvPr>
-            <p:ph sz="quarter" idx="10"/>
-          </p:nvPr>
-        </p:nvSpPr>
-        <p:spPr/>
-        <p:txBody>
-          <a:bodyPr/>
-          <a:lstStyle/>
-          <a:p>
-            <a:pPr marL="628650" indent="-342900">
-              <a:lnSpc>
-                <a:spcPct val="100000"/>
-              </a:lnSpc>
-              <a:buClr>
-                <a:srgbClr val="121212"/>
-              </a:buClr>
-            </a:pPr>
-            <a:r>
-              <a:rPr lang="en-US" sz="2000">
-                <a:ea typeface="Inter"/>
-              </a:rPr>
-              <a:t>Risttabel</a:t>
-            </a:r>
-            <a:br>
-              <a:rPr lang="en-US"/>
-            </a:br>
-            <a:endParaRPr lang="en-US"/>
-          </a:p>
-          <a:p>
-            <a:pPr marL="1143000" lvl="1">
-              <a:lnSpc>
-                <a:spcPct val="150000"/>
-              </a:lnSpc>
-              <a:buClr>
-                <a:srgbClr val="121212"/>
-              </a:buClr>
-            </a:pPr>
-            <a:endParaRPr lang="en-US" sz="2000"/>
-          </a:p>
-          <a:p>
-            <a:pPr marL="628650" indent="-342900">
-              <a:lnSpc>
-                <a:spcPct val="150000"/>
-              </a:lnSpc>
-              <a:buClr>
-                <a:srgbClr val="121212"/>
-              </a:buClr>
-            </a:pPr>
-            <a:endParaRPr lang="en-US" sz="2000"/>
-          </a:p>
-          <a:p>
-            <a:pPr marL="1428750" lvl="2">
-              <a:lnSpc>
-                <a:spcPct val="150000"/>
-              </a:lnSpc>
-              <a:buFont typeface="Wingdings" panose="020B0502030000000004" pitchFamily="34" charset="0"/>
-              <a:buChar char="§"/>
-            </a:pPr>
-            <a:endParaRPr lang="en-US" sz="2000"/>
-          </a:p>
-          <a:p>
-            <a:pPr marL="1428750" lvl="2">
-              <a:lnSpc>
-                <a:spcPct val="150000"/>
-              </a:lnSpc>
-              <a:buFont typeface="Wingdings" panose="020B0502030000000004" pitchFamily="34" charset="0"/>
-              <a:buChar char="§"/>
-            </a:pPr>
-            <a:endParaRPr lang="en-US" sz="2000"/>
-          </a:p>
-          <a:p>
-            <a:pPr marL="514350">
-              <a:lnSpc>
-                <a:spcPct val="150000"/>
-              </a:lnSpc>
-              <a:buClr>
-                <a:srgbClr val="121212"/>
-              </a:buClr>
-            </a:pPr>
-            <a:endParaRPr lang="en-US" sz="2000"/>
-          </a:p>
-          <a:p>
-            <a:pPr marL="514350">
-              <a:lnSpc>
-                <a:spcPct val="150000"/>
-              </a:lnSpc>
-              <a:buClr>
-                <a:srgbClr val="121212"/>
-              </a:buClr>
-            </a:pPr>
-            <a:endParaRPr lang="en-US" sz="2000"/>
-          </a:p>
-        </p:txBody>
-      </p:sp>
-    </p:spTree>
-    <p:extLst>
-      <p:ext uri="{BB962C8B-B14F-4D97-AF65-F5344CB8AC3E}">
-        <p14:creationId xmlns:p14="http://schemas.microsoft.com/office/powerpoint/2010/main" val="2573875744"/>
-      </p:ext>
-    </p:extLst>
-  </p:cSld>
-  <p:clrMapOvr>
-    <a:masterClrMapping/>
-  </p:clrMapOvr>
-  <p:timing>
-    <p:tnLst>
-      <p:par>
-        <p:cTn id="1" dur="indefinite" restart="never" nodeType="tmRoot">
-          <p:childTnLst>
-            <p:seq concurrent="1" nextAc="seek">
-              <p:cTn id="2" dur="indefinite" nodeType="mainSeq">
-                <p:childTnLst>
-                  <p:par>
-                    <p:cTn id="3" fill="hold">
-                      <p:stCondLst>
-                        <p:cond delay="indefinite"/>
-                      </p:stCondLst>
-                      <p:childTnLst>
-                        <p:par>
-                          <p:cTn id="4" fill="hold">
-                            <p:stCondLst>
-                              <p:cond delay="0"/>
-                            </p:stCondLst>
-                            <p:childTnLst>
-                              <p:par>
-                                <p:cTn id="5" presetID="1" presetClass="entr" presetSubtype="0" fill="hold" grpId="0" nodeType="clickEffect">
-                                  <p:stCondLst>
-                                    <p:cond delay="0"/>
-                                  </p:stCondLst>
-                                  <p:childTnLst>
-                                    <p:set>
-                                      <p:cBhvr>
-                                        <p:cTn id="6" dur="1" fill="hold">
-                                          <p:stCondLst>
-                                            <p:cond delay="0"/>
-                                          </p:stCondLst>
-                                        </p:cTn>
-                                        <p:tgtEl>
-                                          <p:spTgt spid="4">
-                                            <p:txEl>
-                                              <p:pRg st="0" end="0"/>
-                                            </p:txEl>
-                                          </p:spTgt>
-                                        </p:tgtEl>
-                                        <p:attrNameLst>
-                                          <p:attrName>style.visibility</p:attrName>
-                                        </p:attrNameLst>
-                                      </p:cBhvr>
-                                      <p:to>
-                                        <p:strVal val="visible"/>
-                                      </p:to>
-                                    </p:set>
-                                  </p:childTnLst>
-                                </p:cTn>
-                              </p:par>
-                            </p:childTnLst>
-                          </p:cTn>
-                        </p:par>
-                      </p:childTnLst>
-                    </p:cTn>
-                  </p:par>
-                </p:childTnLst>
-              </p:cTn>
-              <p:prevCondLst>
-                <p:cond evt="onPrev" delay="0">
-                  <p:tgtEl>
-                    <p:sldTgt/>
-                  </p:tgtEl>
-                </p:cond>
-              </p:prevCondLst>
-              <p:nextCondLst>
-                <p:cond evt="onNext" delay="0">
-                  <p:tgtEl>
-                    <p:sldTgt/>
-                  </p:tgtEl>
-                </p:cond>
-              </p:nextCondLst>
-            </p:seq>
-          </p:childTnLst>
-        </p:cTn>
-      </p:par>
-    </p:tnLst>
-    <p:bldLst>
-      <p:bldP spid="4" grpId="0" build="p"/>
-    </p:bldLst>
-  </p:timing>
 </p:sld>
 </file>
 
@@ -37527,21 +37750,6 @@
 </file>
 
 <file path=customXml/item1.xml><?xml version="1.0" encoding="utf-8"?>
-<?mso-contentType ?>
-<FormTemplates xmlns="http://schemas.microsoft.com/sharepoint/v3/contenttype/forms">
-  <Display>DocumentLibraryForm</Display>
-  <Edit>DocumentLibraryForm</Edit>
-  <New>DocumentLibraryForm</New>
-</FormTemplates>
-</file>
-
-<file path=customXml/item2.xml><?xml version="1.0" encoding="utf-8"?>
-<p:properties xmlns:p="http://schemas.microsoft.com/office/2006/metadata/properties" xmlns:xsi="http://www.w3.org/2001/XMLSchema-instance" xmlns:pc="http://schemas.microsoft.com/office/infopath/2007/PartnerControls">
-  <documentManagement/>
-</p:properties>
-</file>
-
-<file path=customXml/item3.xml><?xml version="1.0" encoding="utf-8"?>
 <ct:contentTypeSchema xmlns:ct="http://schemas.microsoft.com/office/2006/metadata/contentType" xmlns:ma="http://schemas.microsoft.com/office/2006/metadata/properties/metaAttributes" ct:_="" ma:_="" ma:contentTypeName="Document" ma:contentTypeID="0x010100C4D27B8FA8976546BCD79313C588588D" ma:contentTypeVersion="8" ma:contentTypeDescription="Create a new document." ma:contentTypeScope="" ma:versionID="a112c56f6fe148a79025c76584832af0">
   <xsd:schema xmlns:xsd="http://www.w3.org/2001/XMLSchema" xmlns:xs="http://www.w3.org/2001/XMLSchema" xmlns:p="http://schemas.microsoft.com/office/2006/metadata/properties" xmlns:ns2="a1a2d923-8fea-42f1-bd41-9cdfff65694e" targetNamespace="http://schemas.microsoft.com/office/2006/metadata/properties" ma:root="true" ma:fieldsID="97c8655d467eaa9470a714421e7268c0" ns2:_="">
     <xsd:import namespace="a1a2d923-8fea-42f1-bd41-9cdfff65694e"/>
@@ -37709,24 +37917,22 @@
 </ct:contentTypeSchema>
 </file>
 
-<file path=customXml/itemProps1.xml><?xml version="1.0" encoding="utf-8"?>
-<ds:datastoreItem xmlns:ds="http://schemas.openxmlformats.org/officeDocument/2006/customXml" ds:itemID="{9DC439CA-6F1C-4005-ACA6-A52E04DEE0A7}">
-  <ds:schemaRefs>
-    <ds:schemaRef ds:uri="http://schemas.microsoft.com/sharepoint/v3/contenttype/forms"/>
-  </ds:schemaRefs>
-</ds:datastoreItem>
+<file path=customXml/item2.xml><?xml version="1.0" encoding="utf-8"?>
+<p:properties xmlns:p="http://schemas.microsoft.com/office/2006/metadata/properties" xmlns:xsi="http://www.w3.org/2001/XMLSchema-instance" xmlns:pc="http://schemas.microsoft.com/office/infopath/2007/PartnerControls">
+  <documentManagement/>
+</p:properties>
 </file>
 
-<file path=customXml/itemProps2.xml><?xml version="1.0" encoding="utf-8"?>
-<ds:datastoreItem xmlns:ds="http://schemas.openxmlformats.org/officeDocument/2006/customXml" ds:itemID="{5BDF4908-A52A-47DD-A794-6E02D71942FC}">
-  <ds:schemaRefs>
-    <ds:schemaRef ds:uri="http://schemas.microsoft.com/office/2006/metadata/properties"/>
-    <ds:schemaRef ds:uri="http://schemas.microsoft.com/office/infopath/2007/PartnerControls"/>
-  </ds:schemaRefs>
-</ds:datastoreItem>
+<file path=customXml/item3.xml><?xml version="1.0" encoding="utf-8"?>
+<?mso-contentType ?>
+<FormTemplates xmlns="http://schemas.microsoft.com/sharepoint/v3/contenttype/forms">
+  <Display>DocumentLibraryForm</Display>
+  <Edit>DocumentLibraryForm</Edit>
+  <New>DocumentLibraryForm</New>
+</FormTemplates>
 </file>
 
-<file path=customXml/itemProps3.xml><?xml version="1.0" encoding="utf-8"?>
+<file path=customXml/itemProps1.xml><?xml version="1.0" encoding="utf-8"?>
 <ds:datastoreItem xmlns:ds="http://schemas.openxmlformats.org/officeDocument/2006/customXml" ds:itemID="{9CF4F972-2392-44D0-AA45-41AC4FDC4A59}">
   <ds:schemaRefs>
     <ds:schemaRef ds:uri="a1a2d923-8fea-42f1-bd41-9cdfff65694e"/>
@@ -37744,6 +37950,23 @@
 </ds:datastoreItem>
 </file>
 
+<file path=customXml/itemProps2.xml><?xml version="1.0" encoding="utf-8"?>
+<ds:datastoreItem xmlns:ds="http://schemas.openxmlformats.org/officeDocument/2006/customXml" ds:itemID="{5BDF4908-A52A-47DD-A794-6E02D71942FC}">
+  <ds:schemaRefs>
+    <ds:schemaRef ds:uri="http://schemas.microsoft.com/office/2006/metadata/properties"/>
+    <ds:schemaRef ds:uri="http://schemas.microsoft.com/office/infopath/2007/PartnerControls"/>
+  </ds:schemaRefs>
+</ds:datastoreItem>
+</file>
+
+<file path=customXml/itemProps3.xml><?xml version="1.0" encoding="utf-8"?>
+<ds:datastoreItem xmlns:ds="http://schemas.openxmlformats.org/officeDocument/2006/customXml" ds:itemID="{9DC439CA-6F1C-4005-ACA6-A52E04DEE0A7}">
+  <ds:schemaRefs>
+    <ds:schemaRef ds:uri="http://schemas.microsoft.com/sharepoint/v3/contenttype/forms"/>
+  </ds:schemaRefs>
+</ds:datastoreItem>
+</file>
+
 <file path=docMetadata/LabelInfo.xml><?xml version="1.0" encoding="utf-8"?>
 <clbl:labelList xmlns:clbl="http://schemas.microsoft.com/office/2020/mipLabelMetadata">
   <clbl:label id="{4fc69ca6-ce6b-4059-8ad9-2049c3c135b3}" enabled="0" method="" siteId="{4fc69ca6-ce6b-4059-8ad9-2049c3c135b3}" removed="1"/>

--- a/Materjalid/Day5 Employee report DAX/5-paev-andmetarkus-esitlus.pptx
+++ b/Materjalid/Day5 Employee report DAX/5-paev-andmetarkus-esitlus.pptx
@@ -5,10 +5,10 @@
     <p:sldMasterId id="2147483648" r:id="rId4"/>
   </p:sldMasterIdLst>
   <p:notesMasterIdLst>
-    <p:notesMasterId r:id="rId23"/>
+    <p:notesMasterId r:id="rId25"/>
   </p:notesMasterIdLst>
   <p:handoutMasterIdLst>
-    <p:handoutMasterId r:id="rId24"/>
+    <p:handoutMasterId r:id="rId26"/>
   </p:handoutMasterIdLst>
   <p:sldIdLst>
     <p:sldId id="417" r:id="rId5"/>
@@ -16,45 +16,47 @@
     <p:sldId id="610" r:id="rId7"/>
     <p:sldId id="645" r:id="rId8"/>
     <p:sldId id="658" r:id="rId9"/>
-    <p:sldId id="665" r:id="rId10"/>
-    <p:sldId id="666" r:id="rId11"/>
-    <p:sldId id="664" r:id="rId12"/>
-    <p:sldId id="594" r:id="rId13"/>
-    <p:sldId id="662" r:id="rId14"/>
-    <p:sldId id="596" r:id="rId15"/>
-    <p:sldId id="659" r:id="rId16"/>
-    <p:sldId id="600" r:id="rId17"/>
-    <p:sldId id="609" r:id="rId18"/>
-    <p:sldId id="661" r:id="rId19"/>
-    <p:sldId id="608" r:id="rId20"/>
-    <p:sldId id="660" r:id="rId21"/>
-    <p:sldId id="606" r:id="rId22"/>
+    <p:sldId id="667" r:id="rId10"/>
+    <p:sldId id="665" r:id="rId11"/>
+    <p:sldId id="668" r:id="rId12"/>
+    <p:sldId id="666" r:id="rId13"/>
+    <p:sldId id="664" r:id="rId14"/>
+    <p:sldId id="594" r:id="rId15"/>
+    <p:sldId id="662" r:id="rId16"/>
+    <p:sldId id="596" r:id="rId17"/>
+    <p:sldId id="659" r:id="rId18"/>
+    <p:sldId id="600" r:id="rId19"/>
+    <p:sldId id="609" r:id="rId20"/>
+    <p:sldId id="661" r:id="rId21"/>
+    <p:sldId id="608" r:id="rId22"/>
+    <p:sldId id="660" r:id="rId23"/>
+    <p:sldId id="606" r:id="rId24"/>
   </p:sldIdLst>
   <p:sldSz cx="12192000" cy="6858000"/>
   <p:notesSz cx="6858000" cy="9144000"/>
   <p:embeddedFontLst>
     <p:embeddedFont>
       <p:font typeface="Consolas" panose="020B0609020204030204" pitchFamily="49" charset="0"/>
-      <p:regular r:id="rId25"/>
-      <p:bold r:id="rId26"/>
-      <p:italic r:id="rId27"/>
-      <p:boldItalic r:id="rId28"/>
+      <p:regular r:id="rId27"/>
+      <p:bold r:id="rId28"/>
+      <p:italic r:id="rId29"/>
+      <p:boldItalic r:id="rId30"/>
     </p:embeddedFont>
     <p:embeddedFont>
       <p:font typeface="Inter" panose="020B0604020202020204" charset="0"/>
-      <p:regular r:id="rId29"/>
-      <p:bold r:id="rId30"/>
-      <p:italic r:id="rId31"/>
-      <p:boldItalic r:id="rId32"/>
+      <p:regular r:id="rId31"/>
+      <p:bold r:id="rId32"/>
+      <p:italic r:id="rId33"/>
+      <p:boldItalic r:id="rId34"/>
     </p:embeddedFont>
     <p:embeddedFont>
       <p:font typeface="Inter Bold" panose="020B0604020202020204" charset="0"/>
-      <p:bold r:id="rId33"/>
+      <p:bold r:id="rId35"/>
     </p:embeddedFont>
     <p:embeddedFont>
       <p:font typeface="Poppins SemiBold" panose="00000700000000000000" pitchFamily="2" charset="0"/>
-      <p:bold r:id="rId34"/>
-      <p:boldItalic r:id="rId35"/>
+      <p:bold r:id="rId36"/>
+      <p:boldItalic r:id="rId37"/>
     </p:embeddedFont>
   </p:embeddedFontLst>
   <p:defaultTextStyle>
@@ -23947,6 +23949,1398 @@
           <p:cNvPr id="2" name="Title 1">
             <a:extLst>
               <a:ext uri="{FF2B5EF4-FFF2-40B4-BE49-F238E27FC236}">
+                <a16:creationId xmlns:a16="http://schemas.microsoft.com/office/drawing/2014/main" id="{06904646-8734-75D9-6232-82628B60CD02}"/>
+              </a:ext>
+            </a:extLst>
+          </p:cNvPr>
+          <p:cNvSpPr>
+            <a:spLocks noGrp="1"/>
+          </p:cNvSpPr>
+          <p:nvPr>
+            <p:ph type="ctrTitle"/>
+          </p:nvPr>
+        </p:nvSpPr>
+        <p:spPr/>
+        <p:txBody>
+          <a:bodyPr/>
+          <a:lstStyle/>
+          <a:p>
+            <a:r>
+              <a:rPr lang="en-GB" dirty="0" err="1"/>
+              <a:t>Kestuse</a:t>
+            </a:r>
+            <a:r>
+              <a:rPr lang="en-GB" dirty="0"/>
+              <a:t> </a:t>
+            </a:r>
+            <a:r>
+              <a:rPr lang="en-GB" dirty="0" err="1"/>
+              <a:t>grupp</a:t>
+            </a:r>
+            <a:r>
+              <a:rPr lang="en-GB" dirty="0"/>
+              <a:t>: loo </a:t>
+            </a:r>
+            <a:r>
+              <a:rPr lang="en-GB" dirty="0" err="1"/>
+              <a:t>tabelid</a:t>
+            </a:r>
+            <a:r>
+              <a:rPr lang="en-GB" dirty="0"/>
+              <a:t> </a:t>
+            </a:r>
+            <a:r>
+              <a:rPr lang="en-GB" dirty="0" err="1"/>
+              <a:t>ja</a:t>
+            </a:r>
+            <a:r>
+              <a:rPr lang="en-GB" dirty="0"/>
+              <a:t> tee </a:t>
+            </a:r>
+            <a:r>
+              <a:rPr lang="en-GB" dirty="0" err="1"/>
+              <a:t>seosed</a:t>
+            </a:r>
+            <a:endParaRPr lang="en-GB" dirty="0"/>
+          </a:p>
+        </p:txBody>
+      </p:sp>
+      <p:sp>
+        <p:nvSpPr>
+          <p:cNvPr id="3" name="Content Placeholder 2">
+            <a:extLst>
+              <a:ext uri="{FF2B5EF4-FFF2-40B4-BE49-F238E27FC236}">
+                <a16:creationId xmlns:a16="http://schemas.microsoft.com/office/drawing/2014/main" id="{F0467C62-363C-7458-ADB8-BD7878BA64F3}"/>
+              </a:ext>
+            </a:extLst>
+          </p:cNvPr>
+          <p:cNvSpPr>
+            <a:spLocks noGrp="1"/>
+          </p:cNvSpPr>
+          <p:nvPr>
+            <p:ph sz="quarter" idx="10"/>
+          </p:nvPr>
+        </p:nvSpPr>
+        <p:spPr/>
+        <p:txBody>
+          <a:bodyPr/>
+          <a:lstStyle/>
+          <a:p>
+            <a:r>
+              <a:rPr lang="en-GB" dirty="0"/>
+              <a:t>Veerg </a:t>
+            </a:r>
+            <a:r>
+              <a:rPr lang="en-GB" dirty="0" err="1"/>
+              <a:t>fact_activity</a:t>
+            </a:r>
+            <a:r>
+              <a:rPr lang="en-GB" dirty="0"/>
+              <a:t> </a:t>
+            </a:r>
+            <a:r>
+              <a:rPr lang="en-GB" dirty="0" err="1"/>
+              <a:t>tabelis</a:t>
+            </a:r>
+            <a:endParaRPr lang="en-GB" dirty="0"/>
+          </a:p>
+        </p:txBody>
+      </p:sp>
+      <p:sp>
+        <p:nvSpPr>
+          <p:cNvPr id="4" name="Content Placeholder 3">
+            <a:extLst>
+              <a:ext uri="{FF2B5EF4-FFF2-40B4-BE49-F238E27FC236}">
+                <a16:creationId xmlns:a16="http://schemas.microsoft.com/office/drawing/2014/main" id="{92CD1B46-944E-F33C-04D2-524DC30ECC29}"/>
+              </a:ext>
+            </a:extLst>
+          </p:cNvPr>
+          <p:cNvSpPr>
+            <a:spLocks noGrp="1"/>
+          </p:cNvSpPr>
+          <p:nvPr>
+            <p:ph sz="quarter" idx="11"/>
+          </p:nvPr>
+        </p:nvSpPr>
+        <p:spPr/>
+        <p:txBody>
+          <a:bodyPr/>
+          <a:lstStyle/>
+          <a:p>
+            <a:r>
+              <a:rPr lang="en-GB" dirty="0" err="1"/>
+              <a:t>Kestuse</a:t>
+            </a:r>
+            <a:r>
+              <a:rPr lang="en-GB" dirty="0"/>
+              <a:t> </a:t>
+            </a:r>
+            <a:r>
+              <a:rPr lang="en-GB" dirty="0" err="1"/>
+              <a:t>grupp</a:t>
+            </a:r>
+            <a:r>
+              <a:rPr lang="en-GB" dirty="0"/>
+              <a:t> </a:t>
+            </a:r>
+            <a:r>
+              <a:rPr lang="en-GB" dirty="0" err="1"/>
+              <a:t>dimensioon</a:t>
+            </a:r>
+            <a:endParaRPr lang="en-GB" dirty="0"/>
+          </a:p>
+        </p:txBody>
+      </p:sp>
+      <p:sp>
+        <p:nvSpPr>
+          <p:cNvPr id="6" name="TextBox 5">
+            <a:extLst>
+              <a:ext uri="{FF2B5EF4-FFF2-40B4-BE49-F238E27FC236}">
+                <a16:creationId xmlns:a16="http://schemas.microsoft.com/office/drawing/2014/main" id="{19511DA6-665D-284C-E57E-4A00AE5772D4}"/>
+              </a:ext>
+            </a:extLst>
+          </p:cNvPr>
+          <p:cNvSpPr txBox="1"/>
+          <p:nvPr/>
+        </p:nvSpPr>
+        <p:spPr>
+          <a:xfrm>
+            <a:off x="405384" y="1629120"/>
+            <a:ext cx="6096000" cy="2502480"/>
+          </a:xfrm>
+          <a:prstGeom prst="rect">
+            <a:avLst/>
+          </a:prstGeom>
+          <a:noFill/>
+        </p:spPr>
+        <p:txBody>
+          <a:bodyPr wrap="square">
+            <a:spAutoFit/>
+          </a:bodyPr>
+          <a:lstStyle/>
+          <a:p>
+            <a:pPr>
+              <a:lnSpc>
+                <a:spcPct val="100000"/>
+              </a:lnSpc>
+              <a:buNone/>
+            </a:pPr>
+            <a:r>
+              <a:rPr lang="en-GB" sz="1800" b="0" dirty="0" err="1">
+                <a:solidFill>
+                  <a:schemeClr val="tx1"/>
+                </a:solidFill>
+                <a:effectLst/>
+                <a:latin typeface="+mn-lt"/>
+              </a:rPr>
+              <a:t>Kestuse</a:t>
+            </a:r>
+            <a:r>
+              <a:rPr lang="en-GB" sz="1800" b="0" dirty="0">
+                <a:solidFill>
+                  <a:schemeClr val="tx1"/>
+                </a:solidFill>
+                <a:effectLst/>
+                <a:latin typeface="+mn-lt"/>
+              </a:rPr>
+              <a:t> </a:t>
+            </a:r>
+            <a:r>
+              <a:rPr lang="en-GB" sz="1800" b="0" dirty="0" err="1">
+                <a:solidFill>
+                  <a:schemeClr val="tx1"/>
+                </a:solidFill>
+                <a:effectLst/>
+                <a:latin typeface="+mn-lt"/>
+              </a:rPr>
+              <a:t>grupp</a:t>
+            </a:r>
+            <a:r>
+              <a:rPr lang="en-GB" sz="1800" b="0" dirty="0">
+                <a:solidFill>
+                  <a:schemeClr val="tx1"/>
+                </a:solidFill>
+                <a:effectLst/>
+                <a:latin typeface="+mn-lt"/>
+              </a:rPr>
+              <a:t> = IF (</a:t>
+            </a:r>
+          </a:p>
+          <a:p>
+            <a:pPr>
+              <a:lnSpc>
+                <a:spcPct val="100000"/>
+              </a:lnSpc>
+              <a:buNone/>
+            </a:pPr>
+            <a:r>
+              <a:rPr lang="en-GB" sz="1800" b="0" dirty="0">
+                <a:solidFill>
+                  <a:schemeClr val="tx1"/>
+                </a:solidFill>
+                <a:effectLst/>
+                <a:latin typeface="+mn-lt"/>
+              </a:rPr>
+              <a:t>    ISBLANK ( </a:t>
+            </a:r>
+            <a:r>
+              <a:rPr lang="en-GB" sz="1800" b="0" dirty="0" err="1">
+                <a:solidFill>
+                  <a:schemeClr val="tx1"/>
+                </a:solidFill>
+                <a:effectLst/>
+                <a:latin typeface="+mn-lt"/>
+              </a:rPr>
+              <a:t>fact_activity</a:t>
+            </a:r>
+            <a:r>
+              <a:rPr lang="en-GB" sz="1800" b="0" dirty="0">
+                <a:solidFill>
+                  <a:schemeClr val="tx1"/>
+                </a:solidFill>
+                <a:effectLst/>
+                <a:latin typeface="+mn-lt"/>
+              </a:rPr>
+              <a:t>[</a:t>
+            </a:r>
+            <a:r>
+              <a:rPr lang="en-GB" sz="1800" b="0" dirty="0" err="1">
+                <a:solidFill>
+                  <a:schemeClr val="tx1"/>
+                </a:solidFill>
+                <a:effectLst/>
+                <a:latin typeface="+mn-lt"/>
+              </a:rPr>
+              <a:t>Alguskuupäev</a:t>
+            </a:r>
+            <a:r>
+              <a:rPr lang="en-GB" sz="1800" b="0" dirty="0">
+                <a:solidFill>
+                  <a:schemeClr val="tx1"/>
+                </a:solidFill>
+                <a:effectLst/>
+                <a:latin typeface="+mn-lt"/>
+              </a:rPr>
+              <a:t>] ) || ISBLANK ( </a:t>
+            </a:r>
+            <a:r>
+              <a:rPr lang="en-GB" sz="1800" b="0" dirty="0" err="1">
+                <a:solidFill>
+                  <a:schemeClr val="tx1"/>
+                </a:solidFill>
+                <a:effectLst/>
+                <a:latin typeface="+mn-lt"/>
+              </a:rPr>
+              <a:t>fact_activity</a:t>
+            </a:r>
+            <a:r>
+              <a:rPr lang="en-GB" sz="1800" b="0" dirty="0">
+                <a:solidFill>
+                  <a:schemeClr val="tx1"/>
+                </a:solidFill>
+                <a:effectLst/>
+                <a:latin typeface="+mn-lt"/>
+              </a:rPr>
+              <a:t>[</a:t>
+            </a:r>
+            <a:r>
+              <a:rPr lang="en-GB" sz="1800" b="0" dirty="0" err="1">
+                <a:solidFill>
+                  <a:schemeClr val="tx1"/>
+                </a:solidFill>
+                <a:effectLst/>
+                <a:latin typeface="+mn-lt"/>
+              </a:rPr>
+              <a:t>Lõppkuupäev</a:t>
+            </a:r>
+            <a:r>
+              <a:rPr lang="en-GB" sz="1800" b="0" dirty="0">
+                <a:solidFill>
+                  <a:schemeClr val="tx1"/>
+                </a:solidFill>
+                <a:effectLst/>
+                <a:latin typeface="+mn-lt"/>
+              </a:rPr>
+              <a:t>] ),</a:t>
+            </a:r>
+          </a:p>
+          <a:p>
+            <a:pPr>
+              <a:lnSpc>
+                <a:spcPct val="100000"/>
+              </a:lnSpc>
+              <a:buNone/>
+            </a:pPr>
+            <a:r>
+              <a:rPr lang="en-GB" sz="1800" b="0" dirty="0">
+                <a:solidFill>
+                  <a:schemeClr val="tx1"/>
+                </a:solidFill>
+                <a:effectLst/>
+                <a:latin typeface="+mn-lt"/>
+              </a:rPr>
+              <a:t>    "</a:t>
+            </a:r>
+            <a:r>
+              <a:rPr lang="en-GB" sz="1800" b="0" dirty="0" err="1">
+                <a:solidFill>
+                  <a:schemeClr val="tx1"/>
+                </a:solidFill>
+                <a:effectLst/>
+                <a:latin typeface="+mn-lt"/>
+              </a:rPr>
+              <a:t>Kuupäev</a:t>
+            </a:r>
+            <a:r>
+              <a:rPr lang="en-GB" sz="1800" b="0" dirty="0">
+                <a:solidFill>
+                  <a:schemeClr val="tx1"/>
+                </a:solidFill>
+                <a:effectLst/>
+                <a:latin typeface="+mn-lt"/>
+              </a:rPr>
+              <a:t> </a:t>
+            </a:r>
+            <a:r>
+              <a:rPr lang="en-GB" sz="1800" b="0" dirty="0" err="1">
+                <a:solidFill>
+                  <a:schemeClr val="tx1"/>
+                </a:solidFill>
+                <a:effectLst/>
+                <a:latin typeface="+mn-lt"/>
+              </a:rPr>
+              <a:t>puudub</a:t>
+            </a:r>
+            <a:r>
+              <a:rPr lang="en-GB" sz="1800" b="0" dirty="0">
+                <a:solidFill>
+                  <a:schemeClr val="tx1"/>
+                </a:solidFill>
+                <a:effectLst/>
+                <a:latin typeface="+mn-lt"/>
+              </a:rPr>
+              <a:t>",</a:t>
+            </a:r>
+          </a:p>
+          <a:p>
+            <a:pPr>
+              <a:lnSpc>
+                <a:spcPct val="100000"/>
+              </a:lnSpc>
+              <a:buNone/>
+            </a:pPr>
+            <a:r>
+              <a:rPr lang="en-GB" sz="1800" b="0" dirty="0">
+                <a:solidFill>
+                  <a:schemeClr val="tx1"/>
+                </a:solidFill>
+                <a:effectLst/>
+                <a:latin typeface="+mn-lt"/>
+              </a:rPr>
+              <a:t>    VAR </a:t>
+            </a:r>
+            <a:r>
+              <a:rPr lang="en-GB" sz="1800" b="0" dirty="0" err="1">
+                <a:solidFill>
+                  <a:schemeClr val="tx1"/>
+                </a:solidFill>
+                <a:effectLst/>
+                <a:latin typeface="+mn-lt"/>
+              </a:rPr>
+              <a:t>Paevi</a:t>
+            </a:r>
+            <a:r>
+              <a:rPr lang="en-GB" sz="1800" b="0" dirty="0">
+                <a:solidFill>
+                  <a:schemeClr val="tx1"/>
+                </a:solidFill>
+                <a:effectLst/>
+                <a:latin typeface="+mn-lt"/>
+              </a:rPr>
+              <a:t> =</a:t>
+            </a:r>
+          </a:p>
+          <a:p>
+            <a:pPr>
+              <a:lnSpc>
+                <a:spcPct val="100000"/>
+              </a:lnSpc>
+              <a:buNone/>
+            </a:pPr>
+            <a:r>
+              <a:rPr lang="en-GB" sz="1800" b="0" dirty="0">
+                <a:solidFill>
+                  <a:schemeClr val="tx1"/>
+                </a:solidFill>
+                <a:effectLst/>
+                <a:latin typeface="+mn-lt"/>
+              </a:rPr>
+              <a:t>        DATEDIFF ( </a:t>
+            </a:r>
+            <a:r>
+              <a:rPr lang="en-GB" sz="1800" b="0" dirty="0" err="1">
+                <a:solidFill>
+                  <a:schemeClr val="tx1"/>
+                </a:solidFill>
+                <a:effectLst/>
+                <a:latin typeface="+mn-lt"/>
+              </a:rPr>
+              <a:t>fact_activity</a:t>
+            </a:r>
+            <a:r>
+              <a:rPr lang="en-GB" sz="1800" b="0" dirty="0">
+                <a:solidFill>
+                  <a:schemeClr val="tx1"/>
+                </a:solidFill>
+                <a:effectLst/>
+                <a:latin typeface="+mn-lt"/>
+              </a:rPr>
+              <a:t>[</a:t>
+            </a:r>
+            <a:r>
+              <a:rPr lang="en-GB" sz="1800" b="0" dirty="0" err="1">
+                <a:solidFill>
+                  <a:schemeClr val="tx1"/>
+                </a:solidFill>
+                <a:effectLst/>
+                <a:latin typeface="+mn-lt"/>
+              </a:rPr>
+              <a:t>Alguskuupäev</a:t>
+            </a:r>
+            <a:r>
+              <a:rPr lang="en-GB" sz="1800" b="0" dirty="0">
+                <a:solidFill>
+                  <a:schemeClr val="tx1"/>
+                </a:solidFill>
+                <a:effectLst/>
+                <a:latin typeface="+mn-lt"/>
+              </a:rPr>
+              <a:t>], </a:t>
+            </a:r>
+            <a:r>
+              <a:rPr lang="en-GB" sz="1800" b="0" dirty="0" err="1">
+                <a:solidFill>
+                  <a:schemeClr val="tx1"/>
+                </a:solidFill>
+                <a:effectLst/>
+                <a:latin typeface="+mn-lt"/>
+              </a:rPr>
+              <a:t>fact_activity</a:t>
+            </a:r>
+            <a:r>
+              <a:rPr lang="en-GB" sz="1800" b="0" dirty="0">
+                <a:solidFill>
+                  <a:schemeClr val="tx1"/>
+                </a:solidFill>
+                <a:effectLst/>
+                <a:latin typeface="+mn-lt"/>
+              </a:rPr>
+              <a:t>[</a:t>
+            </a:r>
+            <a:r>
+              <a:rPr lang="en-GB" sz="1800" b="0" dirty="0" err="1">
+                <a:solidFill>
+                  <a:schemeClr val="tx1"/>
+                </a:solidFill>
+                <a:effectLst/>
+                <a:latin typeface="+mn-lt"/>
+              </a:rPr>
+              <a:t>Lõppkuupäev</a:t>
+            </a:r>
+            <a:r>
+              <a:rPr lang="en-GB" sz="1800" b="0" dirty="0">
+                <a:solidFill>
+                  <a:schemeClr val="tx1"/>
+                </a:solidFill>
+                <a:effectLst/>
+                <a:latin typeface="+mn-lt"/>
+              </a:rPr>
+              <a:t>], DAY )</a:t>
+            </a:r>
+          </a:p>
+          <a:p>
+            <a:pPr>
+              <a:lnSpc>
+                <a:spcPct val="100000"/>
+              </a:lnSpc>
+              <a:buNone/>
+            </a:pPr>
+            <a:r>
+              <a:rPr lang="en-GB" sz="1800" b="0" dirty="0">
+                <a:solidFill>
+                  <a:schemeClr val="tx1"/>
+                </a:solidFill>
+                <a:effectLst/>
+                <a:latin typeface="+mn-lt"/>
+              </a:rPr>
+              <a:t>    RETURN</a:t>
+            </a:r>
+          </a:p>
+          <a:p>
+            <a:pPr>
+              <a:lnSpc>
+                <a:spcPct val="100000"/>
+              </a:lnSpc>
+              <a:buNone/>
+            </a:pPr>
+            <a:r>
+              <a:rPr lang="en-GB" sz="1800" b="0" dirty="0">
+                <a:solidFill>
+                  <a:schemeClr val="tx1"/>
+                </a:solidFill>
+                <a:effectLst/>
+                <a:latin typeface="+mn-lt"/>
+              </a:rPr>
+              <a:t>        SWITCH (</a:t>
+            </a:r>
+          </a:p>
+          <a:p>
+            <a:pPr>
+              <a:lnSpc>
+                <a:spcPct val="100000"/>
+              </a:lnSpc>
+              <a:buNone/>
+            </a:pPr>
+            <a:r>
+              <a:rPr lang="en-GB" sz="1800" b="0" dirty="0">
+                <a:solidFill>
+                  <a:schemeClr val="tx1"/>
+                </a:solidFill>
+                <a:effectLst/>
+                <a:latin typeface="+mn-lt"/>
+              </a:rPr>
+              <a:t>            TRUE (),</a:t>
+            </a:r>
+          </a:p>
+          <a:p>
+            <a:pPr>
+              <a:lnSpc>
+                <a:spcPct val="100000"/>
+              </a:lnSpc>
+              <a:buNone/>
+            </a:pPr>
+            <a:r>
+              <a:rPr lang="en-GB" sz="1800" b="0" dirty="0">
+                <a:solidFill>
+                  <a:schemeClr val="tx1"/>
+                </a:solidFill>
+                <a:effectLst/>
+                <a:latin typeface="+mn-lt"/>
+              </a:rPr>
+              <a:t>            </a:t>
+            </a:r>
+            <a:r>
+              <a:rPr lang="en-GB" sz="1800" b="0" dirty="0" err="1">
+                <a:solidFill>
+                  <a:schemeClr val="tx1"/>
+                </a:solidFill>
+                <a:effectLst/>
+                <a:latin typeface="+mn-lt"/>
+              </a:rPr>
+              <a:t>Paevi</a:t>
+            </a:r>
+            <a:r>
+              <a:rPr lang="en-GB" sz="1800" b="0" dirty="0">
+                <a:solidFill>
+                  <a:schemeClr val="tx1"/>
+                </a:solidFill>
+                <a:effectLst/>
+                <a:latin typeface="+mn-lt"/>
+              </a:rPr>
+              <a:t> &lt; 365, "0-1 </a:t>
+            </a:r>
+            <a:r>
+              <a:rPr lang="en-GB" sz="1800" b="0" dirty="0" err="1">
+                <a:solidFill>
+                  <a:schemeClr val="tx1"/>
+                </a:solidFill>
+                <a:effectLst/>
+                <a:latin typeface="+mn-lt"/>
+              </a:rPr>
+              <a:t>aastat</a:t>
+            </a:r>
+            <a:r>
+              <a:rPr lang="en-GB" sz="1800" b="0" dirty="0">
+                <a:solidFill>
+                  <a:schemeClr val="tx1"/>
+                </a:solidFill>
+                <a:effectLst/>
+                <a:latin typeface="+mn-lt"/>
+              </a:rPr>
+              <a:t>",</a:t>
+            </a:r>
+          </a:p>
+          <a:p>
+            <a:pPr>
+              <a:lnSpc>
+                <a:spcPct val="100000"/>
+              </a:lnSpc>
+              <a:buNone/>
+            </a:pPr>
+            <a:r>
+              <a:rPr lang="en-GB" sz="1800" b="0" dirty="0">
+                <a:solidFill>
+                  <a:schemeClr val="tx1"/>
+                </a:solidFill>
+                <a:effectLst/>
+                <a:latin typeface="+mn-lt"/>
+              </a:rPr>
+              <a:t>            </a:t>
+            </a:r>
+            <a:r>
+              <a:rPr lang="en-GB" sz="1800" b="0" dirty="0" err="1">
+                <a:solidFill>
+                  <a:schemeClr val="tx1"/>
+                </a:solidFill>
+                <a:effectLst/>
+                <a:latin typeface="+mn-lt"/>
+              </a:rPr>
+              <a:t>Paevi</a:t>
+            </a:r>
+            <a:r>
+              <a:rPr lang="en-GB" sz="1800" b="0" dirty="0">
+                <a:solidFill>
+                  <a:schemeClr val="tx1"/>
+                </a:solidFill>
+                <a:effectLst/>
+                <a:latin typeface="+mn-lt"/>
+              </a:rPr>
+              <a:t> &lt; 3 * 365, "1-3 </a:t>
+            </a:r>
+            <a:r>
+              <a:rPr lang="en-GB" sz="1800" b="0" dirty="0" err="1">
+                <a:solidFill>
+                  <a:schemeClr val="tx1"/>
+                </a:solidFill>
+                <a:effectLst/>
+                <a:latin typeface="+mn-lt"/>
+              </a:rPr>
+              <a:t>aastat</a:t>
+            </a:r>
+            <a:r>
+              <a:rPr lang="en-GB" sz="1800" b="0" dirty="0">
+                <a:solidFill>
+                  <a:schemeClr val="tx1"/>
+                </a:solidFill>
+                <a:effectLst/>
+                <a:latin typeface="+mn-lt"/>
+              </a:rPr>
+              <a:t>",</a:t>
+            </a:r>
+          </a:p>
+          <a:p>
+            <a:pPr>
+              <a:lnSpc>
+                <a:spcPct val="100000"/>
+              </a:lnSpc>
+              <a:buNone/>
+            </a:pPr>
+            <a:r>
+              <a:rPr lang="en-GB" sz="1800" b="0" dirty="0">
+                <a:solidFill>
+                  <a:schemeClr val="tx1"/>
+                </a:solidFill>
+                <a:effectLst/>
+                <a:latin typeface="+mn-lt"/>
+              </a:rPr>
+              <a:t>            </a:t>
+            </a:r>
+            <a:r>
+              <a:rPr lang="en-GB" sz="1800" b="0" dirty="0" err="1">
+                <a:solidFill>
+                  <a:schemeClr val="tx1"/>
+                </a:solidFill>
+                <a:effectLst/>
+                <a:latin typeface="+mn-lt"/>
+              </a:rPr>
+              <a:t>Paevi</a:t>
+            </a:r>
+            <a:r>
+              <a:rPr lang="en-GB" sz="1800" b="0" dirty="0">
+                <a:solidFill>
+                  <a:schemeClr val="tx1"/>
+                </a:solidFill>
+                <a:effectLst/>
+                <a:latin typeface="+mn-lt"/>
+              </a:rPr>
+              <a:t> &lt; 5 * 365, "3-5 </a:t>
+            </a:r>
+            <a:r>
+              <a:rPr lang="en-GB" sz="1800" b="0" dirty="0" err="1">
+                <a:solidFill>
+                  <a:schemeClr val="tx1"/>
+                </a:solidFill>
+                <a:effectLst/>
+                <a:latin typeface="+mn-lt"/>
+              </a:rPr>
+              <a:t>aastat</a:t>
+            </a:r>
+            <a:r>
+              <a:rPr lang="en-GB" sz="1800" b="0" dirty="0">
+                <a:solidFill>
+                  <a:schemeClr val="tx1"/>
+                </a:solidFill>
+                <a:effectLst/>
+                <a:latin typeface="+mn-lt"/>
+              </a:rPr>
+              <a:t>",</a:t>
+            </a:r>
+          </a:p>
+          <a:p>
+            <a:pPr>
+              <a:lnSpc>
+                <a:spcPct val="100000"/>
+              </a:lnSpc>
+              <a:buNone/>
+            </a:pPr>
+            <a:r>
+              <a:rPr lang="en-GB" sz="1800" b="0" dirty="0">
+                <a:solidFill>
+                  <a:schemeClr val="tx1"/>
+                </a:solidFill>
+                <a:effectLst/>
+                <a:latin typeface="+mn-lt"/>
+              </a:rPr>
+              <a:t>            "5+ </a:t>
+            </a:r>
+            <a:r>
+              <a:rPr lang="en-GB" sz="1800" b="0" dirty="0" err="1">
+                <a:solidFill>
+                  <a:schemeClr val="tx1"/>
+                </a:solidFill>
+                <a:effectLst/>
+                <a:latin typeface="+mn-lt"/>
+              </a:rPr>
+              <a:t>aastat</a:t>
+            </a:r>
+            <a:r>
+              <a:rPr lang="en-GB" sz="1800" b="0" dirty="0">
+                <a:solidFill>
+                  <a:schemeClr val="tx1"/>
+                </a:solidFill>
+                <a:effectLst/>
+                <a:latin typeface="+mn-lt"/>
+              </a:rPr>
+              <a:t>"</a:t>
+            </a:r>
+          </a:p>
+          <a:p>
+            <a:pPr>
+              <a:lnSpc>
+                <a:spcPct val="100000"/>
+              </a:lnSpc>
+              <a:buNone/>
+            </a:pPr>
+            <a:r>
+              <a:rPr lang="en-GB" sz="1800" b="0" dirty="0">
+                <a:solidFill>
+                  <a:schemeClr val="tx1"/>
+                </a:solidFill>
+                <a:effectLst/>
+                <a:latin typeface="+mn-lt"/>
+              </a:rPr>
+              <a:t>        )</a:t>
+            </a:r>
+          </a:p>
+          <a:p>
+            <a:pPr>
+              <a:lnSpc>
+                <a:spcPct val="100000"/>
+              </a:lnSpc>
+              <a:buNone/>
+            </a:pPr>
+            <a:r>
+              <a:rPr lang="en-GB" sz="1800" b="0" dirty="0">
+                <a:solidFill>
+                  <a:schemeClr val="tx1"/>
+                </a:solidFill>
+                <a:effectLst/>
+                <a:latin typeface="+mn-lt"/>
+              </a:rPr>
+              <a:t>)</a:t>
+            </a:r>
+            <a:endParaRPr lang="en-GB" sz="900" b="0" dirty="0">
+              <a:solidFill>
+                <a:srgbClr val="000000"/>
+              </a:solidFill>
+              <a:effectLst/>
+              <a:latin typeface="Consolas" panose="020B0609020204030204" pitchFamily="49" charset="0"/>
+            </a:endParaRPr>
+          </a:p>
+        </p:txBody>
+      </p:sp>
+      <p:sp>
+        <p:nvSpPr>
+          <p:cNvPr id="8" name="TextBox 7">
+            <a:extLst>
+              <a:ext uri="{FF2B5EF4-FFF2-40B4-BE49-F238E27FC236}">
+                <a16:creationId xmlns:a16="http://schemas.microsoft.com/office/drawing/2014/main" id="{7F83AD89-C0F7-A0B0-4459-4B68C0E45067}"/>
+              </a:ext>
+            </a:extLst>
+          </p:cNvPr>
+          <p:cNvSpPr txBox="1"/>
+          <p:nvPr/>
+        </p:nvSpPr>
+        <p:spPr>
+          <a:xfrm>
+            <a:off x="6501384" y="1629120"/>
+            <a:ext cx="6097604" cy="1983107"/>
+          </a:xfrm>
+          <a:prstGeom prst="rect">
+            <a:avLst/>
+          </a:prstGeom>
+          <a:noFill/>
+        </p:spPr>
+        <p:txBody>
+          <a:bodyPr wrap="square">
+            <a:spAutoFit/>
+          </a:bodyPr>
+          <a:lstStyle/>
+          <a:p>
+            <a:pPr>
+              <a:lnSpc>
+                <a:spcPct val="100000"/>
+              </a:lnSpc>
+              <a:buNone/>
+            </a:pPr>
+            <a:r>
+              <a:rPr lang="en-GB" sz="1800" b="0" dirty="0" err="1">
+                <a:solidFill>
+                  <a:schemeClr val="tx1"/>
+                </a:solidFill>
+                <a:effectLst/>
+                <a:latin typeface="+mn-lt"/>
+              </a:rPr>
+              <a:t>dim_kestus_grupp</a:t>
+            </a:r>
+            <a:r>
+              <a:rPr lang="en-GB" sz="1800" b="0" dirty="0">
+                <a:solidFill>
+                  <a:schemeClr val="tx1"/>
+                </a:solidFill>
+                <a:effectLst/>
+                <a:latin typeface="+mn-lt"/>
+              </a:rPr>
+              <a:t> = DATATABLE (</a:t>
+            </a:r>
+          </a:p>
+          <a:p>
+            <a:pPr>
+              <a:lnSpc>
+                <a:spcPct val="100000"/>
+              </a:lnSpc>
+              <a:buNone/>
+            </a:pPr>
+            <a:r>
+              <a:rPr lang="en-GB" sz="1800" b="0" dirty="0">
+                <a:solidFill>
+                  <a:schemeClr val="tx1"/>
+                </a:solidFill>
+                <a:effectLst/>
+                <a:latin typeface="+mn-lt"/>
+              </a:rPr>
+              <a:t>    "</a:t>
+            </a:r>
+            <a:r>
+              <a:rPr lang="en-GB" sz="1800" b="0" dirty="0" err="1">
+                <a:solidFill>
+                  <a:schemeClr val="tx1"/>
+                </a:solidFill>
+                <a:effectLst/>
+                <a:latin typeface="+mn-lt"/>
+              </a:rPr>
+              <a:t>Kestuse</a:t>
+            </a:r>
+            <a:r>
+              <a:rPr lang="en-GB" sz="1800" b="0" dirty="0">
+                <a:solidFill>
+                  <a:schemeClr val="tx1"/>
+                </a:solidFill>
+                <a:effectLst/>
+                <a:latin typeface="+mn-lt"/>
+              </a:rPr>
+              <a:t> </a:t>
+            </a:r>
+            <a:r>
+              <a:rPr lang="en-GB" sz="1800" b="0" dirty="0" err="1">
+                <a:solidFill>
+                  <a:schemeClr val="tx1"/>
+                </a:solidFill>
+                <a:effectLst/>
+                <a:latin typeface="+mn-lt"/>
+              </a:rPr>
+              <a:t>grupp</a:t>
+            </a:r>
+            <a:r>
+              <a:rPr lang="en-GB" sz="1800" b="0" dirty="0">
+                <a:solidFill>
+                  <a:schemeClr val="tx1"/>
+                </a:solidFill>
+                <a:effectLst/>
+                <a:latin typeface="+mn-lt"/>
+              </a:rPr>
+              <a:t>", STRING,</a:t>
+            </a:r>
+          </a:p>
+          <a:p>
+            <a:pPr>
+              <a:lnSpc>
+                <a:spcPct val="100000"/>
+              </a:lnSpc>
+              <a:buNone/>
+            </a:pPr>
+            <a:r>
+              <a:rPr lang="en-GB" sz="1800" b="0" dirty="0">
+                <a:solidFill>
+                  <a:schemeClr val="tx1"/>
+                </a:solidFill>
+                <a:effectLst/>
+                <a:latin typeface="+mn-lt"/>
+              </a:rPr>
+              <a:t>    "</a:t>
+            </a:r>
+            <a:r>
+              <a:rPr lang="en-GB" sz="1800" b="0" dirty="0" err="1">
+                <a:solidFill>
+                  <a:schemeClr val="tx1"/>
+                </a:solidFill>
+                <a:effectLst/>
+                <a:latin typeface="+mn-lt"/>
+              </a:rPr>
+              <a:t>Järjekord</a:t>
+            </a:r>
+            <a:r>
+              <a:rPr lang="en-GB" sz="1800" b="0" dirty="0">
+                <a:solidFill>
+                  <a:schemeClr val="tx1"/>
+                </a:solidFill>
+                <a:effectLst/>
+                <a:latin typeface="+mn-lt"/>
+              </a:rPr>
+              <a:t>", INTEGER,</a:t>
+            </a:r>
+          </a:p>
+          <a:p>
+            <a:pPr>
+              <a:lnSpc>
+                <a:spcPct val="100000"/>
+              </a:lnSpc>
+              <a:buNone/>
+            </a:pPr>
+            <a:r>
+              <a:rPr lang="en-GB" sz="1800" b="0" dirty="0">
+                <a:solidFill>
+                  <a:schemeClr val="tx1"/>
+                </a:solidFill>
+                <a:effectLst/>
+                <a:latin typeface="+mn-lt"/>
+              </a:rPr>
+              <a:t>    {</a:t>
+            </a:r>
+          </a:p>
+          <a:p>
+            <a:pPr>
+              <a:lnSpc>
+                <a:spcPct val="100000"/>
+              </a:lnSpc>
+              <a:buNone/>
+            </a:pPr>
+            <a:r>
+              <a:rPr lang="en-GB" sz="1800" b="0" dirty="0">
+                <a:solidFill>
+                  <a:schemeClr val="tx1"/>
+                </a:solidFill>
+                <a:effectLst/>
+                <a:latin typeface="+mn-lt"/>
+              </a:rPr>
+              <a:t>        { "0-1 </a:t>
+            </a:r>
+            <a:r>
+              <a:rPr lang="en-GB" sz="1800" b="0" dirty="0" err="1">
+                <a:solidFill>
+                  <a:schemeClr val="tx1"/>
+                </a:solidFill>
+                <a:effectLst/>
+                <a:latin typeface="+mn-lt"/>
+              </a:rPr>
+              <a:t>aastat</a:t>
+            </a:r>
+            <a:r>
+              <a:rPr lang="en-GB" sz="1800" b="0" dirty="0">
+                <a:solidFill>
+                  <a:schemeClr val="tx1"/>
+                </a:solidFill>
+                <a:effectLst/>
+                <a:latin typeface="+mn-lt"/>
+              </a:rPr>
+              <a:t>", 1 },</a:t>
+            </a:r>
+          </a:p>
+          <a:p>
+            <a:pPr>
+              <a:lnSpc>
+                <a:spcPct val="100000"/>
+              </a:lnSpc>
+              <a:buNone/>
+            </a:pPr>
+            <a:r>
+              <a:rPr lang="en-GB" sz="1800" b="0" dirty="0">
+                <a:solidFill>
+                  <a:schemeClr val="tx1"/>
+                </a:solidFill>
+                <a:effectLst/>
+                <a:latin typeface="+mn-lt"/>
+              </a:rPr>
+              <a:t>        { "1-3 </a:t>
+            </a:r>
+            <a:r>
+              <a:rPr lang="en-GB" sz="1800" b="0" dirty="0" err="1">
+                <a:solidFill>
+                  <a:schemeClr val="tx1"/>
+                </a:solidFill>
+                <a:effectLst/>
+                <a:latin typeface="+mn-lt"/>
+              </a:rPr>
+              <a:t>aastat</a:t>
+            </a:r>
+            <a:r>
+              <a:rPr lang="en-GB" sz="1800" b="0" dirty="0">
+                <a:solidFill>
+                  <a:schemeClr val="tx1"/>
+                </a:solidFill>
+                <a:effectLst/>
+                <a:latin typeface="+mn-lt"/>
+              </a:rPr>
+              <a:t>", 2 },</a:t>
+            </a:r>
+          </a:p>
+          <a:p>
+            <a:pPr>
+              <a:lnSpc>
+                <a:spcPct val="100000"/>
+              </a:lnSpc>
+              <a:buNone/>
+            </a:pPr>
+            <a:r>
+              <a:rPr lang="en-GB" sz="1800" b="0" dirty="0">
+                <a:solidFill>
+                  <a:schemeClr val="tx1"/>
+                </a:solidFill>
+                <a:effectLst/>
+                <a:latin typeface="+mn-lt"/>
+              </a:rPr>
+              <a:t>        { "3-5 </a:t>
+            </a:r>
+            <a:r>
+              <a:rPr lang="en-GB" sz="1800" b="0" dirty="0" err="1">
+                <a:solidFill>
+                  <a:schemeClr val="tx1"/>
+                </a:solidFill>
+                <a:effectLst/>
+                <a:latin typeface="+mn-lt"/>
+              </a:rPr>
+              <a:t>aastat</a:t>
+            </a:r>
+            <a:r>
+              <a:rPr lang="en-GB" sz="1800" b="0" dirty="0">
+                <a:solidFill>
+                  <a:schemeClr val="tx1"/>
+                </a:solidFill>
+                <a:effectLst/>
+                <a:latin typeface="+mn-lt"/>
+              </a:rPr>
+              <a:t>", 3 },</a:t>
+            </a:r>
+          </a:p>
+          <a:p>
+            <a:pPr>
+              <a:lnSpc>
+                <a:spcPct val="100000"/>
+              </a:lnSpc>
+              <a:buNone/>
+            </a:pPr>
+            <a:r>
+              <a:rPr lang="en-GB" sz="1800" b="0" dirty="0">
+                <a:solidFill>
+                  <a:schemeClr val="tx1"/>
+                </a:solidFill>
+                <a:effectLst/>
+                <a:latin typeface="+mn-lt"/>
+              </a:rPr>
+              <a:t>        { "5+ </a:t>
+            </a:r>
+            <a:r>
+              <a:rPr lang="en-GB" sz="1800" b="0" dirty="0" err="1">
+                <a:solidFill>
+                  <a:schemeClr val="tx1"/>
+                </a:solidFill>
+                <a:effectLst/>
+                <a:latin typeface="+mn-lt"/>
+              </a:rPr>
+              <a:t>aastat</a:t>
+            </a:r>
+            <a:r>
+              <a:rPr lang="en-GB" sz="1800" b="0" dirty="0">
+                <a:solidFill>
+                  <a:schemeClr val="tx1"/>
+                </a:solidFill>
+                <a:effectLst/>
+                <a:latin typeface="+mn-lt"/>
+              </a:rPr>
+              <a:t>", 4 },</a:t>
+            </a:r>
+          </a:p>
+          <a:p>
+            <a:pPr>
+              <a:lnSpc>
+                <a:spcPct val="100000"/>
+              </a:lnSpc>
+              <a:buNone/>
+            </a:pPr>
+            <a:r>
+              <a:rPr lang="en-GB" sz="1800" b="0" dirty="0">
+                <a:solidFill>
+                  <a:schemeClr val="tx1"/>
+                </a:solidFill>
+                <a:effectLst/>
+                <a:latin typeface="+mn-lt"/>
+              </a:rPr>
+              <a:t>        { "</a:t>
+            </a:r>
+            <a:r>
+              <a:rPr lang="en-GB" sz="1800" b="0" dirty="0" err="1">
+                <a:solidFill>
+                  <a:schemeClr val="tx1"/>
+                </a:solidFill>
+                <a:effectLst/>
+                <a:latin typeface="+mn-lt"/>
+              </a:rPr>
+              <a:t>Kuupäev</a:t>
+            </a:r>
+            <a:r>
+              <a:rPr lang="en-GB" sz="1800" b="0" dirty="0">
+                <a:solidFill>
+                  <a:schemeClr val="tx1"/>
+                </a:solidFill>
+                <a:effectLst/>
+                <a:latin typeface="+mn-lt"/>
+              </a:rPr>
+              <a:t> </a:t>
+            </a:r>
+            <a:r>
+              <a:rPr lang="en-GB" sz="1800" b="0" dirty="0" err="1">
+                <a:solidFill>
+                  <a:schemeClr val="tx1"/>
+                </a:solidFill>
+                <a:effectLst/>
+                <a:latin typeface="+mn-lt"/>
+              </a:rPr>
+              <a:t>puudub</a:t>
+            </a:r>
+            <a:r>
+              <a:rPr lang="en-GB" sz="1800" b="0" dirty="0">
+                <a:solidFill>
+                  <a:schemeClr val="tx1"/>
+                </a:solidFill>
+                <a:effectLst/>
+                <a:latin typeface="+mn-lt"/>
+              </a:rPr>
+              <a:t>", 5 }</a:t>
+            </a:r>
+          </a:p>
+          <a:p>
+            <a:pPr>
+              <a:lnSpc>
+                <a:spcPct val="100000"/>
+              </a:lnSpc>
+              <a:buNone/>
+            </a:pPr>
+            <a:r>
+              <a:rPr lang="en-GB" sz="1800" b="0" dirty="0">
+                <a:solidFill>
+                  <a:schemeClr val="tx1"/>
+                </a:solidFill>
+                <a:effectLst/>
+                <a:latin typeface="+mn-lt"/>
+              </a:rPr>
+              <a:t>    }</a:t>
+            </a:r>
+          </a:p>
+          <a:p>
+            <a:pPr>
+              <a:lnSpc>
+                <a:spcPct val="100000"/>
+              </a:lnSpc>
+              <a:buNone/>
+            </a:pPr>
+            <a:r>
+              <a:rPr lang="en-GB" sz="1800" b="0" dirty="0">
+                <a:solidFill>
+                  <a:schemeClr val="tx1"/>
+                </a:solidFill>
+                <a:effectLst/>
+                <a:latin typeface="+mn-lt"/>
+              </a:rPr>
+              <a:t>)</a:t>
+            </a:r>
+            <a:endParaRPr lang="en-GB" sz="900" b="0" dirty="0">
+              <a:solidFill>
+                <a:srgbClr val="000000"/>
+              </a:solidFill>
+              <a:effectLst/>
+              <a:latin typeface="Consolas" panose="020B0609020204030204" pitchFamily="49" charset="0"/>
+            </a:endParaRPr>
+          </a:p>
+        </p:txBody>
+      </p:sp>
+    </p:spTree>
+    <p:extLst>
+      <p:ext uri="{BB962C8B-B14F-4D97-AF65-F5344CB8AC3E}">
+        <p14:creationId xmlns:p14="http://schemas.microsoft.com/office/powerpoint/2010/main" val="1601335058"/>
+      </p:ext>
+    </p:extLst>
+  </p:cSld>
+  <p:clrMapOvr>
+    <a:masterClrMapping/>
+  </p:clrMapOvr>
+</p:sld>
+</file>
+
+<file path=ppt/slides/slide11.xml><?xml version="1.0" encoding="utf-8"?>
+<p:sld xmlns:a="http://schemas.openxmlformats.org/drawingml/2006/main" xmlns:r="http://schemas.openxmlformats.org/officeDocument/2006/relationships" xmlns:p="http://schemas.openxmlformats.org/presentationml/2006/main">
+  <p:cSld>
+    <p:spTree>
+      <p:nvGrpSpPr>
+        <p:cNvPr id="1" name="">
+          <a:extLst>
+            <a:ext uri="{FF2B5EF4-FFF2-40B4-BE49-F238E27FC236}">
+              <a16:creationId xmlns:a16="http://schemas.microsoft.com/office/drawing/2014/main" id="{B398607C-1CBD-609C-2DD5-82DEC1A10475}"/>
+            </a:ext>
+          </a:extLst>
+        </p:cNvPr>
+        <p:cNvGrpSpPr/>
+        <p:nvPr/>
+      </p:nvGrpSpPr>
+      <p:grpSpPr>
+        <a:xfrm>
+          <a:off x="0" y="0"/>
+          <a:ext cx="0" cy="0"/>
+          <a:chOff x="0" y="0"/>
+          <a:chExt cx="0" cy="0"/>
+        </a:xfrm>
+      </p:grpSpPr>
+      <p:sp>
+        <p:nvSpPr>
+          <p:cNvPr id="3" name="Content Placeholder 2">
+            <a:extLst>
+              <a:ext uri="{FF2B5EF4-FFF2-40B4-BE49-F238E27FC236}">
+                <a16:creationId xmlns:a16="http://schemas.microsoft.com/office/drawing/2014/main" id="{D180C9F6-9B44-EC39-A8A4-BF3AAD8C53E9}"/>
+              </a:ext>
+            </a:extLst>
+          </p:cNvPr>
+          <p:cNvSpPr>
+            <a:spLocks noGrp="1"/>
+          </p:cNvSpPr>
+          <p:nvPr>
+            <p:ph sz="quarter" idx="10"/>
+          </p:nvPr>
+        </p:nvSpPr>
+        <p:spPr/>
+        <p:txBody>
+          <a:bodyPr/>
+          <a:lstStyle/>
+          <a:p>
+            <a:pPr marL="0" indent="0">
+              <a:lnSpc>
+                <a:spcPct val="150000"/>
+              </a:lnSpc>
+              <a:buNone/>
+            </a:pPr>
+            <a:endParaRPr lang="en-US" sz="2800">
+              <a:ea typeface="Inter"/>
+            </a:endParaRPr>
+          </a:p>
+          <a:p>
+            <a:pPr marL="457200" lvl="1" indent="0">
+              <a:lnSpc>
+                <a:spcPct val="150000"/>
+              </a:lnSpc>
+              <a:buNone/>
+            </a:pPr>
+            <a:endParaRPr lang="en-US" sz="2000">
+              <a:ea typeface="Inter"/>
+            </a:endParaRPr>
+          </a:p>
+        </p:txBody>
+      </p:sp>
+      <p:sp>
+        <p:nvSpPr>
+          <p:cNvPr id="5" name="Title 4">
+            <a:extLst>
+              <a:ext uri="{FF2B5EF4-FFF2-40B4-BE49-F238E27FC236}">
+                <a16:creationId xmlns:a16="http://schemas.microsoft.com/office/drawing/2014/main" id="{C5F01C13-8AF6-57EC-09E9-26FFC7C0755E}"/>
+              </a:ext>
+            </a:extLst>
+          </p:cNvPr>
+          <p:cNvSpPr>
+            <a:spLocks noGrp="1"/>
+          </p:cNvSpPr>
+          <p:nvPr>
+            <p:ph type="ctrTitle"/>
+          </p:nvPr>
+        </p:nvSpPr>
+        <p:spPr>
+          <a:xfrm>
+            <a:off x="4283493" y="2675333"/>
+            <a:ext cx="3777666" cy="357043"/>
+          </a:xfrm>
+        </p:spPr>
+        <p:txBody>
+          <a:bodyPr/>
+          <a:lstStyle/>
+          <a:p>
+            <a:r>
+              <a:rPr lang="en-US"/>
+              <a:t>Paus 10:30-10:45</a:t>
+            </a:r>
+          </a:p>
+        </p:txBody>
+      </p:sp>
+    </p:spTree>
+    <p:extLst>
+      <p:ext uri="{BB962C8B-B14F-4D97-AF65-F5344CB8AC3E}">
+        <p14:creationId xmlns:p14="http://schemas.microsoft.com/office/powerpoint/2010/main" val="1847990754"/>
+      </p:ext>
+    </p:extLst>
+  </p:cSld>
+  <p:clrMapOvr>
+    <a:masterClrMapping/>
+  </p:clrMapOvr>
+</p:sld>
+</file>
+
+<file path=ppt/slides/slide12.xml><?xml version="1.0" encoding="utf-8"?>
+<p:sld xmlns:a="http://schemas.openxmlformats.org/drawingml/2006/main" xmlns:r="http://schemas.openxmlformats.org/officeDocument/2006/relationships" xmlns:p="http://schemas.openxmlformats.org/presentationml/2006/main">
+  <p:cSld>
+    <p:spTree>
+      <p:nvGrpSpPr>
+        <p:cNvPr id="1" name=""/>
+        <p:cNvGrpSpPr/>
+        <p:nvPr/>
+      </p:nvGrpSpPr>
+      <p:grpSpPr>
+        <a:xfrm>
+          <a:off x="0" y="0"/>
+          <a:ext cx="0" cy="0"/>
+          <a:chOff x="0" y="0"/>
+          <a:chExt cx="0" cy="0"/>
+        </a:xfrm>
+      </p:grpSpPr>
+      <p:sp>
+        <p:nvSpPr>
+          <p:cNvPr id="2" name="Title 1">
+            <a:extLst>
+              <a:ext uri="{FF2B5EF4-FFF2-40B4-BE49-F238E27FC236}">
                 <a16:creationId xmlns:a16="http://schemas.microsoft.com/office/drawing/2014/main" id="{3F1A5581-A7A1-60BC-FB1D-4F995D63FF26}"/>
               </a:ext>
             </a:extLst>
@@ -24017,7 +25411,7 @@
 </p:sld>
 </file>
 
-<file path=ppt/slides/slide11.xml><?xml version="1.0" encoding="utf-8"?>
+<file path=ppt/slides/slide13.xml><?xml version="1.0" encoding="utf-8"?>
 <p:sld xmlns:a="http://schemas.openxmlformats.org/drawingml/2006/main" xmlns:r="http://schemas.openxmlformats.org/officeDocument/2006/relationships" xmlns:p="http://schemas.openxmlformats.org/presentationml/2006/main">
   <p:cSld>
     <p:spTree>
@@ -24134,7 +25528,7 @@
 </p:sld>
 </file>
 
-<file path=ppt/slides/slide12.xml><?xml version="1.0" encoding="utf-8"?>
+<file path=ppt/slides/slide14.xml><?xml version="1.0" encoding="utf-8"?>
 <p:sld xmlns:a="http://schemas.openxmlformats.org/drawingml/2006/main" xmlns:r="http://schemas.openxmlformats.org/officeDocument/2006/relationships" xmlns:p="http://schemas.openxmlformats.org/presentationml/2006/main">
   <p:cSld>
     <p:spTree>
@@ -24493,7 +25887,7 @@
 </p:sld>
 </file>
 
-<file path=ppt/slides/slide13.xml><?xml version="1.0" encoding="utf-8"?>
+<file path=ppt/slides/slide15.xml><?xml version="1.0" encoding="utf-8"?>
 <p:sld xmlns:a="http://schemas.openxmlformats.org/drawingml/2006/main" xmlns:r="http://schemas.openxmlformats.org/officeDocument/2006/relationships" xmlns:p="http://schemas.openxmlformats.org/presentationml/2006/main">
   <p:cSld>
     <p:spTree>
@@ -24606,7 +26000,7 @@
 </p:sld>
 </file>
 
-<file path=ppt/slides/slide14.xml><?xml version="1.0" encoding="utf-8"?>
+<file path=ppt/slides/slide16.xml><?xml version="1.0" encoding="utf-8"?>
 <p:sld xmlns:a="http://schemas.openxmlformats.org/drawingml/2006/main" xmlns:r="http://schemas.openxmlformats.org/officeDocument/2006/relationships" xmlns:p="http://schemas.openxmlformats.org/presentationml/2006/main">
   <p:cSld>
     <p:spTree>
@@ -24825,7 +26219,7 @@
 </p:sld>
 </file>
 
-<file path=ppt/slides/slide15.xml><?xml version="1.0" encoding="utf-8"?>
+<file path=ppt/slides/slide17.xml><?xml version="1.0" encoding="utf-8"?>
 <p:sld xmlns:a="http://schemas.openxmlformats.org/drawingml/2006/main" xmlns:r="http://schemas.openxmlformats.org/officeDocument/2006/relationships" xmlns:p="http://schemas.openxmlformats.org/presentationml/2006/main">
   <p:cSld>
     <p:spTree>
@@ -24956,7 +26350,7 @@
 </p:sld>
 </file>
 
-<file path=ppt/slides/slide16.xml><?xml version="1.0" encoding="utf-8"?>
+<file path=ppt/slides/slide18.xml><?xml version="1.0" encoding="utf-8"?>
 <p:sld xmlns:a="http://schemas.openxmlformats.org/drawingml/2006/main" xmlns:r="http://schemas.openxmlformats.org/officeDocument/2006/relationships" xmlns:p="http://schemas.openxmlformats.org/presentationml/2006/main">
   <p:cSld>
     <p:spTree>
@@ -25066,7 +26460,7 @@
 </p:sld>
 </file>
 
-<file path=ppt/slides/slide17.xml><?xml version="1.0" encoding="utf-8"?>
+<file path=ppt/slides/slide19.xml><?xml version="1.0" encoding="utf-8"?>
 <p:sld xmlns:a="http://schemas.openxmlformats.org/drawingml/2006/main" xmlns:r="http://schemas.openxmlformats.org/officeDocument/2006/relationships" xmlns:p="http://schemas.openxmlformats.org/presentationml/2006/main">
   <p:cSld>
     <p:spTree>
@@ -25141,114 +26535,6 @@
     <p:extLst>
       <p:ext uri="{BB962C8B-B14F-4D97-AF65-F5344CB8AC3E}">
         <p14:creationId xmlns:p14="http://schemas.microsoft.com/office/powerpoint/2010/main" val="4174248418"/>
-      </p:ext>
-    </p:extLst>
-  </p:cSld>
-  <p:clrMapOvr>
-    <a:masterClrMapping/>
-  </p:clrMapOvr>
-</p:sld>
-</file>
-
-<file path=ppt/slides/slide18.xml><?xml version="1.0" encoding="utf-8"?>
-<p:sld xmlns:a="http://schemas.openxmlformats.org/drawingml/2006/main" xmlns:r="http://schemas.openxmlformats.org/officeDocument/2006/relationships" xmlns:p="http://schemas.openxmlformats.org/presentationml/2006/main">
-  <p:cSld>
-    <p:spTree>
-      <p:nvGrpSpPr>
-        <p:cNvPr id="1" name=""/>
-        <p:cNvGrpSpPr/>
-        <p:nvPr/>
-      </p:nvGrpSpPr>
-      <p:grpSpPr>
-        <a:xfrm>
-          <a:off x="0" y="0"/>
-          <a:ext cx="0" cy="0"/>
-          <a:chOff x="0" y="0"/>
-          <a:chExt cx="0" cy="0"/>
-        </a:xfrm>
-      </p:grpSpPr>
-      <p:sp>
-        <p:nvSpPr>
-          <p:cNvPr id="2" name="Title 1">
-            <a:extLst>
-              <a:ext uri="{FF2B5EF4-FFF2-40B4-BE49-F238E27FC236}">
-                <a16:creationId xmlns:a16="http://schemas.microsoft.com/office/drawing/2014/main" id="{7B7BF211-2DCE-D9F9-2179-457B48E71288}"/>
-              </a:ext>
-            </a:extLst>
-          </p:cNvPr>
-          <p:cNvSpPr>
-            <a:spLocks noGrp="1"/>
-          </p:cNvSpPr>
-          <p:nvPr>
-            <p:ph type="ctrTitle"/>
-          </p:nvPr>
-        </p:nvSpPr>
-        <p:spPr/>
-        <p:txBody>
-          <a:bodyPr/>
-          <a:lstStyle/>
-          <a:p>
-            <a:r>
-              <a:rPr lang="en-US" dirty="0" err="1"/>
-              <a:t>Lõputööd</a:t>
-            </a:r>
-            <a:endParaRPr lang="et-EE" dirty="0"/>
-          </a:p>
-        </p:txBody>
-      </p:sp>
-      <p:sp>
-        <p:nvSpPr>
-          <p:cNvPr id="3" name="Content Placeholder 2">
-            <a:extLst>
-              <a:ext uri="{FF2B5EF4-FFF2-40B4-BE49-F238E27FC236}">
-                <a16:creationId xmlns:a16="http://schemas.microsoft.com/office/drawing/2014/main" id="{DB300CB4-E528-A606-C7F5-435332E2E0A3}"/>
-              </a:ext>
-            </a:extLst>
-          </p:cNvPr>
-          <p:cNvSpPr>
-            <a:spLocks noGrp="1"/>
-          </p:cNvSpPr>
-          <p:nvPr>
-            <p:ph sz="quarter" idx="10"/>
-          </p:nvPr>
-        </p:nvSpPr>
-        <p:spPr/>
-        <p:txBody>
-          <a:bodyPr/>
-          <a:lstStyle/>
-          <a:p>
-            <a:r>
-              <a:rPr lang="en-US" dirty="0" err="1"/>
-              <a:t>Eelmiste</a:t>
-            </a:r>
-            <a:r>
-              <a:rPr lang="en-US" dirty="0"/>
-              <a:t> </a:t>
-            </a:r>
-            <a:r>
-              <a:rPr lang="en-US" dirty="0" err="1"/>
-              <a:t>kursuste</a:t>
-            </a:r>
-            <a:r>
-              <a:rPr lang="en-US" dirty="0"/>
-              <a:t> </a:t>
-            </a:r>
-            <a:r>
-              <a:rPr lang="en-US" dirty="0" err="1"/>
-              <a:t>lõputööd</a:t>
-            </a:r>
-            <a:endParaRPr lang="en-US" dirty="0"/>
-          </a:p>
-          <a:p>
-            <a:pPr lvl="1"/>
-            <a:endParaRPr lang="et-EE" dirty="0"/>
-          </a:p>
-        </p:txBody>
-      </p:sp>
-    </p:spTree>
-    <p:extLst>
-      <p:ext uri="{BB962C8B-B14F-4D97-AF65-F5344CB8AC3E}">
-        <p14:creationId xmlns:p14="http://schemas.microsoft.com/office/powerpoint/2010/main" val="3478977142"/>
       </p:ext>
     </p:extLst>
   </p:cSld>
@@ -26193,6 +27479,114 @@
 </p:sld>
 </file>
 
+<file path=ppt/slides/slide20.xml><?xml version="1.0" encoding="utf-8"?>
+<p:sld xmlns:a="http://schemas.openxmlformats.org/drawingml/2006/main" xmlns:r="http://schemas.openxmlformats.org/officeDocument/2006/relationships" xmlns:p="http://schemas.openxmlformats.org/presentationml/2006/main">
+  <p:cSld>
+    <p:spTree>
+      <p:nvGrpSpPr>
+        <p:cNvPr id="1" name=""/>
+        <p:cNvGrpSpPr/>
+        <p:nvPr/>
+      </p:nvGrpSpPr>
+      <p:grpSpPr>
+        <a:xfrm>
+          <a:off x="0" y="0"/>
+          <a:ext cx="0" cy="0"/>
+          <a:chOff x="0" y="0"/>
+          <a:chExt cx="0" cy="0"/>
+        </a:xfrm>
+      </p:grpSpPr>
+      <p:sp>
+        <p:nvSpPr>
+          <p:cNvPr id="2" name="Title 1">
+            <a:extLst>
+              <a:ext uri="{FF2B5EF4-FFF2-40B4-BE49-F238E27FC236}">
+                <a16:creationId xmlns:a16="http://schemas.microsoft.com/office/drawing/2014/main" id="{7B7BF211-2DCE-D9F9-2179-457B48E71288}"/>
+              </a:ext>
+            </a:extLst>
+          </p:cNvPr>
+          <p:cNvSpPr>
+            <a:spLocks noGrp="1"/>
+          </p:cNvSpPr>
+          <p:nvPr>
+            <p:ph type="ctrTitle"/>
+          </p:nvPr>
+        </p:nvSpPr>
+        <p:spPr/>
+        <p:txBody>
+          <a:bodyPr/>
+          <a:lstStyle/>
+          <a:p>
+            <a:r>
+              <a:rPr lang="en-US" dirty="0" err="1"/>
+              <a:t>Lõputööd</a:t>
+            </a:r>
+            <a:endParaRPr lang="et-EE" dirty="0"/>
+          </a:p>
+        </p:txBody>
+      </p:sp>
+      <p:sp>
+        <p:nvSpPr>
+          <p:cNvPr id="3" name="Content Placeholder 2">
+            <a:extLst>
+              <a:ext uri="{FF2B5EF4-FFF2-40B4-BE49-F238E27FC236}">
+                <a16:creationId xmlns:a16="http://schemas.microsoft.com/office/drawing/2014/main" id="{DB300CB4-E528-A606-C7F5-435332E2E0A3}"/>
+              </a:ext>
+            </a:extLst>
+          </p:cNvPr>
+          <p:cNvSpPr>
+            <a:spLocks noGrp="1"/>
+          </p:cNvSpPr>
+          <p:nvPr>
+            <p:ph sz="quarter" idx="10"/>
+          </p:nvPr>
+        </p:nvSpPr>
+        <p:spPr/>
+        <p:txBody>
+          <a:bodyPr/>
+          <a:lstStyle/>
+          <a:p>
+            <a:r>
+              <a:rPr lang="en-US" dirty="0" err="1"/>
+              <a:t>Eelmiste</a:t>
+            </a:r>
+            <a:r>
+              <a:rPr lang="en-US" dirty="0"/>
+              <a:t> </a:t>
+            </a:r>
+            <a:r>
+              <a:rPr lang="en-US" dirty="0" err="1"/>
+              <a:t>kursuste</a:t>
+            </a:r>
+            <a:r>
+              <a:rPr lang="en-US" dirty="0"/>
+              <a:t> </a:t>
+            </a:r>
+            <a:r>
+              <a:rPr lang="en-US" dirty="0" err="1"/>
+              <a:t>lõputööd</a:t>
+            </a:r>
+            <a:endParaRPr lang="en-US" dirty="0"/>
+          </a:p>
+          <a:p>
+            <a:pPr lvl="1"/>
+            <a:endParaRPr lang="et-EE" dirty="0"/>
+          </a:p>
+        </p:txBody>
+      </p:sp>
+    </p:spTree>
+    <p:extLst>
+      <p:ext uri="{BB962C8B-B14F-4D97-AF65-F5344CB8AC3E}">
+        <p14:creationId xmlns:p14="http://schemas.microsoft.com/office/powerpoint/2010/main" val="3478977142"/>
+      </p:ext>
+    </p:extLst>
+  </p:cSld>
+  <p:clrMapOvr>
+    <a:masterClrMapping/>
+  </p:clrMapOvr>
+</p:sld>
+</file>
+
 <file path=ppt/slides/slide3.xml><?xml version="1.0" encoding="utf-8"?>
 <p:sld xmlns:a="http://schemas.openxmlformats.org/drawingml/2006/main" xmlns:r="http://schemas.openxmlformats.org/officeDocument/2006/relationships" xmlns:p="http://schemas.openxmlformats.org/presentationml/2006/main">
   <p:cSld>
@@ -27028,6 +28422,120 @@
           <p:cNvPr id="2" name="Title 1">
             <a:extLst>
               <a:ext uri="{FF2B5EF4-FFF2-40B4-BE49-F238E27FC236}">
+                <a16:creationId xmlns:a16="http://schemas.microsoft.com/office/drawing/2014/main" id="{0AE8B5A2-B1D9-2167-9421-5C5F04668FEC}"/>
+              </a:ext>
+            </a:extLst>
+          </p:cNvPr>
+          <p:cNvSpPr>
+            <a:spLocks noGrp="1"/>
+          </p:cNvSpPr>
+          <p:nvPr>
+            <p:ph type="ctrTitle"/>
+          </p:nvPr>
+        </p:nvSpPr>
+        <p:spPr/>
+        <p:txBody>
+          <a:bodyPr/>
+          <a:lstStyle/>
+          <a:p>
+            <a:endParaRPr lang="en-GB"/>
+          </a:p>
+        </p:txBody>
+      </p:sp>
+      <p:sp>
+        <p:nvSpPr>
+          <p:cNvPr id="3" name="Content Placeholder 2">
+            <a:extLst>
+              <a:ext uri="{FF2B5EF4-FFF2-40B4-BE49-F238E27FC236}">
+                <a16:creationId xmlns:a16="http://schemas.microsoft.com/office/drawing/2014/main" id="{AFE58431-79CD-9A96-015D-9FA4089D4192}"/>
+              </a:ext>
+            </a:extLst>
+          </p:cNvPr>
+          <p:cNvSpPr>
+            <a:spLocks noGrp="1"/>
+          </p:cNvSpPr>
+          <p:nvPr>
+            <p:ph sz="quarter" idx="10"/>
+          </p:nvPr>
+        </p:nvSpPr>
+        <p:spPr/>
+        <p:txBody>
+          <a:bodyPr/>
+          <a:lstStyle/>
+          <a:p>
+            <a:r>
+              <a:rPr lang="en-GB" dirty="0"/>
+              <a:t>Record</a:t>
+            </a:r>
+          </a:p>
+          <a:p>
+            <a:r>
+              <a:rPr lang="en-GB" dirty="0"/>
+              <a:t>List</a:t>
+            </a:r>
+          </a:p>
+        </p:txBody>
+      </p:sp>
+      <p:sp>
+        <p:nvSpPr>
+          <p:cNvPr id="4" name="Content Placeholder 3">
+            <a:extLst>
+              <a:ext uri="{FF2B5EF4-FFF2-40B4-BE49-F238E27FC236}">
+                <a16:creationId xmlns:a16="http://schemas.microsoft.com/office/drawing/2014/main" id="{44F071D2-A667-15AE-A31C-04B7B46C64B4}"/>
+              </a:ext>
+            </a:extLst>
+          </p:cNvPr>
+          <p:cNvSpPr>
+            <a:spLocks noGrp="1"/>
+          </p:cNvSpPr>
+          <p:nvPr>
+            <p:ph sz="quarter" idx="11"/>
+          </p:nvPr>
+        </p:nvSpPr>
+        <p:spPr/>
+        <p:txBody>
+          <a:bodyPr/>
+          <a:lstStyle/>
+          <a:p>
+            <a:endParaRPr lang="en-GB"/>
+          </a:p>
+        </p:txBody>
+      </p:sp>
+    </p:spTree>
+    <p:extLst>
+      <p:ext uri="{BB962C8B-B14F-4D97-AF65-F5344CB8AC3E}">
+        <p14:creationId xmlns:p14="http://schemas.microsoft.com/office/powerpoint/2010/main" val="2308792408"/>
+      </p:ext>
+    </p:extLst>
+  </p:cSld>
+  <p:clrMapOvr>
+    <a:masterClrMapping/>
+  </p:clrMapOvr>
+</p:sld>
+</file>
+
+<file path=ppt/slides/slide7.xml><?xml version="1.0" encoding="utf-8"?>
+<p:sld xmlns:a="http://schemas.openxmlformats.org/drawingml/2006/main" xmlns:r="http://schemas.openxmlformats.org/officeDocument/2006/relationships" xmlns:p="http://schemas.openxmlformats.org/presentationml/2006/main">
+  <p:cSld>
+    <p:spTree>
+      <p:nvGrpSpPr>
+        <p:cNvPr id="1" name=""/>
+        <p:cNvGrpSpPr/>
+        <p:nvPr/>
+      </p:nvGrpSpPr>
+      <p:grpSpPr>
+        <a:xfrm>
+          <a:off x="0" y="0"/>
+          <a:ext cx="0" cy="0"/>
+          <a:chOff x="0" y="0"/>
+          <a:chExt cx="0" cy="0"/>
+        </a:xfrm>
+      </p:grpSpPr>
+      <p:sp>
+        <p:nvSpPr>
+          <p:cNvPr id="2" name="Title 1">
+            <a:extLst>
+              <a:ext uri="{FF2B5EF4-FFF2-40B4-BE49-F238E27FC236}">
                 <a16:creationId xmlns:a16="http://schemas.microsoft.com/office/drawing/2014/main" id="{7B908D8E-1CC2-82EB-E26D-B98E0C839606}"/>
               </a:ext>
             </a:extLst>
@@ -27046,12 +28554,17 @@
           <a:p>
             <a:r>
               <a:rPr lang="en-GB" dirty="0" err="1"/>
-              <a:t>Esimesena</a:t>
+              <a:t>Valitavad</a:t>
             </a:r>
             <a:r>
               <a:rPr lang="en-GB" dirty="0"/>
-              <a:t> record</a:t>
-            </a:r>
+              <a:t> </a:t>
+            </a:r>
+            <a:r>
+              <a:rPr lang="en-GB" dirty="0" err="1"/>
+              <a:t>veerud</a:t>
+            </a:r>
+            <a:endParaRPr lang="en-GB" dirty="0"/>
           </a:p>
         </p:txBody>
       </p:sp>
@@ -27371,7 +28884,193 @@
 </p:sld>
 </file>
 
-<file path=ppt/slides/slide7.xml><?xml version="1.0" encoding="utf-8"?>
+<file path=ppt/slides/slide8.xml><?xml version="1.0" encoding="utf-8"?>
+<p:sld xmlns:a="http://schemas.openxmlformats.org/drawingml/2006/main" xmlns:r="http://schemas.openxmlformats.org/officeDocument/2006/relationships" xmlns:p="http://schemas.openxmlformats.org/presentationml/2006/main">
+  <p:cSld>
+    <p:spTree>
+      <p:nvGrpSpPr>
+        <p:cNvPr id="1" name=""/>
+        <p:cNvGrpSpPr/>
+        <p:nvPr/>
+      </p:nvGrpSpPr>
+      <p:grpSpPr>
+        <a:xfrm>
+          <a:off x="0" y="0"/>
+          <a:ext cx="0" cy="0"/>
+          <a:chOff x="0" y="0"/>
+          <a:chExt cx="0" cy="0"/>
+        </a:xfrm>
+      </p:grpSpPr>
+      <p:sp>
+        <p:nvSpPr>
+          <p:cNvPr id="2" name="Title 1">
+            <a:extLst>
+              <a:ext uri="{FF2B5EF4-FFF2-40B4-BE49-F238E27FC236}">
+                <a16:creationId xmlns:a16="http://schemas.microsoft.com/office/drawing/2014/main" id="{BEDB4B48-68E8-1EED-D762-3A6F27A632AA}"/>
+              </a:ext>
+            </a:extLst>
+          </p:cNvPr>
+          <p:cNvSpPr>
+            <a:spLocks noGrp="1"/>
+          </p:cNvSpPr>
+          <p:nvPr>
+            <p:ph type="ctrTitle"/>
+          </p:nvPr>
+        </p:nvSpPr>
+        <p:spPr/>
+        <p:txBody>
+          <a:bodyPr/>
+          <a:lstStyle/>
+          <a:p>
+            <a:r>
+              <a:rPr lang="en-GB" dirty="0"/>
+              <a:t>Parent org </a:t>
+            </a:r>
+            <a:r>
+              <a:rPr lang="en-GB" dirty="0" err="1"/>
+              <a:t>leidmine</a:t>
+            </a:r>
+            <a:endParaRPr lang="en-GB" dirty="0"/>
+          </a:p>
+        </p:txBody>
+      </p:sp>
+      <p:sp>
+        <p:nvSpPr>
+          <p:cNvPr id="3" name="Content Placeholder 2">
+            <a:extLst>
+              <a:ext uri="{FF2B5EF4-FFF2-40B4-BE49-F238E27FC236}">
+                <a16:creationId xmlns:a16="http://schemas.microsoft.com/office/drawing/2014/main" id="{A55C1927-D2D5-ED12-8F54-F000F1790DF9}"/>
+              </a:ext>
+            </a:extLst>
+          </p:cNvPr>
+          <p:cNvSpPr>
+            <a:spLocks noGrp="1"/>
+          </p:cNvSpPr>
+          <p:nvPr>
+            <p:ph sz="quarter" idx="10"/>
+          </p:nvPr>
+        </p:nvSpPr>
+        <p:spPr/>
+        <p:txBody>
+          <a:bodyPr/>
+          <a:lstStyle/>
+          <a:p>
+            <a:r>
+              <a:rPr lang="en-GB" dirty="0"/>
+              <a:t>Organization </a:t>
+            </a:r>
+            <a:r>
+              <a:rPr lang="en-GB" dirty="0" err="1"/>
+              <a:t>koopia</a:t>
+            </a:r>
+            <a:endParaRPr lang="en-GB" dirty="0"/>
+          </a:p>
+          <a:p>
+            <a:r>
+              <a:rPr lang="en-GB" dirty="0"/>
+              <a:t>Merge queries</a:t>
+            </a:r>
+          </a:p>
+          <a:p>
+            <a:r>
+              <a:rPr lang="en-GB" dirty="0"/>
+              <a:t>Seo id </a:t>
+            </a:r>
+            <a:r>
+              <a:rPr lang="en-GB" dirty="0" err="1"/>
+              <a:t>alusel</a:t>
+            </a:r>
+            <a:endParaRPr lang="en-GB" dirty="0"/>
+          </a:p>
+          <a:p>
+            <a:r>
+              <a:rPr lang="en-GB" dirty="0"/>
+              <a:t>Vali </a:t>
+            </a:r>
+            <a:r>
+              <a:rPr lang="en-GB" dirty="0" err="1"/>
+              <a:t>tabelisse</a:t>
+            </a:r>
+            <a:r>
+              <a:rPr lang="en-GB" dirty="0"/>
+              <a:t> </a:t>
+            </a:r>
+            <a:r>
+              <a:rPr lang="en-GB"/>
+              <a:t>nimetus</a:t>
+            </a:r>
+          </a:p>
+        </p:txBody>
+      </p:sp>
+      <p:sp>
+        <p:nvSpPr>
+          <p:cNvPr id="4" name="Content Placeholder 3">
+            <a:extLst>
+              <a:ext uri="{FF2B5EF4-FFF2-40B4-BE49-F238E27FC236}">
+                <a16:creationId xmlns:a16="http://schemas.microsoft.com/office/drawing/2014/main" id="{D040D81F-51AF-450D-5262-0F8B71806BA3}"/>
+              </a:ext>
+            </a:extLst>
+          </p:cNvPr>
+          <p:cNvSpPr>
+            <a:spLocks noGrp="1"/>
+          </p:cNvSpPr>
+          <p:nvPr>
+            <p:ph sz="quarter" idx="11"/>
+          </p:nvPr>
+        </p:nvSpPr>
+        <p:spPr/>
+        <p:txBody>
+          <a:bodyPr/>
+          <a:lstStyle/>
+          <a:p>
+            <a:endParaRPr lang="en-GB"/>
+          </a:p>
+        </p:txBody>
+      </p:sp>
+      <p:pic>
+        <p:nvPicPr>
+          <p:cNvPr id="6" name="Picture 5">
+            <a:extLst>
+              <a:ext uri="{FF2B5EF4-FFF2-40B4-BE49-F238E27FC236}">
+                <a16:creationId xmlns:a16="http://schemas.microsoft.com/office/drawing/2014/main" id="{D498C8FD-CA7A-8A8F-7F05-20AFBEBF0A42}"/>
+              </a:ext>
+            </a:extLst>
+          </p:cNvPr>
+          <p:cNvPicPr>
+            <a:picLocks noChangeAspect="1"/>
+          </p:cNvPicPr>
+          <p:nvPr/>
+        </p:nvPicPr>
+        <p:blipFill>
+          <a:blip r:embed="rId2"/>
+          <a:stretch>
+            <a:fillRect/>
+          </a:stretch>
+        </p:blipFill>
+        <p:spPr>
+          <a:xfrm>
+            <a:off x="5556584" y="989280"/>
+            <a:ext cx="5561731" cy="4353124"/>
+          </a:xfrm>
+          <a:prstGeom prst="rect">
+            <a:avLst/>
+          </a:prstGeom>
+        </p:spPr>
+      </p:pic>
+    </p:spTree>
+    <p:extLst>
+      <p:ext uri="{BB962C8B-B14F-4D97-AF65-F5344CB8AC3E}">
+        <p14:creationId xmlns:p14="http://schemas.microsoft.com/office/powerpoint/2010/main" val="480953189"/>
+      </p:ext>
+    </p:extLst>
+  </p:cSld>
+  <p:clrMapOvr>
+    <a:masterClrMapping/>
+  </p:clrMapOvr>
+</p:sld>
+</file>
+
+<file path=ppt/slides/slide9.xml><?xml version="1.0" encoding="utf-8"?>
 <p:sld xmlns:a="http://schemas.openxmlformats.org/drawingml/2006/main" xmlns:r="http://schemas.openxmlformats.org/officeDocument/2006/relationships" xmlns:p="http://schemas.openxmlformats.org/presentationml/2006/main">
   <p:cSld>
     <p:spTree>
@@ -27409,7 +29108,11 @@
           <a:bodyPr/>
           <a:lstStyle/>
           <a:p>
-            <a:endParaRPr lang="en-GB"/>
+            <a:r>
+              <a:rPr lang="en-GB" dirty="0" err="1"/>
+              <a:t>Tabelid</a:t>
+            </a:r>
+            <a:endParaRPr lang="en-GB" dirty="0"/>
           </a:p>
         </p:txBody>
       </p:sp>
@@ -27434,7 +29137,94 @@
           <a:bodyPr/>
           <a:lstStyle/>
           <a:p>
-            <a:endParaRPr lang="en-GB"/>
+            <a:r>
+              <a:rPr lang="en-GB" dirty="0" err="1"/>
+              <a:t>Nimeta</a:t>
+            </a:r>
+            <a:r>
+              <a:rPr lang="en-GB" dirty="0"/>
+              <a:t> </a:t>
+            </a:r>
+            <a:r>
+              <a:rPr lang="en-GB" dirty="0" err="1"/>
+              <a:t>veerud</a:t>
+            </a:r>
+            <a:r>
+              <a:rPr lang="en-GB" dirty="0"/>
+              <a:t> </a:t>
+            </a:r>
+          </a:p>
+          <a:p>
+            <a:r>
+              <a:rPr lang="en-GB" dirty="0" err="1"/>
+              <a:t>Nimeta</a:t>
+            </a:r>
+            <a:r>
+              <a:rPr lang="en-GB" dirty="0"/>
+              <a:t> </a:t>
+            </a:r>
+            <a:r>
+              <a:rPr lang="en-GB" dirty="0" err="1"/>
+              <a:t>tabelid</a:t>
+            </a:r>
+            <a:r>
+              <a:rPr lang="en-GB" dirty="0"/>
+              <a:t>: dim </a:t>
+            </a:r>
+            <a:r>
+              <a:rPr lang="en-GB" dirty="0" err="1"/>
+              <a:t>ja</a:t>
+            </a:r>
+            <a:r>
+              <a:rPr lang="en-GB" dirty="0"/>
+              <a:t> fact </a:t>
+            </a:r>
+            <a:r>
+              <a:rPr lang="en-GB" dirty="0" err="1"/>
+              <a:t>tabelid</a:t>
+            </a:r>
+            <a:endParaRPr lang="en-GB" dirty="0"/>
+          </a:p>
+          <a:p>
+            <a:r>
+              <a:rPr lang="en-GB" dirty="0"/>
+              <a:t>Loo </a:t>
+            </a:r>
+            <a:r>
+              <a:rPr lang="en-GB" dirty="0" err="1"/>
+              <a:t>seosed</a:t>
+            </a:r>
+            <a:endParaRPr lang="en-GB" dirty="0"/>
+          </a:p>
+          <a:p>
+            <a:r>
+              <a:rPr lang="en-GB" dirty="0"/>
+              <a:t>Tee </a:t>
+            </a:r>
+            <a:r>
+              <a:rPr lang="en-GB" dirty="0" err="1"/>
+              <a:t>mõõdikute</a:t>
+            </a:r>
+            <a:r>
+              <a:rPr lang="en-GB" dirty="0"/>
+              <a:t> table </a:t>
+            </a:r>
+            <a:r>
+              <a:rPr lang="en-GB" dirty="0" err="1"/>
+              <a:t>ja</a:t>
+            </a:r>
+            <a:r>
+              <a:rPr lang="en-GB" dirty="0"/>
+              <a:t> loo </a:t>
+            </a:r>
+            <a:r>
+              <a:rPr lang="en-GB" dirty="0" err="1"/>
+              <a:t>mõõdikud</a:t>
+            </a:r>
+            <a:endParaRPr lang="en-GB" dirty="0"/>
+          </a:p>
+          <a:p>
+            <a:endParaRPr lang="en-GB" dirty="0"/>
           </a:p>
         </p:txBody>
       </p:sp>
@@ -27463,1402 +29253,40 @@
           </a:p>
         </p:txBody>
       </p:sp>
+      <p:pic>
+        <p:nvPicPr>
+          <p:cNvPr id="6" name="Picture 5">
+            <a:extLst>
+              <a:ext uri="{FF2B5EF4-FFF2-40B4-BE49-F238E27FC236}">
+                <a16:creationId xmlns:a16="http://schemas.microsoft.com/office/drawing/2014/main" id="{F07321FF-7B30-9EA2-3B59-97FDB4BF36D0}"/>
+              </a:ext>
+            </a:extLst>
+          </p:cNvPr>
+          <p:cNvPicPr>
+            <a:picLocks noChangeAspect="1"/>
+          </p:cNvPicPr>
+          <p:nvPr/>
+        </p:nvPicPr>
+        <p:blipFill>
+          <a:blip r:embed="rId2"/>
+          <a:stretch>
+            <a:fillRect/>
+          </a:stretch>
+        </p:blipFill>
+        <p:spPr>
+          <a:xfrm>
+            <a:off x="0" y="3181150"/>
+            <a:ext cx="12192000" cy="1728335"/>
+          </a:xfrm>
+          <a:prstGeom prst="rect">
+            <a:avLst/>
+          </a:prstGeom>
+        </p:spPr>
+      </p:pic>
     </p:spTree>
     <p:extLst>
       <p:ext uri="{BB962C8B-B14F-4D97-AF65-F5344CB8AC3E}">
         <p14:creationId xmlns:p14="http://schemas.microsoft.com/office/powerpoint/2010/main" val="1258446565"/>
-      </p:ext>
-    </p:extLst>
-  </p:cSld>
-  <p:clrMapOvr>
-    <a:masterClrMapping/>
-  </p:clrMapOvr>
-</p:sld>
-</file>
-
-<file path=ppt/slides/slide8.xml><?xml version="1.0" encoding="utf-8"?>
-<p:sld xmlns:a="http://schemas.openxmlformats.org/drawingml/2006/main" xmlns:r="http://schemas.openxmlformats.org/officeDocument/2006/relationships" xmlns:p="http://schemas.openxmlformats.org/presentationml/2006/main">
-  <p:cSld>
-    <p:spTree>
-      <p:nvGrpSpPr>
-        <p:cNvPr id="1" name=""/>
-        <p:cNvGrpSpPr/>
-        <p:nvPr/>
-      </p:nvGrpSpPr>
-      <p:grpSpPr>
-        <a:xfrm>
-          <a:off x="0" y="0"/>
-          <a:ext cx="0" cy="0"/>
-          <a:chOff x="0" y="0"/>
-          <a:chExt cx="0" cy="0"/>
-        </a:xfrm>
-      </p:grpSpPr>
-      <p:sp>
-        <p:nvSpPr>
-          <p:cNvPr id="2" name="Title 1">
-            <a:extLst>
-              <a:ext uri="{FF2B5EF4-FFF2-40B4-BE49-F238E27FC236}">
-                <a16:creationId xmlns:a16="http://schemas.microsoft.com/office/drawing/2014/main" id="{06904646-8734-75D9-6232-82628B60CD02}"/>
-              </a:ext>
-            </a:extLst>
-          </p:cNvPr>
-          <p:cNvSpPr>
-            <a:spLocks noGrp="1"/>
-          </p:cNvSpPr>
-          <p:nvPr>
-            <p:ph type="ctrTitle"/>
-          </p:nvPr>
-        </p:nvSpPr>
-        <p:spPr/>
-        <p:txBody>
-          <a:bodyPr/>
-          <a:lstStyle/>
-          <a:p>
-            <a:r>
-              <a:rPr lang="en-GB" dirty="0" err="1"/>
-              <a:t>Kestuse</a:t>
-            </a:r>
-            <a:r>
-              <a:rPr lang="en-GB" dirty="0"/>
-              <a:t> </a:t>
-            </a:r>
-            <a:r>
-              <a:rPr lang="en-GB" dirty="0" err="1"/>
-              <a:t>grupp</a:t>
-            </a:r>
-            <a:r>
-              <a:rPr lang="en-GB" dirty="0"/>
-              <a:t>: loo </a:t>
-            </a:r>
-            <a:r>
-              <a:rPr lang="en-GB" dirty="0" err="1"/>
-              <a:t>tabelid</a:t>
-            </a:r>
-            <a:r>
-              <a:rPr lang="en-GB" dirty="0"/>
-              <a:t> </a:t>
-            </a:r>
-            <a:r>
-              <a:rPr lang="en-GB" dirty="0" err="1"/>
-              <a:t>ja</a:t>
-            </a:r>
-            <a:r>
-              <a:rPr lang="en-GB" dirty="0"/>
-              <a:t> tee </a:t>
-            </a:r>
-            <a:r>
-              <a:rPr lang="en-GB" dirty="0" err="1"/>
-              <a:t>seosed</a:t>
-            </a:r>
-            <a:endParaRPr lang="en-GB" dirty="0"/>
-          </a:p>
-        </p:txBody>
-      </p:sp>
-      <p:sp>
-        <p:nvSpPr>
-          <p:cNvPr id="3" name="Content Placeholder 2">
-            <a:extLst>
-              <a:ext uri="{FF2B5EF4-FFF2-40B4-BE49-F238E27FC236}">
-                <a16:creationId xmlns:a16="http://schemas.microsoft.com/office/drawing/2014/main" id="{F0467C62-363C-7458-ADB8-BD7878BA64F3}"/>
-              </a:ext>
-            </a:extLst>
-          </p:cNvPr>
-          <p:cNvSpPr>
-            <a:spLocks noGrp="1"/>
-          </p:cNvSpPr>
-          <p:nvPr>
-            <p:ph sz="quarter" idx="10"/>
-          </p:nvPr>
-        </p:nvSpPr>
-        <p:spPr/>
-        <p:txBody>
-          <a:bodyPr/>
-          <a:lstStyle/>
-          <a:p>
-            <a:r>
-              <a:rPr lang="en-GB" dirty="0"/>
-              <a:t>Veerg </a:t>
-            </a:r>
-            <a:r>
-              <a:rPr lang="en-GB" dirty="0" err="1"/>
-              <a:t>fact_activity</a:t>
-            </a:r>
-            <a:r>
-              <a:rPr lang="en-GB" dirty="0"/>
-              <a:t> </a:t>
-            </a:r>
-            <a:r>
-              <a:rPr lang="en-GB" dirty="0" err="1"/>
-              <a:t>tabelis</a:t>
-            </a:r>
-            <a:endParaRPr lang="en-GB" dirty="0"/>
-          </a:p>
-        </p:txBody>
-      </p:sp>
-      <p:sp>
-        <p:nvSpPr>
-          <p:cNvPr id="4" name="Content Placeholder 3">
-            <a:extLst>
-              <a:ext uri="{FF2B5EF4-FFF2-40B4-BE49-F238E27FC236}">
-                <a16:creationId xmlns:a16="http://schemas.microsoft.com/office/drawing/2014/main" id="{92CD1B46-944E-F33C-04D2-524DC30ECC29}"/>
-              </a:ext>
-            </a:extLst>
-          </p:cNvPr>
-          <p:cNvSpPr>
-            <a:spLocks noGrp="1"/>
-          </p:cNvSpPr>
-          <p:nvPr>
-            <p:ph sz="quarter" idx="11"/>
-          </p:nvPr>
-        </p:nvSpPr>
-        <p:spPr/>
-        <p:txBody>
-          <a:bodyPr/>
-          <a:lstStyle/>
-          <a:p>
-            <a:r>
-              <a:rPr lang="en-GB" dirty="0" err="1"/>
-              <a:t>Kestuse</a:t>
-            </a:r>
-            <a:r>
-              <a:rPr lang="en-GB" dirty="0"/>
-              <a:t> </a:t>
-            </a:r>
-            <a:r>
-              <a:rPr lang="en-GB" dirty="0" err="1"/>
-              <a:t>grupp</a:t>
-            </a:r>
-            <a:r>
-              <a:rPr lang="en-GB" dirty="0"/>
-              <a:t> </a:t>
-            </a:r>
-            <a:r>
-              <a:rPr lang="en-GB" dirty="0" err="1"/>
-              <a:t>dimensioon</a:t>
-            </a:r>
-            <a:endParaRPr lang="en-GB" dirty="0"/>
-          </a:p>
-        </p:txBody>
-      </p:sp>
-      <p:sp>
-        <p:nvSpPr>
-          <p:cNvPr id="6" name="TextBox 5">
-            <a:extLst>
-              <a:ext uri="{FF2B5EF4-FFF2-40B4-BE49-F238E27FC236}">
-                <a16:creationId xmlns:a16="http://schemas.microsoft.com/office/drawing/2014/main" id="{19511DA6-665D-284C-E57E-4A00AE5772D4}"/>
-              </a:ext>
-            </a:extLst>
-          </p:cNvPr>
-          <p:cNvSpPr txBox="1"/>
-          <p:nvPr/>
-        </p:nvSpPr>
-        <p:spPr>
-          <a:xfrm>
-            <a:off x="405384" y="1629120"/>
-            <a:ext cx="6096000" cy="2502480"/>
-          </a:xfrm>
-          <a:prstGeom prst="rect">
-            <a:avLst/>
-          </a:prstGeom>
-          <a:noFill/>
-        </p:spPr>
-        <p:txBody>
-          <a:bodyPr wrap="square">
-            <a:spAutoFit/>
-          </a:bodyPr>
-          <a:lstStyle/>
-          <a:p>
-            <a:pPr>
-              <a:lnSpc>
-                <a:spcPct val="100000"/>
-              </a:lnSpc>
-              <a:buNone/>
-            </a:pPr>
-            <a:r>
-              <a:rPr lang="en-GB" sz="1800" b="0" dirty="0" err="1">
-                <a:solidFill>
-                  <a:schemeClr val="tx1"/>
-                </a:solidFill>
-                <a:effectLst/>
-                <a:latin typeface="+mn-lt"/>
-              </a:rPr>
-              <a:t>Kestuse</a:t>
-            </a:r>
-            <a:r>
-              <a:rPr lang="en-GB" sz="1800" b="0" dirty="0">
-                <a:solidFill>
-                  <a:schemeClr val="tx1"/>
-                </a:solidFill>
-                <a:effectLst/>
-                <a:latin typeface="+mn-lt"/>
-              </a:rPr>
-              <a:t> </a:t>
-            </a:r>
-            <a:r>
-              <a:rPr lang="en-GB" sz="1800" b="0" dirty="0" err="1">
-                <a:solidFill>
-                  <a:schemeClr val="tx1"/>
-                </a:solidFill>
-                <a:effectLst/>
-                <a:latin typeface="+mn-lt"/>
-              </a:rPr>
-              <a:t>grupp</a:t>
-            </a:r>
-            <a:r>
-              <a:rPr lang="en-GB" sz="1800" b="0" dirty="0">
-                <a:solidFill>
-                  <a:schemeClr val="tx1"/>
-                </a:solidFill>
-                <a:effectLst/>
-                <a:latin typeface="+mn-lt"/>
-              </a:rPr>
-              <a:t> = IF (</a:t>
-            </a:r>
-          </a:p>
-          <a:p>
-            <a:pPr>
-              <a:lnSpc>
-                <a:spcPct val="100000"/>
-              </a:lnSpc>
-              <a:buNone/>
-            </a:pPr>
-            <a:r>
-              <a:rPr lang="en-GB" sz="1800" b="0" dirty="0">
-                <a:solidFill>
-                  <a:schemeClr val="tx1"/>
-                </a:solidFill>
-                <a:effectLst/>
-                <a:latin typeface="+mn-lt"/>
-              </a:rPr>
-              <a:t>    ISBLANK ( </a:t>
-            </a:r>
-            <a:r>
-              <a:rPr lang="en-GB" sz="1800" b="0" dirty="0" err="1">
-                <a:solidFill>
-                  <a:schemeClr val="tx1"/>
-                </a:solidFill>
-                <a:effectLst/>
-                <a:latin typeface="+mn-lt"/>
-              </a:rPr>
-              <a:t>fact_activity</a:t>
-            </a:r>
-            <a:r>
-              <a:rPr lang="en-GB" sz="1800" b="0" dirty="0">
-                <a:solidFill>
-                  <a:schemeClr val="tx1"/>
-                </a:solidFill>
-                <a:effectLst/>
-                <a:latin typeface="+mn-lt"/>
-              </a:rPr>
-              <a:t>[</a:t>
-            </a:r>
-            <a:r>
-              <a:rPr lang="en-GB" sz="1800" b="0" dirty="0" err="1">
-                <a:solidFill>
-                  <a:schemeClr val="tx1"/>
-                </a:solidFill>
-                <a:effectLst/>
-                <a:latin typeface="+mn-lt"/>
-              </a:rPr>
-              <a:t>Alguskuupäev</a:t>
-            </a:r>
-            <a:r>
-              <a:rPr lang="en-GB" sz="1800" b="0" dirty="0">
-                <a:solidFill>
-                  <a:schemeClr val="tx1"/>
-                </a:solidFill>
-                <a:effectLst/>
-                <a:latin typeface="+mn-lt"/>
-              </a:rPr>
-              <a:t>] ) || ISBLANK ( </a:t>
-            </a:r>
-            <a:r>
-              <a:rPr lang="en-GB" sz="1800" b="0" dirty="0" err="1">
-                <a:solidFill>
-                  <a:schemeClr val="tx1"/>
-                </a:solidFill>
-                <a:effectLst/>
-                <a:latin typeface="+mn-lt"/>
-              </a:rPr>
-              <a:t>fact_activity</a:t>
-            </a:r>
-            <a:r>
-              <a:rPr lang="en-GB" sz="1800" b="0" dirty="0">
-                <a:solidFill>
-                  <a:schemeClr val="tx1"/>
-                </a:solidFill>
-                <a:effectLst/>
-                <a:latin typeface="+mn-lt"/>
-              </a:rPr>
-              <a:t>[</a:t>
-            </a:r>
-            <a:r>
-              <a:rPr lang="en-GB" sz="1800" b="0" dirty="0" err="1">
-                <a:solidFill>
-                  <a:schemeClr val="tx1"/>
-                </a:solidFill>
-                <a:effectLst/>
-                <a:latin typeface="+mn-lt"/>
-              </a:rPr>
-              <a:t>Lõppkuupäev</a:t>
-            </a:r>
-            <a:r>
-              <a:rPr lang="en-GB" sz="1800" b="0" dirty="0">
-                <a:solidFill>
-                  <a:schemeClr val="tx1"/>
-                </a:solidFill>
-                <a:effectLst/>
-                <a:latin typeface="+mn-lt"/>
-              </a:rPr>
-              <a:t>] ),</a:t>
-            </a:r>
-          </a:p>
-          <a:p>
-            <a:pPr>
-              <a:lnSpc>
-                <a:spcPct val="100000"/>
-              </a:lnSpc>
-              <a:buNone/>
-            </a:pPr>
-            <a:r>
-              <a:rPr lang="en-GB" sz="1800" b="0" dirty="0">
-                <a:solidFill>
-                  <a:schemeClr val="tx1"/>
-                </a:solidFill>
-                <a:effectLst/>
-                <a:latin typeface="+mn-lt"/>
-              </a:rPr>
-              <a:t>    "</a:t>
-            </a:r>
-            <a:r>
-              <a:rPr lang="en-GB" sz="1800" b="0" dirty="0" err="1">
-                <a:solidFill>
-                  <a:schemeClr val="tx1"/>
-                </a:solidFill>
-                <a:effectLst/>
-                <a:latin typeface="+mn-lt"/>
-              </a:rPr>
-              <a:t>Kuupäev</a:t>
-            </a:r>
-            <a:r>
-              <a:rPr lang="en-GB" sz="1800" b="0" dirty="0">
-                <a:solidFill>
-                  <a:schemeClr val="tx1"/>
-                </a:solidFill>
-                <a:effectLst/>
-                <a:latin typeface="+mn-lt"/>
-              </a:rPr>
-              <a:t> </a:t>
-            </a:r>
-            <a:r>
-              <a:rPr lang="en-GB" sz="1800" b="0" dirty="0" err="1">
-                <a:solidFill>
-                  <a:schemeClr val="tx1"/>
-                </a:solidFill>
-                <a:effectLst/>
-                <a:latin typeface="+mn-lt"/>
-              </a:rPr>
-              <a:t>puudub</a:t>
-            </a:r>
-            <a:r>
-              <a:rPr lang="en-GB" sz="1800" b="0" dirty="0">
-                <a:solidFill>
-                  <a:schemeClr val="tx1"/>
-                </a:solidFill>
-                <a:effectLst/>
-                <a:latin typeface="+mn-lt"/>
-              </a:rPr>
-              <a:t>",</a:t>
-            </a:r>
-          </a:p>
-          <a:p>
-            <a:pPr>
-              <a:lnSpc>
-                <a:spcPct val="100000"/>
-              </a:lnSpc>
-              <a:buNone/>
-            </a:pPr>
-            <a:r>
-              <a:rPr lang="en-GB" sz="1800" b="0" dirty="0">
-                <a:solidFill>
-                  <a:schemeClr val="tx1"/>
-                </a:solidFill>
-                <a:effectLst/>
-                <a:latin typeface="+mn-lt"/>
-              </a:rPr>
-              <a:t>    VAR </a:t>
-            </a:r>
-            <a:r>
-              <a:rPr lang="en-GB" sz="1800" b="0" dirty="0" err="1">
-                <a:solidFill>
-                  <a:schemeClr val="tx1"/>
-                </a:solidFill>
-                <a:effectLst/>
-                <a:latin typeface="+mn-lt"/>
-              </a:rPr>
-              <a:t>Paevi</a:t>
-            </a:r>
-            <a:r>
-              <a:rPr lang="en-GB" sz="1800" b="0" dirty="0">
-                <a:solidFill>
-                  <a:schemeClr val="tx1"/>
-                </a:solidFill>
-                <a:effectLst/>
-                <a:latin typeface="+mn-lt"/>
-              </a:rPr>
-              <a:t> =</a:t>
-            </a:r>
-          </a:p>
-          <a:p>
-            <a:pPr>
-              <a:lnSpc>
-                <a:spcPct val="100000"/>
-              </a:lnSpc>
-              <a:buNone/>
-            </a:pPr>
-            <a:r>
-              <a:rPr lang="en-GB" sz="1800" b="0" dirty="0">
-                <a:solidFill>
-                  <a:schemeClr val="tx1"/>
-                </a:solidFill>
-                <a:effectLst/>
-                <a:latin typeface="+mn-lt"/>
-              </a:rPr>
-              <a:t>        DATEDIFF ( </a:t>
-            </a:r>
-            <a:r>
-              <a:rPr lang="en-GB" sz="1800" b="0" dirty="0" err="1">
-                <a:solidFill>
-                  <a:schemeClr val="tx1"/>
-                </a:solidFill>
-                <a:effectLst/>
-                <a:latin typeface="+mn-lt"/>
-              </a:rPr>
-              <a:t>fact_activity</a:t>
-            </a:r>
-            <a:r>
-              <a:rPr lang="en-GB" sz="1800" b="0" dirty="0">
-                <a:solidFill>
-                  <a:schemeClr val="tx1"/>
-                </a:solidFill>
-                <a:effectLst/>
-                <a:latin typeface="+mn-lt"/>
-              </a:rPr>
-              <a:t>[</a:t>
-            </a:r>
-            <a:r>
-              <a:rPr lang="en-GB" sz="1800" b="0" dirty="0" err="1">
-                <a:solidFill>
-                  <a:schemeClr val="tx1"/>
-                </a:solidFill>
-                <a:effectLst/>
-                <a:latin typeface="+mn-lt"/>
-              </a:rPr>
-              <a:t>Alguskuupäev</a:t>
-            </a:r>
-            <a:r>
-              <a:rPr lang="en-GB" sz="1800" b="0" dirty="0">
-                <a:solidFill>
-                  <a:schemeClr val="tx1"/>
-                </a:solidFill>
-                <a:effectLst/>
-                <a:latin typeface="+mn-lt"/>
-              </a:rPr>
-              <a:t>], </a:t>
-            </a:r>
-            <a:r>
-              <a:rPr lang="en-GB" sz="1800" b="0" dirty="0" err="1">
-                <a:solidFill>
-                  <a:schemeClr val="tx1"/>
-                </a:solidFill>
-                <a:effectLst/>
-                <a:latin typeface="+mn-lt"/>
-              </a:rPr>
-              <a:t>fact_activity</a:t>
-            </a:r>
-            <a:r>
-              <a:rPr lang="en-GB" sz="1800" b="0" dirty="0">
-                <a:solidFill>
-                  <a:schemeClr val="tx1"/>
-                </a:solidFill>
-                <a:effectLst/>
-                <a:latin typeface="+mn-lt"/>
-              </a:rPr>
-              <a:t>[</a:t>
-            </a:r>
-            <a:r>
-              <a:rPr lang="en-GB" sz="1800" b="0" dirty="0" err="1">
-                <a:solidFill>
-                  <a:schemeClr val="tx1"/>
-                </a:solidFill>
-                <a:effectLst/>
-                <a:latin typeface="+mn-lt"/>
-              </a:rPr>
-              <a:t>Lõppkuupäev</a:t>
-            </a:r>
-            <a:r>
-              <a:rPr lang="en-GB" sz="1800" b="0" dirty="0">
-                <a:solidFill>
-                  <a:schemeClr val="tx1"/>
-                </a:solidFill>
-                <a:effectLst/>
-                <a:latin typeface="+mn-lt"/>
-              </a:rPr>
-              <a:t>], DAY )</a:t>
-            </a:r>
-          </a:p>
-          <a:p>
-            <a:pPr>
-              <a:lnSpc>
-                <a:spcPct val="100000"/>
-              </a:lnSpc>
-              <a:buNone/>
-            </a:pPr>
-            <a:r>
-              <a:rPr lang="en-GB" sz="1800" b="0" dirty="0">
-                <a:solidFill>
-                  <a:schemeClr val="tx1"/>
-                </a:solidFill>
-                <a:effectLst/>
-                <a:latin typeface="+mn-lt"/>
-              </a:rPr>
-              <a:t>    RETURN</a:t>
-            </a:r>
-          </a:p>
-          <a:p>
-            <a:pPr>
-              <a:lnSpc>
-                <a:spcPct val="100000"/>
-              </a:lnSpc>
-              <a:buNone/>
-            </a:pPr>
-            <a:r>
-              <a:rPr lang="en-GB" sz="1800" b="0" dirty="0">
-                <a:solidFill>
-                  <a:schemeClr val="tx1"/>
-                </a:solidFill>
-                <a:effectLst/>
-                <a:latin typeface="+mn-lt"/>
-              </a:rPr>
-              <a:t>        SWITCH (</a:t>
-            </a:r>
-          </a:p>
-          <a:p>
-            <a:pPr>
-              <a:lnSpc>
-                <a:spcPct val="100000"/>
-              </a:lnSpc>
-              <a:buNone/>
-            </a:pPr>
-            <a:r>
-              <a:rPr lang="en-GB" sz="1800" b="0" dirty="0">
-                <a:solidFill>
-                  <a:schemeClr val="tx1"/>
-                </a:solidFill>
-                <a:effectLst/>
-                <a:latin typeface="+mn-lt"/>
-              </a:rPr>
-              <a:t>            TRUE (),</a:t>
-            </a:r>
-          </a:p>
-          <a:p>
-            <a:pPr>
-              <a:lnSpc>
-                <a:spcPct val="100000"/>
-              </a:lnSpc>
-              <a:buNone/>
-            </a:pPr>
-            <a:r>
-              <a:rPr lang="en-GB" sz="1800" b="0" dirty="0">
-                <a:solidFill>
-                  <a:schemeClr val="tx1"/>
-                </a:solidFill>
-                <a:effectLst/>
-                <a:latin typeface="+mn-lt"/>
-              </a:rPr>
-              <a:t>            </a:t>
-            </a:r>
-            <a:r>
-              <a:rPr lang="en-GB" sz="1800" b="0" dirty="0" err="1">
-                <a:solidFill>
-                  <a:schemeClr val="tx1"/>
-                </a:solidFill>
-                <a:effectLst/>
-                <a:latin typeface="+mn-lt"/>
-              </a:rPr>
-              <a:t>Paevi</a:t>
-            </a:r>
-            <a:r>
-              <a:rPr lang="en-GB" sz="1800" b="0" dirty="0">
-                <a:solidFill>
-                  <a:schemeClr val="tx1"/>
-                </a:solidFill>
-                <a:effectLst/>
-                <a:latin typeface="+mn-lt"/>
-              </a:rPr>
-              <a:t> &lt; 365, "0-1 </a:t>
-            </a:r>
-            <a:r>
-              <a:rPr lang="en-GB" sz="1800" b="0" dirty="0" err="1">
-                <a:solidFill>
-                  <a:schemeClr val="tx1"/>
-                </a:solidFill>
-                <a:effectLst/>
-                <a:latin typeface="+mn-lt"/>
-              </a:rPr>
-              <a:t>aastat</a:t>
-            </a:r>
-            <a:r>
-              <a:rPr lang="en-GB" sz="1800" b="0" dirty="0">
-                <a:solidFill>
-                  <a:schemeClr val="tx1"/>
-                </a:solidFill>
-                <a:effectLst/>
-                <a:latin typeface="+mn-lt"/>
-              </a:rPr>
-              <a:t>",</a:t>
-            </a:r>
-          </a:p>
-          <a:p>
-            <a:pPr>
-              <a:lnSpc>
-                <a:spcPct val="100000"/>
-              </a:lnSpc>
-              <a:buNone/>
-            </a:pPr>
-            <a:r>
-              <a:rPr lang="en-GB" sz="1800" b="0" dirty="0">
-                <a:solidFill>
-                  <a:schemeClr val="tx1"/>
-                </a:solidFill>
-                <a:effectLst/>
-                <a:latin typeface="+mn-lt"/>
-              </a:rPr>
-              <a:t>            </a:t>
-            </a:r>
-            <a:r>
-              <a:rPr lang="en-GB" sz="1800" b="0" dirty="0" err="1">
-                <a:solidFill>
-                  <a:schemeClr val="tx1"/>
-                </a:solidFill>
-                <a:effectLst/>
-                <a:latin typeface="+mn-lt"/>
-              </a:rPr>
-              <a:t>Paevi</a:t>
-            </a:r>
-            <a:r>
-              <a:rPr lang="en-GB" sz="1800" b="0" dirty="0">
-                <a:solidFill>
-                  <a:schemeClr val="tx1"/>
-                </a:solidFill>
-                <a:effectLst/>
-                <a:latin typeface="+mn-lt"/>
-              </a:rPr>
-              <a:t> &lt; 3 * 365, "1-3 </a:t>
-            </a:r>
-            <a:r>
-              <a:rPr lang="en-GB" sz="1800" b="0" dirty="0" err="1">
-                <a:solidFill>
-                  <a:schemeClr val="tx1"/>
-                </a:solidFill>
-                <a:effectLst/>
-                <a:latin typeface="+mn-lt"/>
-              </a:rPr>
-              <a:t>aastat</a:t>
-            </a:r>
-            <a:r>
-              <a:rPr lang="en-GB" sz="1800" b="0" dirty="0">
-                <a:solidFill>
-                  <a:schemeClr val="tx1"/>
-                </a:solidFill>
-                <a:effectLst/>
-                <a:latin typeface="+mn-lt"/>
-              </a:rPr>
-              <a:t>",</a:t>
-            </a:r>
-          </a:p>
-          <a:p>
-            <a:pPr>
-              <a:lnSpc>
-                <a:spcPct val="100000"/>
-              </a:lnSpc>
-              <a:buNone/>
-            </a:pPr>
-            <a:r>
-              <a:rPr lang="en-GB" sz="1800" b="0" dirty="0">
-                <a:solidFill>
-                  <a:schemeClr val="tx1"/>
-                </a:solidFill>
-                <a:effectLst/>
-                <a:latin typeface="+mn-lt"/>
-              </a:rPr>
-              <a:t>            </a:t>
-            </a:r>
-            <a:r>
-              <a:rPr lang="en-GB" sz="1800" b="0" dirty="0" err="1">
-                <a:solidFill>
-                  <a:schemeClr val="tx1"/>
-                </a:solidFill>
-                <a:effectLst/>
-                <a:latin typeface="+mn-lt"/>
-              </a:rPr>
-              <a:t>Paevi</a:t>
-            </a:r>
-            <a:r>
-              <a:rPr lang="en-GB" sz="1800" b="0" dirty="0">
-                <a:solidFill>
-                  <a:schemeClr val="tx1"/>
-                </a:solidFill>
-                <a:effectLst/>
-                <a:latin typeface="+mn-lt"/>
-              </a:rPr>
-              <a:t> &lt; 5 * 365, "3-5 </a:t>
-            </a:r>
-            <a:r>
-              <a:rPr lang="en-GB" sz="1800" b="0" dirty="0" err="1">
-                <a:solidFill>
-                  <a:schemeClr val="tx1"/>
-                </a:solidFill>
-                <a:effectLst/>
-                <a:latin typeface="+mn-lt"/>
-              </a:rPr>
-              <a:t>aastat</a:t>
-            </a:r>
-            <a:r>
-              <a:rPr lang="en-GB" sz="1800" b="0" dirty="0">
-                <a:solidFill>
-                  <a:schemeClr val="tx1"/>
-                </a:solidFill>
-                <a:effectLst/>
-                <a:latin typeface="+mn-lt"/>
-              </a:rPr>
-              <a:t>",</a:t>
-            </a:r>
-          </a:p>
-          <a:p>
-            <a:pPr>
-              <a:lnSpc>
-                <a:spcPct val="100000"/>
-              </a:lnSpc>
-              <a:buNone/>
-            </a:pPr>
-            <a:r>
-              <a:rPr lang="en-GB" sz="1800" b="0" dirty="0">
-                <a:solidFill>
-                  <a:schemeClr val="tx1"/>
-                </a:solidFill>
-                <a:effectLst/>
-                <a:latin typeface="+mn-lt"/>
-              </a:rPr>
-              <a:t>            "5+ </a:t>
-            </a:r>
-            <a:r>
-              <a:rPr lang="en-GB" sz="1800" b="0" dirty="0" err="1">
-                <a:solidFill>
-                  <a:schemeClr val="tx1"/>
-                </a:solidFill>
-                <a:effectLst/>
-                <a:latin typeface="+mn-lt"/>
-              </a:rPr>
-              <a:t>aastat</a:t>
-            </a:r>
-            <a:r>
-              <a:rPr lang="en-GB" sz="1800" b="0" dirty="0">
-                <a:solidFill>
-                  <a:schemeClr val="tx1"/>
-                </a:solidFill>
-                <a:effectLst/>
-                <a:latin typeface="+mn-lt"/>
-              </a:rPr>
-              <a:t>"</a:t>
-            </a:r>
-          </a:p>
-          <a:p>
-            <a:pPr>
-              <a:lnSpc>
-                <a:spcPct val="100000"/>
-              </a:lnSpc>
-              <a:buNone/>
-            </a:pPr>
-            <a:r>
-              <a:rPr lang="en-GB" sz="1800" b="0" dirty="0">
-                <a:solidFill>
-                  <a:schemeClr val="tx1"/>
-                </a:solidFill>
-                <a:effectLst/>
-                <a:latin typeface="+mn-lt"/>
-              </a:rPr>
-              <a:t>        )</a:t>
-            </a:r>
-          </a:p>
-          <a:p>
-            <a:pPr>
-              <a:lnSpc>
-                <a:spcPct val="100000"/>
-              </a:lnSpc>
-              <a:buNone/>
-            </a:pPr>
-            <a:r>
-              <a:rPr lang="en-GB" sz="1800" b="0" dirty="0">
-                <a:solidFill>
-                  <a:schemeClr val="tx1"/>
-                </a:solidFill>
-                <a:effectLst/>
-                <a:latin typeface="+mn-lt"/>
-              </a:rPr>
-              <a:t>)</a:t>
-            </a:r>
-            <a:endParaRPr lang="en-GB" sz="900" b="0" dirty="0">
-              <a:solidFill>
-                <a:srgbClr val="000000"/>
-              </a:solidFill>
-              <a:effectLst/>
-              <a:latin typeface="Consolas" panose="020B0609020204030204" pitchFamily="49" charset="0"/>
-            </a:endParaRPr>
-          </a:p>
-        </p:txBody>
-      </p:sp>
-      <p:sp>
-        <p:nvSpPr>
-          <p:cNvPr id="8" name="TextBox 7">
-            <a:extLst>
-              <a:ext uri="{FF2B5EF4-FFF2-40B4-BE49-F238E27FC236}">
-                <a16:creationId xmlns:a16="http://schemas.microsoft.com/office/drawing/2014/main" id="{7F83AD89-C0F7-A0B0-4459-4B68C0E45067}"/>
-              </a:ext>
-            </a:extLst>
-          </p:cNvPr>
-          <p:cNvSpPr txBox="1"/>
-          <p:nvPr/>
-        </p:nvSpPr>
-        <p:spPr>
-          <a:xfrm>
-            <a:off x="6501384" y="1629120"/>
-            <a:ext cx="6097604" cy="1983107"/>
-          </a:xfrm>
-          <a:prstGeom prst="rect">
-            <a:avLst/>
-          </a:prstGeom>
-          <a:noFill/>
-        </p:spPr>
-        <p:txBody>
-          <a:bodyPr wrap="square">
-            <a:spAutoFit/>
-          </a:bodyPr>
-          <a:lstStyle/>
-          <a:p>
-            <a:pPr>
-              <a:lnSpc>
-                <a:spcPct val="100000"/>
-              </a:lnSpc>
-              <a:buNone/>
-            </a:pPr>
-            <a:r>
-              <a:rPr lang="en-GB" sz="1800" b="0" dirty="0" err="1">
-                <a:solidFill>
-                  <a:schemeClr val="tx1"/>
-                </a:solidFill>
-                <a:effectLst/>
-                <a:latin typeface="+mn-lt"/>
-              </a:rPr>
-              <a:t>dim_kestus_grupp</a:t>
-            </a:r>
-            <a:r>
-              <a:rPr lang="en-GB" sz="1800" b="0" dirty="0">
-                <a:solidFill>
-                  <a:schemeClr val="tx1"/>
-                </a:solidFill>
-                <a:effectLst/>
-                <a:latin typeface="+mn-lt"/>
-              </a:rPr>
-              <a:t> = DATATABLE (</a:t>
-            </a:r>
-          </a:p>
-          <a:p>
-            <a:pPr>
-              <a:lnSpc>
-                <a:spcPct val="100000"/>
-              </a:lnSpc>
-              <a:buNone/>
-            </a:pPr>
-            <a:r>
-              <a:rPr lang="en-GB" sz="1800" b="0" dirty="0">
-                <a:solidFill>
-                  <a:schemeClr val="tx1"/>
-                </a:solidFill>
-                <a:effectLst/>
-                <a:latin typeface="+mn-lt"/>
-              </a:rPr>
-              <a:t>    "</a:t>
-            </a:r>
-            <a:r>
-              <a:rPr lang="en-GB" sz="1800" b="0" dirty="0" err="1">
-                <a:solidFill>
-                  <a:schemeClr val="tx1"/>
-                </a:solidFill>
-                <a:effectLst/>
-                <a:latin typeface="+mn-lt"/>
-              </a:rPr>
-              <a:t>Kestuse</a:t>
-            </a:r>
-            <a:r>
-              <a:rPr lang="en-GB" sz="1800" b="0" dirty="0">
-                <a:solidFill>
-                  <a:schemeClr val="tx1"/>
-                </a:solidFill>
-                <a:effectLst/>
-                <a:latin typeface="+mn-lt"/>
-              </a:rPr>
-              <a:t> </a:t>
-            </a:r>
-            <a:r>
-              <a:rPr lang="en-GB" sz="1800" b="0" dirty="0" err="1">
-                <a:solidFill>
-                  <a:schemeClr val="tx1"/>
-                </a:solidFill>
-                <a:effectLst/>
-                <a:latin typeface="+mn-lt"/>
-              </a:rPr>
-              <a:t>grupp</a:t>
-            </a:r>
-            <a:r>
-              <a:rPr lang="en-GB" sz="1800" b="0" dirty="0">
-                <a:solidFill>
-                  <a:schemeClr val="tx1"/>
-                </a:solidFill>
-                <a:effectLst/>
-                <a:latin typeface="+mn-lt"/>
-              </a:rPr>
-              <a:t>", STRING,</a:t>
-            </a:r>
-          </a:p>
-          <a:p>
-            <a:pPr>
-              <a:lnSpc>
-                <a:spcPct val="100000"/>
-              </a:lnSpc>
-              <a:buNone/>
-            </a:pPr>
-            <a:r>
-              <a:rPr lang="en-GB" sz="1800" b="0" dirty="0">
-                <a:solidFill>
-                  <a:schemeClr val="tx1"/>
-                </a:solidFill>
-                <a:effectLst/>
-                <a:latin typeface="+mn-lt"/>
-              </a:rPr>
-              <a:t>    "</a:t>
-            </a:r>
-            <a:r>
-              <a:rPr lang="en-GB" sz="1800" b="0" dirty="0" err="1">
-                <a:solidFill>
-                  <a:schemeClr val="tx1"/>
-                </a:solidFill>
-                <a:effectLst/>
-                <a:latin typeface="+mn-lt"/>
-              </a:rPr>
-              <a:t>Järjekord</a:t>
-            </a:r>
-            <a:r>
-              <a:rPr lang="en-GB" sz="1800" b="0" dirty="0">
-                <a:solidFill>
-                  <a:schemeClr val="tx1"/>
-                </a:solidFill>
-                <a:effectLst/>
-                <a:latin typeface="+mn-lt"/>
-              </a:rPr>
-              <a:t>", INTEGER,</a:t>
-            </a:r>
-          </a:p>
-          <a:p>
-            <a:pPr>
-              <a:lnSpc>
-                <a:spcPct val="100000"/>
-              </a:lnSpc>
-              <a:buNone/>
-            </a:pPr>
-            <a:r>
-              <a:rPr lang="en-GB" sz="1800" b="0" dirty="0">
-                <a:solidFill>
-                  <a:schemeClr val="tx1"/>
-                </a:solidFill>
-                <a:effectLst/>
-                <a:latin typeface="+mn-lt"/>
-              </a:rPr>
-              <a:t>    {</a:t>
-            </a:r>
-          </a:p>
-          <a:p>
-            <a:pPr>
-              <a:lnSpc>
-                <a:spcPct val="100000"/>
-              </a:lnSpc>
-              <a:buNone/>
-            </a:pPr>
-            <a:r>
-              <a:rPr lang="en-GB" sz="1800" b="0" dirty="0">
-                <a:solidFill>
-                  <a:schemeClr val="tx1"/>
-                </a:solidFill>
-                <a:effectLst/>
-                <a:latin typeface="+mn-lt"/>
-              </a:rPr>
-              <a:t>        { "0-1 </a:t>
-            </a:r>
-            <a:r>
-              <a:rPr lang="en-GB" sz="1800" b="0" dirty="0" err="1">
-                <a:solidFill>
-                  <a:schemeClr val="tx1"/>
-                </a:solidFill>
-                <a:effectLst/>
-                <a:latin typeface="+mn-lt"/>
-              </a:rPr>
-              <a:t>aastat</a:t>
-            </a:r>
-            <a:r>
-              <a:rPr lang="en-GB" sz="1800" b="0" dirty="0">
-                <a:solidFill>
-                  <a:schemeClr val="tx1"/>
-                </a:solidFill>
-                <a:effectLst/>
-                <a:latin typeface="+mn-lt"/>
-              </a:rPr>
-              <a:t>", 1 },</a:t>
-            </a:r>
-          </a:p>
-          <a:p>
-            <a:pPr>
-              <a:lnSpc>
-                <a:spcPct val="100000"/>
-              </a:lnSpc>
-              <a:buNone/>
-            </a:pPr>
-            <a:r>
-              <a:rPr lang="en-GB" sz="1800" b="0" dirty="0">
-                <a:solidFill>
-                  <a:schemeClr val="tx1"/>
-                </a:solidFill>
-                <a:effectLst/>
-                <a:latin typeface="+mn-lt"/>
-              </a:rPr>
-              <a:t>        { "1-3 </a:t>
-            </a:r>
-            <a:r>
-              <a:rPr lang="en-GB" sz="1800" b="0" dirty="0" err="1">
-                <a:solidFill>
-                  <a:schemeClr val="tx1"/>
-                </a:solidFill>
-                <a:effectLst/>
-                <a:latin typeface="+mn-lt"/>
-              </a:rPr>
-              <a:t>aastat</a:t>
-            </a:r>
-            <a:r>
-              <a:rPr lang="en-GB" sz="1800" b="0" dirty="0">
-                <a:solidFill>
-                  <a:schemeClr val="tx1"/>
-                </a:solidFill>
-                <a:effectLst/>
-                <a:latin typeface="+mn-lt"/>
-              </a:rPr>
-              <a:t>", 2 },</a:t>
-            </a:r>
-          </a:p>
-          <a:p>
-            <a:pPr>
-              <a:lnSpc>
-                <a:spcPct val="100000"/>
-              </a:lnSpc>
-              <a:buNone/>
-            </a:pPr>
-            <a:r>
-              <a:rPr lang="en-GB" sz="1800" b="0" dirty="0">
-                <a:solidFill>
-                  <a:schemeClr val="tx1"/>
-                </a:solidFill>
-                <a:effectLst/>
-                <a:latin typeface="+mn-lt"/>
-              </a:rPr>
-              <a:t>        { "3-5 </a:t>
-            </a:r>
-            <a:r>
-              <a:rPr lang="en-GB" sz="1800" b="0" dirty="0" err="1">
-                <a:solidFill>
-                  <a:schemeClr val="tx1"/>
-                </a:solidFill>
-                <a:effectLst/>
-                <a:latin typeface="+mn-lt"/>
-              </a:rPr>
-              <a:t>aastat</a:t>
-            </a:r>
-            <a:r>
-              <a:rPr lang="en-GB" sz="1800" b="0" dirty="0">
-                <a:solidFill>
-                  <a:schemeClr val="tx1"/>
-                </a:solidFill>
-                <a:effectLst/>
-                <a:latin typeface="+mn-lt"/>
-              </a:rPr>
-              <a:t>", 3 },</a:t>
-            </a:r>
-          </a:p>
-          <a:p>
-            <a:pPr>
-              <a:lnSpc>
-                <a:spcPct val="100000"/>
-              </a:lnSpc>
-              <a:buNone/>
-            </a:pPr>
-            <a:r>
-              <a:rPr lang="en-GB" sz="1800" b="0" dirty="0">
-                <a:solidFill>
-                  <a:schemeClr val="tx1"/>
-                </a:solidFill>
-                <a:effectLst/>
-                <a:latin typeface="+mn-lt"/>
-              </a:rPr>
-              <a:t>        { "5+ </a:t>
-            </a:r>
-            <a:r>
-              <a:rPr lang="en-GB" sz="1800" b="0" dirty="0" err="1">
-                <a:solidFill>
-                  <a:schemeClr val="tx1"/>
-                </a:solidFill>
-                <a:effectLst/>
-                <a:latin typeface="+mn-lt"/>
-              </a:rPr>
-              <a:t>aastat</a:t>
-            </a:r>
-            <a:r>
-              <a:rPr lang="en-GB" sz="1800" b="0" dirty="0">
-                <a:solidFill>
-                  <a:schemeClr val="tx1"/>
-                </a:solidFill>
-                <a:effectLst/>
-                <a:latin typeface="+mn-lt"/>
-              </a:rPr>
-              <a:t>", 4 },</a:t>
-            </a:r>
-          </a:p>
-          <a:p>
-            <a:pPr>
-              <a:lnSpc>
-                <a:spcPct val="100000"/>
-              </a:lnSpc>
-              <a:buNone/>
-            </a:pPr>
-            <a:r>
-              <a:rPr lang="en-GB" sz="1800" b="0" dirty="0">
-                <a:solidFill>
-                  <a:schemeClr val="tx1"/>
-                </a:solidFill>
-                <a:effectLst/>
-                <a:latin typeface="+mn-lt"/>
-              </a:rPr>
-              <a:t>        { "</a:t>
-            </a:r>
-            <a:r>
-              <a:rPr lang="en-GB" sz="1800" b="0" dirty="0" err="1">
-                <a:solidFill>
-                  <a:schemeClr val="tx1"/>
-                </a:solidFill>
-                <a:effectLst/>
-                <a:latin typeface="+mn-lt"/>
-              </a:rPr>
-              <a:t>Kuupäev</a:t>
-            </a:r>
-            <a:r>
-              <a:rPr lang="en-GB" sz="1800" b="0" dirty="0">
-                <a:solidFill>
-                  <a:schemeClr val="tx1"/>
-                </a:solidFill>
-                <a:effectLst/>
-                <a:latin typeface="+mn-lt"/>
-              </a:rPr>
-              <a:t> </a:t>
-            </a:r>
-            <a:r>
-              <a:rPr lang="en-GB" sz="1800" b="0" dirty="0" err="1">
-                <a:solidFill>
-                  <a:schemeClr val="tx1"/>
-                </a:solidFill>
-                <a:effectLst/>
-                <a:latin typeface="+mn-lt"/>
-              </a:rPr>
-              <a:t>puudub</a:t>
-            </a:r>
-            <a:r>
-              <a:rPr lang="en-GB" sz="1800" b="0" dirty="0">
-                <a:solidFill>
-                  <a:schemeClr val="tx1"/>
-                </a:solidFill>
-                <a:effectLst/>
-                <a:latin typeface="+mn-lt"/>
-              </a:rPr>
-              <a:t>", 5 }</a:t>
-            </a:r>
-          </a:p>
-          <a:p>
-            <a:pPr>
-              <a:lnSpc>
-                <a:spcPct val="100000"/>
-              </a:lnSpc>
-              <a:buNone/>
-            </a:pPr>
-            <a:r>
-              <a:rPr lang="en-GB" sz="1800" b="0" dirty="0">
-                <a:solidFill>
-                  <a:schemeClr val="tx1"/>
-                </a:solidFill>
-                <a:effectLst/>
-                <a:latin typeface="+mn-lt"/>
-              </a:rPr>
-              <a:t>    }</a:t>
-            </a:r>
-          </a:p>
-          <a:p>
-            <a:pPr>
-              <a:lnSpc>
-                <a:spcPct val="100000"/>
-              </a:lnSpc>
-              <a:buNone/>
-            </a:pPr>
-            <a:r>
-              <a:rPr lang="en-GB" sz="1800" b="0" dirty="0">
-                <a:solidFill>
-                  <a:schemeClr val="tx1"/>
-                </a:solidFill>
-                <a:effectLst/>
-                <a:latin typeface="+mn-lt"/>
-              </a:rPr>
-              <a:t>)</a:t>
-            </a:r>
-            <a:endParaRPr lang="en-GB" sz="900" b="0" dirty="0">
-              <a:solidFill>
-                <a:srgbClr val="000000"/>
-              </a:solidFill>
-              <a:effectLst/>
-              <a:latin typeface="Consolas" panose="020B0609020204030204" pitchFamily="49" charset="0"/>
-            </a:endParaRPr>
-          </a:p>
-        </p:txBody>
-      </p:sp>
-    </p:spTree>
-    <p:extLst>
-      <p:ext uri="{BB962C8B-B14F-4D97-AF65-F5344CB8AC3E}">
-        <p14:creationId xmlns:p14="http://schemas.microsoft.com/office/powerpoint/2010/main" val="1601335058"/>
-      </p:ext>
-    </p:extLst>
-  </p:cSld>
-  <p:clrMapOvr>
-    <a:masterClrMapping/>
-  </p:clrMapOvr>
-</p:sld>
-</file>
-
-<file path=ppt/slides/slide9.xml><?xml version="1.0" encoding="utf-8"?>
-<p:sld xmlns:a="http://schemas.openxmlformats.org/drawingml/2006/main" xmlns:r="http://schemas.openxmlformats.org/officeDocument/2006/relationships" xmlns:p="http://schemas.openxmlformats.org/presentationml/2006/main">
-  <p:cSld>
-    <p:spTree>
-      <p:nvGrpSpPr>
-        <p:cNvPr id="1" name="">
-          <a:extLst>
-            <a:ext uri="{FF2B5EF4-FFF2-40B4-BE49-F238E27FC236}">
-              <a16:creationId xmlns:a16="http://schemas.microsoft.com/office/drawing/2014/main" id="{B398607C-1CBD-609C-2DD5-82DEC1A10475}"/>
-            </a:ext>
-          </a:extLst>
-        </p:cNvPr>
-        <p:cNvGrpSpPr/>
-        <p:nvPr/>
-      </p:nvGrpSpPr>
-      <p:grpSpPr>
-        <a:xfrm>
-          <a:off x="0" y="0"/>
-          <a:ext cx="0" cy="0"/>
-          <a:chOff x="0" y="0"/>
-          <a:chExt cx="0" cy="0"/>
-        </a:xfrm>
-      </p:grpSpPr>
-      <p:sp>
-        <p:nvSpPr>
-          <p:cNvPr id="3" name="Content Placeholder 2">
-            <a:extLst>
-              <a:ext uri="{FF2B5EF4-FFF2-40B4-BE49-F238E27FC236}">
-                <a16:creationId xmlns:a16="http://schemas.microsoft.com/office/drawing/2014/main" id="{D180C9F6-9B44-EC39-A8A4-BF3AAD8C53E9}"/>
-              </a:ext>
-            </a:extLst>
-          </p:cNvPr>
-          <p:cNvSpPr>
-            <a:spLocks noGrp="1"/>
-          </p:cNvSpPr>
-          <p:nvPr>
-            <p:ph sz="quarter" idx="10"/>
-          </p:nvPr>
-        </p:nvSpPr>
-        <p:spPr/>
-        <p:txBody>
-          <a:bodyPr/>
-          <a:lstStyle/>
-          <a:p>
-            <a:pPr marL="0" indent="0">
-              <a:lnSpc>
-                <a:spcPct val="150000"/>
-              </a:lnSpc>
-              <a:buNone/>
-            </a:pPr>
-            <a:endParaRPr lang="en-US" sz="2800">
-              <a:ea typeface="Inter"/>
-            </a:endParaRPr>
-          </a:p>
-          <a:p>
-            <a:pPr marL="457200" lvl="1" indent="0">
-              <a:lnSpc>
-                <a:spcPct val="150000"/>
-              </a:lnSpc>
-              <a:buNone/>
-            </a:pPr>
-            <a:endParaRPr lang="en-US" sz="2000">
-              <a:ea typeface="Inter"/>
-            </a:endParaRPr>
-          </a:p>
-        </p:txBody>
-      </p:sp>
-      <p:sp>
-        <p:nvSpPr>
-          <p:cNvPr id="5" name="Title 4">
-            <a:extLst>
-              <a:ext uri="{FF2B5EF4-FFF2-40B4-BE49-F238E27FC236}">
-                <a16:creationId xmlns:a16="http://schemas.microsoft.com/office/drawing/2014/main" id="{C5F01C13-8AF6-57EC-09E9-26FFC7C0755E}"/>
-              </a:ext>
-            </a:extLst>
-          </p:cNvPr>
-          <p:cNvSpPr>
-            <a:spLocks noGrp="1"/>
-          </p:cNvSpPr>
-          <p:nvPr>
-            <p:ph type="ctrTitle"/>
-          </p:nvPr>
-        </p:nvSpPr>
-        <p:spPr>
-          <a:xfrm>
-            <a:off x="4283493" y="2675333"/>
-            <a:ext cx="3777666" cy="357043"/>
-          </a:xfrm>
-        </p:spPr>
-        <p:txBody>
-          <a:bodyPr/>
-          <a:lstStyle/>
-          <a:p>
-            <a:r>
-              <a:rPr lang="en-US"/>
-              <a:t>Paus 10:30-10:45</a:t>
-            </a:r>
-          </a:p>
-        </p:txBody>
-      </p:sp>
-    </p:spTree>
-    <p:extLst>
-      <p:ext uri="{BB962C8B-B14F-4D97-AF65-F5344CB8AC3E}">
-        <p14:creationId xmlns:p14="http://schemas.microsoft.com/office/powerpoint/2010/main" val="1847990754"/>
       </p:ext>
     </p:extLst>
   </p:cSld>

--- a/Materjalid/Day5 Employee report DAX/5-paev-andmetarkus-esitlus.pptx
+++ b/Materjalid/Day5 Employee report DAX/5-paev-andmetarkus-esitlus.pptx
@@ -28996,9 +28996,10 @@
               <a:t> </a:t>
             </a:r>
             <a:r>
-              <a:rPr lang="en-GB"/>
+              <a:rPr lang="en-GB" dirty="0" err="1"/>
               <a:t>nimetus</a:t>
             </a:r>
+            <a:endParaRPr lang="en-GB" dirty="0"/>
           </a:p>
         </p:txBody>
       </p:sp>
@@ -29110,7 +29111,7 @@
           <a:p>
             <a:r>
               <a:rPr lang="en-GB" dirty="0" err="1"/>
-              <a:t>Tabelid</a:t>
+              <a:t>Mudel</a:t>
             </a:r>
             <a:endParaRPr lang="en-GB" dirty="0"/>
           </a:p>

--- a/Materjalid/Day5 Employee report DAX/5-paev-andmetarkus-esitlus.pptx
+++ b/Materjalid/Day5 Employee report DAX/5-paev-andmetarkus-esitlus.pptx
@@ -26600,7 +26600,14 @@
                 <a:ea typeface="+mj-lt"/>
                 <a:cs typeface="+mj-lt"/>
               </a:rPr>
-              <a:t> - IV </a:t>
+              <a:t> </a:t>
+            </a:r>
+            <a:r>
+              <a:rPr lang="en-US" sz="3600" b="1">
+                <a:ea typeface="+mj-lt"/>
+                <a:cs typeface="+mj-lt"/>
+              </a:rPr>
+              <a:t>- V </a:t>
             </a:r>
             <a:r>
               <a:rPr lang="en-US" sz="3600" b="1" dirty="0" err="1">
@@ -26629,14 +26636,14 @@
             <p:ph sz="quarter" idx="10"/>
             <p:extLst>
               <p:ext uri="{D42A27DB-BD31-4B8C-83A1-F6EECF244321}">
-                <p14:modId xmlns:p14="http://schemas.microsoft.com/office/powerpoint/2010/main" val="3009071421"/>
+                <p14:modId xmlns:p14="http://schemas.microsoft.com/office/powerpoint/2010/main" val="4209251813"/>
               </p:ext>
             </p:extLst>
           </p:nvPr>
         </p:nvGraphicFramePr>
         <p:xfrm>
           <a:off x="623888" y="1268413"/>
-          <a:ext cx="10941050" cy="4097180"/>
+          <a:ext cx="10941050" cy="4980402"/>
         </p:xfrm>
         <a:graphic>
           <a:graphicData uri="http://schemas.openxmlformats.org/drawingml/2006/table">
@@ -27365,6 +27372,85 @@
                           <a:effectLst/>
                           <a:latin typeface="Inter"/>
                         </a:rPr>
+                        <a:t> (</a:t>
+                      </a:r>
+                      <a:r>
+                        <a:rPr lang="en-US" sz="2400" b="0" i="0" u="none" strike="noStrike" noProof="0" dirty="0" err="1">
+                          <a:solidFill>
+                            <a:srgbClr val="121212"/>
+                          </a:solidFill>
+                          <a:effectLst/>
+                          <a:latin typeface="Inter"/>
+                        </a:rPr>
+                        <a:t>nimi</a:t>
+                      </a:r>
+                      <a:r>
+                        <a:rPr lang="en-US" sz="2400" b="0" i="0" u="none" strike="noStrike" noProof="0" dirty="0">
+                          <a:solidFill>
+                            <a:srgbClr val="121212"/>
+                          </a:solidFill>
+                          <a:effectLst/>
+                          <a:latin typeface="Inter"/>
+                        </a:rPr>
+                        <a:t> </a:t>
+                      </a:r>
+                      <a:r>
+                        <a:rPr lang="en-US" sz="2400" b="0" i="0" u="none" strike="noStrike" noProof="0" dirty="0" err="1">
+                          <a:solidFill>
+                            <a:srgbClr val="121212"/>
+                          </a:solidFill>
+                          <a:effectLst/>
+                          <a:latin typeface="Inter"/>
+                        </a:rPr>
+                        <a:t>ei</a:t>
+                      </a:r>
+                      <a:r>
+                        <a:rPr lang="en-US" sz="2400" b="0" i="0" u="none" strike="noStrike" noProof="0" dirty="0">
+                          <a:solidFill>
+                            <a:srgbClr val="121212"/>
+                          </a:solidFill>
+                          <a:effectLst/>
+                          <a:latin typeface="Inter"/>
+                        </a:rPr>
+                        <a:t> ole </a:t>
+                      </a:r>
+                      <a:r>
+                        <a:rPr lang="en-US" sz="2400" b="0" i="0" u="none" strike="noStrike" noProof="0" dirty="0" err="1">
+                          <a:solidFill>
+                            <a:srgbClr val="121212"/>
+                          </a:solidFill>
+                          <a:effectLst/>
+                          <a:latin typeface="Inter"/>
+                        </a:rPr>
+                        <a:t>kohustuslik</a:t>
+                      </a:r>
+                      <a:r>
+                        <a:rPr lang="en-US" sz="2400" b="0" i="0" u="none" strike="noStrike" noProof="0" dirty="0">
+                          <a:solidFill>
+                            <a:srgbClr val="121212"/>
+                          </a:solidFill>
+                          <a:effectLst/>
+                          <a:latin typeface="Inter"/>
+                        </a:rPr>
+                        <a:t>)</a:t>
+                      </a:r>
+                    </a:p>
+                    <a:p>
+                      <a:pPr marL="0" lvl="0" indent="0" algn="l" rtl="0" fontAlgn="base">
+                        <a:lnSpc>
+                          <a:spcPts val="3150"/>
+                        </a:lnSpc>
+                        <a:buFont typeface="Arial" panose="020B0604020202020204" pitchFamily="34" charset="0"/>
+                        <a:buNone/>
+                      </a:pPr>
+                      <a:r>
+                        <a:rPr lang="en-US" sz="2400" b="0" i="0" u="none" strike="noStrike" noProof="0" dirty="0">
+                          <a:solidFill>
+                            <a:srgbClr val="121212"/>
+                          </a:solidFill>
+                          <a:effectLst/>
+                          <a:latin typeface="Inter"/>
+                        </a:rPr>
                         <a:t> </a:t>
                       </a:r>
                       <a:r>
@@ -27459,6 +27545,74 @@
                 <a:extLst>
                   <a:ext uri="{0D108BD9-81ED-4DB2-BD59-A6C34878D82A}">
                     <a16:rowId xmlns:a16="http://schemas.microsoft.com/office/drawing/2014/main" val="255178246"/>
+                  </a:ext>
+                </a:extLst>
+              </a:tr>
+              <a:tr h="545116">
+                <a:tc>
+                  <a:txBody>
+                    <a:bodyPr/>
+                    <a:lstStyle/>
+                    <a:p>
+                      <a:pPr marL="0" lvl="0" indent="0" algn="l" rtl="0" fontAlgn="base">
+                        <a:lnSpc>
+                          <a:spcPts val="3150"/>
+                        </a:lnSpc>
+                        <a:buFont typeface="Arial" panose="020B0604020202020204" pitchFamily="34" charset="0"/>
+                        <a:buNone/>
+                      </a:pPr>
+                      <a:endParaRPr lang="en-US" b="0" i="0" dirty="0">
+                        <a:solidFill>
+                          <a:srgbClr val="121212"/>
+                        </a:solidFill>
+                        <a:effectLst/>
+                        <a:latin typeface="Inter"/>
+                      </a:endParaRPr>
+                    </a:p>
+                  </a:txBody>
+                  <a:tcPr marL="99060" marR="99060" marT="49530" marB="49530" anchor="ctr">
+                    <a:lnL w="12700" cap="flat" cmpd="sng" algn="ctr">
+                      <a:solidFill>
+                        <a:srgbClr val="FFFFFF"/>
+                      </a:solidFill>
+                      <a:prstDash val="solid"/>
+                      <a:round/>
+                      <a:headEnd type="none" w="med" len="med"/>
+                      <a:tailEnd type="none" w="med" len="med"/>
+                    </a:lnL>
+                    <a:lnR w="12700" cap="flat" cmpd="sng" algn="ctr">
+                      <a:solidFill>
+                        <a:srgbClr val="FFFFFF"/>
+                      </a:solidFill>
+                      <a:prstDash val="solid"/>
+                      <a:round/>
+                      <a:headEnd type="none" w="med" len="med"/>
+                      <a:tailEnd type="none" w="med" len="med"/>
+                    </a:lnR>
+                    <a:lnT w="12700" cap="flat" cmpd="sng" algn="ctr">
+                      <a:solidFill>
+                        <a:srgbClr val="FFFFFF"/>
+                      </a:solidFill>
+                      <a:prstDash val="solid"/>
+                      <a:round/>
+                      <a:headEnd type="none" w="med" len="med"/>
+                      <a:tailEnd type="none" w="med" len="med"/>
+                    </a:lnT>
+                    <a:lnB w="12700" cap="flat" cmpd="sng" algn="ctr">
+                      <a:solidFill>
+                        <a:srgbClr val="FFFFFF"/>
+                      </a:solidFill>
+                      <a:prstDash val="solid"/>
+                      <a:round/>
+                      <a:headEnd type="none" w="med" len="med"/>
+                      <a:tailEnd type="none" w="med" len="med"/>
+                    </a:lnB>
+                    <a:noFill/>
+                  </a:tcPr>
+                </a:tc>
+                <a:extLst>
+                  <a:ext uri="{0D108BD9-81ED-4DB2-BD59-A6C34878D82A}">
+                    <a16:rowId xmlns:a16="http://schemas.microsoft.com/office/drawing/2014/main" val="651224871"/>
                   </a:ext>
                 </a:extLst>
               </a:tr>

--- a/Materjalid/Day5 Employee report DAX/5-paev-andmetarkus-esitlus.pptx
+++ b/Materjalid/Day5 Employee report DAX/5-paev-andmetarkus-esitlus.pptx
@@ -25630,7 +25630,34 @@
               <a:rPr lang="en-GB" sz="2400" dirty="0" err="1"/>
               <a:t>inimest</a:t>
             </a:r>
-            <a:endParaRPr lang="en-GB" sz="2400" dirty="0"/>
+            <a:r>
+              <a:rPr lang="en-GB" sz="2400" dirty="0"/>
+              <a:t> (</a:t>
+            </a:r>
+            <a:r>
+              <a:rPr lang="en-GB" sz="2400" dirty="0" err="1"/>
+              <a:t>või</a:t>
+            </a:r>
+            <a:r>
+              <a:rPr lang="en-GB" sz="2400" dirty="0"/>
+              <a:t> 5 </a:t>
+            </a:r>
+            <a:r>
+              <a:rPr lang="en-GB" sz="2400" dirty="0" err="1"/>
+              <a:t>kahel</a:t>
+            </a:r>
+            <a:r>
+              <a:rPr lang="en-GB" sz="2400" dirty="0"/>
+              <a:t> </a:t>
+            </a:r>
+            <a:r>
+              <a:rPr lang="en-GB" sz="2400" dirty="0" err="1"/>
+              <a:t>grupil</a:t>
+            </a:r>
+            <a:r>
+              <a:rPr lang="en-GB" sz="2400" dirty="0"/>
+              <a:t>)</a:t>
+            </a:r>
           </a:p>
           <a:p>
             <a:r>
@@ -25693,132 +25720,484 @@
           <a:p>
             <a:pPr lvl="1"/>
             <a:r>
-              <a:rPr lang="en-GB" sz="2400" b="1" dirty="0" err="1"/>
+              <a:rPr lang="en-GB" sz="2400" b="1" dirty="0" err="1">
+                <a:highlight>
+                  <a:srgbClr val="00FF00"/>
+                </a:highlight>
+              </a:rPr>
               <a:t>Andmeanalüütika</a:t>
             </a:r>
             <a:r>
-              <a:rPr lang="en-GB" sz="2400" b="1" dirty="0"/>
+              <a:rPr lang="en-GB" sz="2400" b="1" dirty="0">
+                <a:highlight>
+                  <a:srgbClr val="00FF00"/>
+                </a:highlight>
+              </a:rPr>
               <a:t> </a:t>
             </a:r>
             <a:r>
-              <a:rPr lang="en-GB" sz="2400" b="1" dirty="0" err="1"/>
+              <a:rPr lang="en-GB" sz="2400" b="1" dirty="0" err="1">
+                <a:highlight>
+                  <a:srgbClr val="00FF00"/>
+                </a:highlight>
+              </a:rPr>
               <a:t>etapid</a:t>
             </a:r>
-            <a:endParaRPr lang="en-GB" sz="2400" b="1" dirty="0"/>
+            <a:endParaRPr lang="en-GB" sz="2400" b="1" dirty="0">
+              <a:highlight>
+                <a:srgbClr val="00FF00"/>
+              </a:highlight>
+            </a:endParaRPr>
           </a:p>
           <a:p>
             <a:pPr lvl="2"/>
             <a:r>
-              <a:rPr lang="en-GB" sz="2400" dirty="0" err="1"/>
+              <a:rPr lang="en-GB" sz="2400" dirty="0" err="1">
+                <a:highlight>
+                  <a:srgbClr val="00FF00"/>
+                </a:highlight>
+              </a:rPr>
               <a:t>Etappide</a:t>
             </a:r>
             <a:r>
-              <a:rPr lang="en-GB" sz="2400" dirty="0"/>
+              <a:rPr lang="en-GB" sz="2400" dirty="0">
+                <a:highlight>
+                  <a:srgbClr val="00FF00"/>
+                </a:highlight>
+              </a:rPr>
               <a:t> </a:t>
             </a:r>
             <a:r>
-              <a:rPr lang="en-GB" sz="2400" dirty="0" err="1"/>
+              <a:rPr lang="en-GB" sz="2400" dirty="0" err="1">
+                <a:highlight>
+                  <a:srgbClr val="00FF00"/>
+                </a:highlight>
+              </a:rPr>
               <a:t>kohta</a:t>
             </a:r>
             <a:r>
-              <a:rPr lang="en-GB" sz="2400" dirty="0"/>
+              <a:rPr lang="en-GB" sz="2400" dirty="0">
+                <a:highlight>
+                  <a:srgbClr val="00FF00"/>
+                </a:highlight>
+              </a:rPr>
               <a:t> </a:t>
             </a:r>
             <a:r>
-              <a:rPr lang="en-GB" sz="2400" dirty="0" err="1"/>
+              <a:rPr lang="en-GB" sz="2400" dirty="0" err="1">
+                <a:highlight>
+                  <a:srgbClr val="00FF00"/>
+                </a:highlight>
+              </a:rPr>
               <a:t>väike</a:t>
             </a:r>
             <a:r>
-              <a:rPr lang="en-GB" sz="2400" dirty="0"/>
+              <a:rPr lang="en-GB" sz="2400" dirty="0">
+                <a:highlight>
+                  <a:srgbClr val="00FF00"/>
+                </a:highlight>
+              </a:rPr>
               <a:t> </a:t>
             </a:r>
             <a:r>
-              <a:rPr lang="en-GB" sz="2400" dirty="0" err="1"/>
+              <a:rPr lang="en-GB" sz="2400" dirty="0" err="1">
+                <a:highlight>
+                  <a:srgbClr val="00FF00"/>
+                </a:highlight>
+              </a:rPr>
               <a:t>selgitus</a:t>
             </a:r>
-            <a:endParaRPr lang="en-GB" sz="2400" dirty="0"/>
+            <a:endParaRPr lang="en-GB" sz="2400" dirty="0">
+              <a:highlight>
+                <a:srgbClr val="00FF00"/>
+              </a:highlight>
+            </a:endParaRPr>
+          </a:p>
+          <a:p>
+            <a:pPr lvl="2"/>
+            <a:r>
+              <a:rPr lang="en-GB" sz="2400" dirty="0">
+                <a:highlight>
+                  <a:srgbClr val="00FF00"/>
+                </a:highlight>
+              </a:rPr>
+              <a:t>Dim </a:t>
+            </a:r>
+            <a:r>
+              <a:rPr lang="en-GB" sz="2400" dirty="0" err="1">
+                <a:highlight>
+                  <a:srgbClr val="00FF00"/>
+                </a:highlight>
+              </a:rPr>
+              <a:t>ja</a:t>
+            </a:r>
+            <a:r>
+              <a:rPr lang="en-GB" sz="2400" dirty="0">
+                <a:highlight>
+                  <a:srgbClr val="00FF00"/>
+                </a:highlight>
+              </a:rPr>
+              <a:t> </a:t>
+            </a:r>
+            <a:r>
+              <a:rPr lang="en-GB" sz="2400" dirty="0" err="1">
+                <a:highlight>
+                  <a:srgbClr val="00FF00"/>
+                </a:highlight>
+              </a:rPr>
+              <a:t>fakt</a:t>
+            </a:r>
+            <a:r>
+              <a:rPr lang="en-GB" sz="2400" dirty="0">
+                <a:highlight>
+                  <a:srgbClr val="00FF00"/>
+                </a:highlight>
+              </a:rPr>
+              <a:t> </a:t>
+            </a:r>
+            <a:r>
+              <a:rPr lang="en-GB" sz="2400" dirty="0" err="1">
+                <a:highlight>
+                  <a:srgbClr val="00FF00"/>
+                </a:highlight>
+              </a:rPr>
+              <a:t>loogika</a:t>
+            </a:r>
+            <a:r>
+              <a:rPr lang="en-GB" sz="2400" dirty="0">
+                <a:highlight>
+                  <a:srgbClr val="00FF00"/>
+                </a:highlight>
+              </a:rPr>
+              <a:t>, </a:t>
+            </a:r>
+            <a:r>
+              <a:rPr lang="en-GB" sz="2400" dirty="0" err="1">
+                <a:highlight>
+                  <a:srgbClr val="00FF00"/>
+                </a:highlight>
+              </a:rPr>
+              <a:t>seosed</a:t>
+            </a:r>
+            <a:r>
+              <a:rPr lang="en-GB" sz="2400" dirty="0">
+                <a:highlight>
+                  <a:srgbClr val="00FF00"/>
+                </a:highlight>
+              </a:rPr>
+              <a:t>: sound, </a:t>
+            </a:r>
+            <a:r>
+              <a:rPr lang="en-GB" sz="2400" dirty="0" err="1">
+                <a:highlight>
+                  <a:srgbClr val="00FF00"/>
+                </a:highlight>
+              </a:rPr>
+              <a:t>granulaarsus</a:t>
+            </a:r>
+            <a:endParaRPr lang="en-GB" sz="2400" dirty="0">
+              <a:highlight>
+                <a:srgbClr val="00FF00"/>
+              </a:highlight>
+            </a:endParaRPr>
           </a:p>
           <a:p>
             <a:pPr lvl="1"/>
             <a:r>
-              <a:rPr lang="en-GB" sz="2400" b="1" dirty="0" err="1"/>
+              <a:rPr lang="en-GB" sz="2400" b="1" dirty="0" err="1">
+                <a:highlight>
+                  <a:srgbClr val="00FF00"/>
+                </a:highlight>
+              </a:rPr>
               <a:t>Andmete</a:t>
             </a:r>
             <a:r>
-              <a:rPr lang="en-GB" sz="2400" b="1" dirty="0"/>
+              <a:rPr lang="en-GB" sz="2400" b="1" dirty="0">
+                <a:highlight>
+                  <a:srgbClr val="00FF00"/>
+                </a:highlight>
+              </a:rPr>
               <a:t> </a:t>
             </a:r>
             <a:r>
-              <a:rPr lang="en-GB" sz="2400" b="1" dirty="0" err="1"/>
+              <a:rPr lang="en-GB" sz="2400" b="1" dirty="0" err="1">
+                <a:highlight>
+                  <a:srgbClr val="00FF00"/>
+                </a:highlight>
+              </a:rPr>
               <a:t>valdkonna</a:t>
             </a:r>
             <a:r>
-              <a:rPr lang="en-GB" sz="2400" b="1" dirty="0"/>
+              <a:rPr lang="en-GB" sz="2400" b="1" dirty="0">
+                <a:highlight>
+                  <a:srgbClr val="00FF00"/>
+                </a:highlight>
+              </a:rPr>
               <a:t> </a:t>
             </a:r>
             <a:r>
-              <a:rPr lang="en-GB" sz="2400" b="1" dirty="0" err="1"/>
+              <a:rPr lang="en-GB" sz="2400" b="1" dirty="0" err="1">
+                <a:highlight>
+                  <a:srgbClr val="00FF00"/>
+                </a:highlight>
+              </a:rPr>
               <a:t>spetsialistide</a:t>
             </a:r>
             <a:r>
-              <a:rPr lang="en-GB" sz="2400" b="1" dirty="0"/>
+              <a:rPr lang="en-GB" sz="2400" b="1" dirty="0">
+                <a:highlight>
+                  <a:srgbClr val="00FF00"/>
+                </a:highlight>
+              </a:rPr>
               <a:t> </a:t>
             </a:r>
             <a:r>
-              <a:rPr lang="en-GB" sz="2400" b="1" dirty="0" err="1"/>
+              <a:rPr lang="en-GB" sz="2400" b="1" dirty="0" err="1">
+                <a:highlight>
+                  <a:srgbClr val="00FF00"/>
+                </a:highlight>
+              </a:rPr>
               <a:t>rollid</a:t>
             </a:r>
-            <a:endParaRPr lang="en-GB" sz="2400" b="1" dirty="0"/>
+            <a:endParaRPr lang="en-GB" sz="2400" b="1" dirty="0">
+              <a:highlight>
+                <a:srgbClr val="00FF00"/>
+              </a:highlight>
+            </a:endParaRPr>
           </a:p>
           <a:p>
             <a:pPr lvl="2"/>
             <a:r>
-              <a:rPr lang="en-GB" sz="2400" dirty="0" err="1"/>
+              <a:rPr lang="en-GB" sz="2400" dirty="0" err="1">
+                <a:highlight>
+                  <a:srgbClr val="00FF00"/>
+                </a:highlight>
+              </a:rPr>
               <a:t>Nende</a:t>
             </a:r>
             <a:r>
-              <a:rPr lang="en-GB" sz="2400" dirty="0"/>
+              <a:rPr lang="en-GB" sz="2400" dirty="0">
+                <a:highlight>
+                  <a:srgbClr val="00FF00"/>
+                </a:highlight>
+              </a:rPr>
               <a:t> </a:t>
             </a:r>
             <a:r>
-              <a:rPr lang="en-GB" sz="2400" dirty="0" err="1"/>
+              <a:rPr lang="en-GB" sz="2400" dirty="0" err="1">
+                <a:highlight>
+                  <a:srgbClr val="00FF00"/>
+                </a:highlight>
+              </a:rPr>
               <a:t>ülesanded</a:t>
             </a:r>
-            <a:endParaRPr lang="en-GB" sz="2400" dirty="0"/>
+            <a:endParaRPr lang="en-GB" sz="2400" dirty="0">
+              <a:highlight>
+                <a:srgbClr val="00FF00"/>
+              </a:highlight>
+            </a:endParaRPr>
           </a:p>
           <a:p>
             <a:pPr lvl="2"/>
             <a:r>
-              <a:rPr lang="en-GB" sz="2400" dirty="0" err="1"/>
+              <a:rPr lang="en-GB" sz="2400" dirty="0" err="1">
+                <a:highlight>
+                  <a:srgbClr val="00FF00"/>
+                </a:highlight>
+              </a:rPr>
               <a:t>Nende</a:t>
             </a:r>
             <a:r>
-              <a:rPr lang="en-GB" sz="2400" dirty="0"/>
+              <a:rPr lang="en-GB" sz="2400" dirty="0">
+                <a:highlight>
+                  <a:srgbClr val="00FF00"/>
+                </a:highlight>
+              </a:rPr>
               <a:t> </a:t>
             </a:r>
             <a:r>
-              <a:rPr lang="en-GB" sz="2400" dirty="0" err="1"/>
+              <a:rPr lang="en-GB" sz="2400" dirty="0" err="1">
+                <a:highlight>
+                  <a:srgbClr val="00FF00"/>
+                </a:highlight>
+              </a:rPr>
               <a:t>väljakutsed</a:t>
             </a:r>
-            <a:endParaRPr lang="en-GB" sz="2400" dirty="0"/>
+            <a:endParaRPr lang="en-GB" sz="2400" dirty="0">
+              <a:highlight>
+                <a:srgbClr val="00FF00"/>
+              </a:highlight>
+            </a:endParaRPr>
           </a:p>
           <a:p>
             <a:pPr lvl="2"/>
             <a:r>
-              <a:rPr lang="en-GB" sz="2400" dirty="0"/>
+              <a:rPr lang="en-GB" sz="2400" dirty="0">
+                <a:solidFill>
+                  <a:srgbClr val="FF0000"/>
+                </a:solidFill>
+                <a:highlight>
+                  <a:srgbClr val="00FF00"/>
+                </a:highlight>
+              </a:rPr>
               <a:t>Milline </a:t>
             </a:r>
             <a:r>
-              <a:rPr lang="en-GB" sz="2400" dirty="0" err="1"/>
+              <a:rPr lang="en-GB" sz="2400" dirty="0" err="1">
+                <a:solidFill>
+                  <a:srgbClr val="FF0000"/>
+                </a:solidFill>
+                <a:highlight>
+                  <a:srgbClr val="00FF00"/>
+                </a:highlight>
+              </a:rPr>
               <a:t>etapp</a:t>
             </a:r>
             <a:r>
-              <a:rPr lang="en-GB" sz="2400" dirty="0"/>
+              <a:rPr lang="en-GB" sz="2400" dirty="0">
+                <a:solidFill>
+                  <a:srgbClr val="FF0000"/>
+                </a:solidFill>
+                <a:highlight>
+                  <a:srgbClr val="00FF00"/>
+                </a:highlight>
+              </a:rPr>
               <a:t> roll </a:t>
             </a:r>
             <a:r>
-              <a:rPr lang="en-GB" sz="2400" dirty="0" err="1"/>
+              <a:rPr lang="en-GB" sz="2400" dirty="0" err="1">
+                <a:solidFill>
+                  <a:srgbClr val="FF0000"/>
+                </a:solidFill>
+                <a:highlight>
+                  <a:srgbClr val="00FF00"/>
+                </a:highlight>
+              </a:rPr>
               <a:t>sulle</a:t>
+            </a:r>
+            <a:r>
+              <a:rPr lang="en-GB" sz="2400" dirty="0">
+                <a:solidFill>
+                  <a:srgbClr val="FF0000"/>
+                </a:solidFill>
+                <a:highlight>
+                  <a:srgbClr val="00FF00"/>
+                </a:highlight>
+              </a:rPr>
+              <a:t> </a:t>
+            </a:r>
+            <a:r>
+              <a:rPr lang="en-GB" sz="2400" dirty="0" err="1">
+                <a:solidFill>
+                  <a:srgbClr val="FF0000"/>
+                </a:solidFill>
+                <a:highlight>
+                  <a:srgbClr val="00FF00"/>
+                </a:highlight>
+              </a:rPr>
+              <a:t>sobiks</a:t>
+            </a:r>
+            <a:r>
+              <a:rPr lang="en-GB" sz="2400" dirty="0">
+                <a:solidFill>
+                  <a:srgbClr val="FF0000"/>
+                </a:solidFill>
+                <a:highlight>
+                  <a:srgbClr val="00FF00"/>
+                </a:highlight>
+              </a:rPr>
+              <a:t>, </a:t>
+            </a:r>
+            <a:r>
+              <a:rPr lang="en-GB" sz="2400" dirty="0" err="1">
+                <a:solidFill>
+                  <a:srgbClr val="FF0000"/>
+                </a:solidFill>
+                <a:highlight>
+                  <a:srgbClr val="00FF00"/>
+                </a:highlight>
+              </a:rPr>
+              <a:t>miks</a:t>
+            </a:r>
+            <a:r>
+              <a:rPr lang="en-GB" sz="2400" dirty="0">
+                <a:solidFill>
+                  <a:srgbClr val="FF0000"/>
+                </a:solidFill>
+                <a:highlight>
+                  <a:srgbClr val="00FF00"/>
+                </a:highlight>
+              </a:rPr>
+              <a:t> ; mis </a:t>
+            </a:r>
+            <a:r>
+              <a:rPr lang="en-GB" sz="2400" dirty="0" err="1">
+                <a:solidFill>
+                  <a:srgbClr val="FF0000"/>
+                </a:solidFill>
+                <a:highlight>
+                  <a:srgbClr val="00FF00"/>
+                </a:highlight>
+              </a:rPr>
+              <a:t>tundub</a:t>
+            </a:r>
+            <a:r>
+              <a:rPr lang="en-GB" sz="2400" dirty="0">
+                <a:solidFill>
+                  <a:srgbClr val="FF0000"/>
+                </a:solidFill>
+                <a:highlight>
+                  <a:srgbClr val="00FF00"/>
+                </a:highlight>
+              </a:rPr>
+              <a:t> </a:t>
+            </a:r>
+            <a:r>
+              <a:rPr lang="en-GB" sz="2400" dirty="0" err="1">
+                <a:solidFill>
+                  <a:srgbClr val="FF0000"/>
+                </a:solidFill>
+                <a:highlight>
+                  <a:srgbClr val="00FF00"/>
+                </a:highlight>
+              </a:rPr>
+              <a:t>väga</a:t>
+            </a:r>
+            <a:r>
+              <a:rPr lang="en-GB" sz="2400" dirty="0">
+                <a:solidFill>
+                  <a:srgbClr val="FF0000"/>
+                </a:solidFill>
+                <a:highlight>
+                  <a:srgbClr val="00FF00"/>
+                </a:highlight>
+              </a:rPr>
+              <a:t> </a:t>
+            </a:r>
+            <a:r>
+              <a:rPr lang="en-GB" sz="2400" dirty="0" err="1">
+                <a:solidFill>
+                  <a:srgbClr val="FF0000"/>
+                </a:solidFill>
+                <a:highlight>
+                  <a:srgbClr val="00FF00"/>
+                </a:highlight>
+              </a:rPr>
+              <a:t>segane</a:t>
+            </a:r>
+            <a:endParaRPr lang="en-GB" sz="2400" dirty="0">
+              <a:solidFill>
+                <a:srgbClr val="FF0000"/>
+              </a:solidFill>
+              <a:highlight>
+                <a:srgbClr val="00FF00"/>
+              </a:highlight>
+            </a:endParaRPr>
+          </a:p>
+          <a:p>
+            <a:r>
+              <a:rPr lang="en-GB" sz="2400" b="1" dirty="0" err="1"/>
+              <a:t>Esitlus</a:t>
             </a:r>
             <a:r>
               <a:rPr lang="en-GB" sz="2400" dirty="0"/>
@@ -25826,7 +26205,15 @@
             </a:r>
             <a:r>
               <a:rPr lang="en-GB" sz="2400" dirty="0" err="1"/>
-              <a:t>sobiks</a:t>
+              <a:t>igalt</a:t>
+            </a:r>
+            <a:r>
+              <a:rPr lang="en-GB" sz="2400" dirty="0"/>
+              <a:t> </a:t>
+            </a:r>
+            <a:r>
+              <a:rPr lang="en-GB" sz="2400" dirty="0" err="1"/>
+              <a:t>grupilt</a:t>
             </a:r>
             <a:r>
               <a:rPr lang="en-GB" sz="2400" dirty="0"/>
@@ -25834,14 +26221,7 @@
             </a:r>
             <a:r>
               <a:rPr lang="en-GB" sz="2400" dirty="0" err="1"/>
-              <a:t>miks</a:t>
-            </a:r>
-            <a:endParaRPr lang="en-GB" sz="2400" dirty="0"/>
-          </a:p>
-          <a:p>
-            <a:r>
-              <a:rPr lang="en-GB" sz="2400" b="1" dirty="0" err="1"/>
-              <a:t>Esitlus</a:t>
+              <a:t>kokku</a:t>
             </a:r>
             <a:r>
               <a:rPr lang="en-GB" sz="2400" dirty="0"/>
@@ -25849,7 +26229,7 @@
             </a:r>
             <a:r>
               <a:rPr lang="en-GB" sz="2400" dirty="0" err="1"/>
-              <a:t>igalt</a:t>
+              <a:t>kõik</a:t>
             </a:r>
             <a:r>
               <a:rPr lang="en-GB" sz="2400" dirty="0"/>
@@ -25857,15 +26237,7 @@
             </a:r>
             <a:r>
               <a:rPr lang="en-GB" sz="2400" dirty="0" err="1"/>
-              <a:t>grupilt</a:t>
-            </a:r>
-            <a:r>
-              <a:rPr lang="en-GB" sz="2400" dirty="0"/>
-              <a:t>, </a:t>
-            </a:r>
-            <a:r>
-              <a:rPr lang="en-GB" sz="2400" dirty="0" err="1"/>
-              <a:t>kokku</a:t>
+              <a:t>grupid</a:t>
             </a:r>
             <a:r>
               <a:rPr lang="en-GB" sz="2400" dirty="0"/>
@@ -26600,14 +26972,7 @@
                 <a:ea typeface="+mj-lt"/>
                 <a:cs typeface="+mj-lt"/>
               </a:rPr>
-              <a:t> </a:t>
-            </a:r>
-            <a:r>
-              <a:rPr lang="en-US" sz="3600" b="1">
-                <a:ea typeface="+mj-lt"/>
-                <a:cs typeface="+mj-lt"/>
-              </a:rPr>
-              <a:t>- V </a:t>
+              <a:t> - V </a:t>
             </a:r>
             <a:r>
               <a:rPr lang="en-US" sz="3600" b="1" dirty="0" err="1">
@@ -27247,7 +27612,7 @@
                         <a:buChar char="•"/>
                       </a:pPr>
                       <a:r>
-                        <a:rPr lang="en-US" sz="2400" b="0" i="0">
+                        <a:rPr lang="en-US" sz="2400" b="0" i="0" dirty="0">
                           <a:solidFill>
                             <a:srgbClr val="121212"/>
                           </a:solidFill>
@@ -27256,7 +27621,7 @@
                         </a:rPr>
                         <a:t>14:45 – 15:00 – Paus </a:t>
                       </a:r>
-                      <a:endParaRPr lang="en-US" b="0" i="0">
+                      <a:endParaRPr lang="en-US" b="0" i="0" dirty="0">
                         <a:solidFill>
                           <a:srgbClr val="121212"/>
                         </a:solidFill>
@@ -27701,30 +28066,528 @@
           <a:lstStyle/>
           <a:p>
             <a:r>
-              <a:rPr lang="en-US" dirty="0" err="1"/>
-              <a:t>Eelmiste</a:t>
-            </a:r>
-            <a:r>
-              <a:rPr lang="en-US" dirty="0"/>
-              <a:t> </a:t>
-            </a:r>
-            <a:r>
-              <a:rPr lang="en-US" dirty="0" err="1"/>
-              <a:t>kursuste</a:t>
-            </a:r>
-            <a:r>
-              <a:rPr lang="en-US" dirty="0"/>
-              <a:t> </a:t>
-            </a:r>
-            <a:r>
-              <a:rPr lang="en-US" dirty="0" err="1"/>
-              <a:t>lõputööd</a:t>
-            </a:r>
-            <a:endParaRPr lang="en-US" dirty="0"/>
+              <a:rPr lang="en-US" sz="1800" dirty="0"/>
+              <a:t>Google sheets  https://docs.google.com/spreadsheets/d/1Fo_JCYD6QcJonDrOs0N8GbhpR_Cb7ZKq/edit?usp=sharing&amp;ouid=106071594847601158330&amp;rtpof=true&amp;sd=true</a:t>
+            </a:r>
           </a:p>
           <a:p>
             <a:pPr lvl="1"/>
-            <a:endParaRPr lang="et-EE" dirty="0"/>
+            <a:r>
+              <a:rPr lang="en-US" sz="1800" dirty="0" err="1"/>
+              <a:t>Teemad</a:t>
+            </a:r>
+            <a:endParaRPr lang="en-US" sz="1800" dirty="0"/>
+          </a:p>
+          <a:p>
+            <a:pPr lvl="1"/>
+            <a:r>
+              <a:rPr lang="en-US" sz="1800" dirty="0" err="1"/>
+              <a:t>Grupid</a:t>
+            </a:r>
+            <a:endParaRPr lang="en-US" sz="1800" dirty="0"/>
+          </a:p>
+          <a:p>
+            <a:r>
+              <a:rPr lang="en-US" sz="1800" dirty="0" err="1"/>
+              <a:t>Ajakava</a:t>
+            </a:r>
+            <a:endParaRPr lang="en-US" sz="1800" dirty="0"/>
+          </a:p>
+          <a:p>
+            <a:pPr lvl="1"/>
+            <a:r>
+              <a:rPr lang="en-US" sz="1800" b="1" dirty="0" err="1"/>
+              <a:t>Tähtaeg</a:t>
+            </a:r>
+            <a:r>
+              <a:rPr lang="en-US" sz="1800" b="1" dirty="0"/>
+              <a:t> </a:t>
+            </a:r>
+            <a:r>
+              <a:rPr lang="en-US" sz="1800" b="1" dirty="0" err="1"/>
+              <a:t>teema</a:t>
+            </a:r>
+            <a:r>
+              <a:rPr lang="en-US" sz="1800" b="1" dirty="0"/>
+              <a:t> </a:t>
+            </a:r>
+            <a:r>
+              <a:rPr lang="en-US" sz="1800" b="1" dirty="0" err="1"/>
+              <a:t>valikuks</a:t>
+            </a:r>
+            <a:r>
+              <a:rPr lang="en-US" sz="1800" b="1" dirty="0"/>
+              <a:t> </a:t>
+            </a:r>
+            <a:r>
+              <a:rPr lang="en-US" sz="1800" b="1" dirty="0">
+                <a:solidFill>
+                  <a:srgbClr val="FF0000"/>
+                </a:solidFill>
+              </a:rPr>
+              <a:t>18.09 </a:t>
+            </a:r>
+            <a:r>
+              <a:rPr lang="en-US" sz="1800" dirty="0"/>
+              <a:t>(</a:t>
+            </a:r>
+            <a:r>
+              <a:rPr lang="en-US" sz="1800" dirty="0" err="1"/>
+              <a:t>annan</a:t>
+            </a:r>
+            <a:r>
+              <a:rPr lang="en-US" sz="1800" dirty="0"/>
+              <a:t> </a:t>
+            </a:r>
+            <a:r>
+              <a:rPr lang="en-US" sz="1800" dirty="0" err="1"/>
+              <a:t>lõppdokumendi</a:t>
+            </a:r>
+            <a:r>
+              <a:rPr lang="en-US" sz="1800" dirty="0"/>
+              <a:t> </a:t>
+            </a:r>
+            <a:r>
+              <a:rPr lang="en-US" sz="1800" dirty="0" err="1"/>
+              <a:t>vajalikud</a:t>
+            </a:r>
+            <a:r>
+              <a:rPr lang="en-US" sz="1800" dirty="0"/>
+              <a:t> </a:t>
+            </a:r>
+            <a:r>
+              <a:rPr lang="en-US" sz="1800" dirty="0" err="1"/>
+              <a:t>osad</a:t>
+            </a:r>
+            <a:r>
+              <a:rPr lang="en-US" sz="1800" dirty="0"/>
+              <a:t>)</a:t>
+            </a:r>
+          </a:p>
+          <a:p>
+            <a:pPr lvl="1"/>
+            <a:r>
+              <a:rPr lang="en-US" sz="1800" dirty="0" err="1"/>
+              <a:t>Töö</a:t>
+            </a:r>
+            <a:r>
+              <a:rPr lang="en-US" sz="1800" dirty="0"/>
+              <a:t> </a:t>
+            </a:r>
+            <a:r>
+              <a:rPr lang="en-US" sz="1800" dirty="0" err="1"/>
+              <a:t>tegemise</a:t>
+            </a:r>
+            <a:r>
+              <a:rPr lang="en-US" sz="1800" dirty="0"/>
+              <a:t> </a:t>
+            </a:r>
+            <a:r>
+              <a:rPr lang="en-US" sz="1800" dirty="0" err="1"/>
+              <a:t>periood</a:t>
+            </a:r>
+            <a:r>
+              <a:rPr lang="en-US" sz="1800" dirty="0"/>
+              <a:t> 21.09 - 9.10</a:t>
+            </a:r>
+          </a:p>
+          <a:p>
+            <a:pPr lvl="2"/>
+            <a:r>
+              <a:rPr lang="en-US" sz="1800" dirty="0"/>
+              <a:t>4. </a:t>
+            </a:r>
+            <a:r>
+              <a:rPr lang="en-US" sz="1800" dirty="0" err="1"/>
+              <a:t>nädal</a:t>
+            </a:r>
+            <a:r>
+              <a:rPr lang="en-US" sz="1800" dirty="0"/>
+              <a:t> </a:t>
+            </a:r>
+            <a:r>
+              <a:rPr lang="en-US" sz="1800" dirty="0" err="1"/>
+              <a:t>intervjuud</a:t>
+            </a:r>
+            <a:r>
+              <a:rPr lang="en-US" sz="1800" dirty="0"/>
+              <a:t>, </a:t>
+            </a:r>
+            <a:r>
+              <a:rPr lang="en-US" sz="1800" b="1" dirty="0" err="1"/>
+              <a:t>lähteülesanne</a:t>
+            </a:r>
+            <a:r>
+              <a:rPr lang="en-US" sz="1800" b="1" dirty="0"/>
+              <a:t> ja </a:t>
+            </a:r>
+            <a:r>
+              <a:rPr lang="en-US" sz="1800" b="1" dirty="0" err="1"/>
+              <a:t>plaan</a:t>
+            </a:r>
+            <a:r>
+              <a:rPr lang="en-US" sz="1800" dirty="0"/>
+              <a:t>, </a:t>
+            </a:r>
+            <a:r>
+              <a:rPr lang="en-US" sz="1800" dirty="0" err="1"/>
+              <a:t>rollide</a:t>
+            </a:r>
+            <a:r>
+              <a:rPr lang="en-US" sz="1800" dirty="0"/>
+              <a:t> </a:t>
+            </a:r>
+            <a:r>
+              <a:rPr lang="en-US" sz="1800" dirty="0" err="1"/>
+              <a:t>jaotus</a:t>
+            </a:r>
+            <a:r>
+              <a:rPr lang="en-US" sz="1800" dirty="0"/>
+              <a:t>, </a:t>
+            </a:r>
+            <a:r>
+              <a:rPr lang="en-US" sz="1800" b="1" dirty="0" err="1"/>
+              <a:t>andmete</a:t>
+            </a:r>
+            <a:r>
+              <a:rPr lang="en-US" sz="1800" b="1" dirty="0"/>
+              <a:t> </a:t>
+            </a:r>
+            <a:r>
+              <a:rPr lang="en-US" sz="1800" b="1" dirty="0" err="1"/>
+              <a:t>hankimine</a:t>
+            </a:r>
+            <a:r>
+              <a:rPr lang="en-US" sz="1800" b="1" dirty="0"/>
+              <a:t>, </a:t>
+            </a:r>
+            <a:r>
+              <a:rPr lang="en-US" sz="1800" dirty="0" err="1"/>
+              <a:t>algandmete</a:t>
+            </a:r>
+            <a:r>
+              <a:rPr lang="en-US" sz="1800" dirty="0"/>
+              <a:t> </a:t>
+            </a:r>
+            <a:r>
+              <a:rPr lang="en-US" sz="1800" dirty="0" err="1"/>
+              <a:t>analüüs</a:t>
+            </a:r>
+            <a:r>
+              <a:rPr lang="en-US" sz="1800" dirty="0"/>
+              <a:t>: </a:t>
+            </a:r>
+            <a:r>
+              <a:rPr lang="en-US" sz="1800" dirty="0" err="1"/>
+              <a:t>võimalikud</a:t>
+            </a:r>
+            <a:r>
+              <a:rPr lang="en-US" sz="1800" dirty="0"/>
+              <a:t> </a:t>
+            </a:r>
+            <a:r>
+              <a:rPr lang="en-US" sz="1800" dirty="0" err="1"/>
+              <a:t>andmeprobleemid</a:t>
+            </a:r>
+            <a:endParaRPr lang="en-US" sz="1800" dirty="0"/>
+          </a:p>
+          <a:p>
+            <a:pPr lvl="2"/>
+            <a:r>
+              <a:rPr lang="en-US" sz="1800" dirty="0"/>
+              <a:t>5. </a:t>
+            </a:r>
+            <a:r>
+              <a:rPr lang="en-US" sz="1800" dirty="0" err="1"/>
+              <a:t>nädal</a:t>
+            </a:r>
+            <a:r>
+              <a:rPr lang="en-US" sz="1800" dirty="0"/>
+              <a:t> </a:t>
+            </a:r>
+            <a:r>
+              <a:rPr lang="en-US" sz="1800" dirty="0" err="1"/>
+              <a:t>töö</a:t>
+            </a:r>
+            <a:r>
+              <a:rPr lang="en-US" sz="1800" dirty="0"/>
+              <a:t> </a:t>
+            </a:r>
+            <a:r>
+              <a:rPr lang="en-US" sz="1800" dirty="0" err="1"/>
+              <a:t>teostamine</a:t>
+            </a:r>
+            <a:r>
+              <a:rPr lang="en-US" sz="1800" dirty="0"/>
+              <a:t>: </a:t>
+            </a:r>
+            <a:r>
+              <a:rPr lang="en-US" sz="1800" dirty="0" err="1"/>
+              <a:t>andmete</a:t>
+            </a:r>
+            <a:r>
+              <a:rPr lang="en-US" sz="1800" dirty="0"/>
+              <a:t> </a:t>
+            </a:r>
+            <a:r>
+              <a:rPr lang="en-US" sz="1800" dirty="0" err="1"/>
+              <a:t>töötlemine</a:t>
+            </a:r>
+            <a:r>
+              <a:rPr lang="en-US" sz="1800" dirty="0"/>
+              <a:t>, </a:t>
+            </a:r>
+            <a:r>
+              <a:rPr lang="en-US" sz="1800" dirty="0" err="1"/>
+              <a:t>visualiseerimine</a:t>
+            </a:r>
+            <a:endParaRPr lang="en-US" sz="1800" dirty="0"/>
+          </a:p>
+          <a:p>
+            <a:pPr lvl="2"/>
+            <a:r>
+              <a:rPr lang="en-US" sz="1800" dirty="0"/>
+              <a:t>6. </a:t>
+            </a:r>
+            <a:r>
+              <a:rPr lang="en-US" sz="1800" dirty="0" err="1"/>
+              <a:t>nädal</a:t>
+            </a:r>
+            <a:r>
+              <a:rPr lang="en-US" sz="1800" dirty="0"/>
+              <a:t> </a:t>
+            </a:r>
+            <a:r>
+              <a:rPr lang="en-US" sz="1800" dirty="0" err="1"/>
+              <a:t>töö</a:t>
+            </a:r>
+            <a:r>
+              <a:rPr lang="en-US" sz="1800" dirty="0"/>
+              <a:t> </a:t>
+            </a:r>
+            <a:r>
+              <a:rPr lang="en-US" sz="1800" dirty="0" err="1"/>
+              <a:t>teostamine</a:t>
+            </a:r>
+            <a:r>
+              <a:rPr lang="en-US" sz="1800" dirty="0"/>
+              <a:t>: </a:t>
+            </a:r>
+            <a:r>
+              <a:rPr lang="en-US" sz="1800" dirty="0" err="1"/>
+              <a:t>töö</a:t>
+            </a:r>
+            <a:r>
+              <a:rPr lang="en-US" sz="1800" dirty="0"/>
+              <a:t> </a:t>
+            </a:r>
+            <a:r>
+              <a:rPr lang="en-US" sz="1800" dirty="0" err="1"/>
+              <a:t>lõpufaasid</a:t>
+            </a:r>
+            <a:r>
+              <a:rPr lang="en-US" sz="1800" dirty="0"/>
+              <a:t>, </a:t>
+            </a:r>
+            <a:r>
+              <a:rPr lang="en-US" sz="1800" dirty="0" err="1"/>
+              <a:t>järelduste</a:t>
+            </a:r>
+            <a:r>
+              <a:rPr lang="en-US" sz="1800" dirty="0"/>
+              <a:t> </a:t>
+            </a:r>
+            <a:r>
+              <a:rPr lang="en-US" sz="1800" dirty="0" err="1"/>
+              <a:t>tegemine</a:t>
+            </a:r>
+            <a:r>
+              <a:rPr lang="en-US" sz="1800" dirty="0"/>
+              <a:t>, </a:t>
+            </a:r>
+            <a:r>
+              <a:rPr lang="en-US" sz="1800" dirty="0" err="1"/>
+              <a:t>dokumendi</a:t>
+            </a:r>
+            <a:r>
+              <a:rPr lang="en-US" sz="1800" dirty="0"/>
+              <a:t> </a:t>
+            </a:r>
+            <a:r>
+              <a:rPr lang="en-US" sz="1800" dirty="0" err="1"/>
+              <a:t>vormistamine</a:t>
+            </a:r>
+            <a:r>
+              <a:rPr lang="en-US" sz="1800" dirty="0"/>
+              <a:t>, </a:t>
+            </a:r>
+            <a:r>
+              <a:rPr lang="en-US" sz="1800" dirty="0" err="1"/>
+              <a:t>esitluseks</a:t>
+            </a:r>
+            <a:r>
+              <a:rPr lang="en-US" sz="1800" dirty="0"/>
+              <a:t> </a:t>
+            </a:r>
+            <a:r>
+              <a:rPr lang="en-US" sz="1800" dirty="0" err="1"/>
+              <a:t>ettevalmistumine</a:t>
+            </a:r>
+            <a:r>
+              <a:rPr lang="en-US" sz="1800" dirty="0"/>
+              <a:t> (</a:t>
+            </a:r>
+            <a:r>
+              <a:rPr lang="en-US" sz="1800" dirty="0" err="1"/>
+              <a:t>anname</a:t>
+            </a:r>
+            <a:r>
+              <a:rPr lang="en-US" sz="1800" dirty="0"/>
+              <a:t> </a:t>
+            </a:r>
+            <a:r>
+              <a:rPr lang="en-US" sz="1800" dirty="0" err="1"/>
+              <a:t>ette</a:t>
+            </a:r>
+            <a:r>
+              <a:rPr lang="en-US" sz="1800" dirty="0"/>
+              <a:t> </a:t>
+            </a:r>
+            <a:r>
+              <a:rPr lang="en-US" sz="1800" dirty="0" err="1"/>
+              <a:t>põhipunktid</a:t>
+            </a:r>
+            <a:r>
+              <a:rPr lang="en-US" sz="1800" dirty="0"/>
+              <a:t>)</a:t>
+            </a:r>
+          </a:p>
+          <a:p>
+            <a:pPr lvl="3"/>
+            <a:r>
+              <a:rPr lang="en-US" sz="1800" b="1" dirty="0"/>
+              <a:t>9.10 13:00 </a:t>
+            </a:r>
+            <a:r>
+              <a:rPr lang="en-US" sz="1800" b="1" dirty="0" err="1"/>
+              <a:t>kaitsmine</a:t>
+            </a:r>
+            <a:endParaRPr lang="en-US" sz="1800" b="1" dirty="0"/>
+          </a:p>
+          <a:p>
+            <a:pPr lvl="1"/>
+            <a:r>
+              <a:rPr lang="en-US" sz="1800" dirty="0"/>
+              <a:t>Iga </a:t>
+            </a:r>
+            <a:r>
+              <a:rPr lang="en-US" sz="1800" dirty="0" err="1"/>
+              <a:t>nädala</a:t>
+            </a:r>
+            <a:r>
+              <a:rPr lang="en-US" sz="1800" dirty="0"/>
+              <a:t> </a:t>
+            </a:r>
+            <a:r>
+              <a:rPr lang="en-US" sz="1800" dirty="0" err="1"/>
+              <a:t>lõpus</a:t>
+            </a:r>
+            <a:r>
+              <a:rPr lang="en-US" sz="1800" dirty="0"/>
+              <a:t> </a:t>
+            </a:r>
+            <a:r>
+              <a:rPr lang="en-US" sz="1800" dirty="0" err="1"/>
+              <a:t>tehtud</a:t>
+            </a:r>
+            <a:r>
+              <a:rPr lang="en-US" sz="1800" dirty="0"/>
+              <a:t> </a:t>
+            </a:r>
+            <a:r>
+              <a:rPr lang="en-US" sz="1800" dirty="0" err="1"/>
+              <a:t>vaheetappide</a:t>
+            </a:r>
+            <a:r>
+              <a:rPr lang="en-US" sz="1800" dirty="0"/>
+              <a:t> </a:t>
+            </a:r>
+            <a:r>
+              <a:rPr lang="en-US" sz="1800" dirty="0" err="1"/>
+              <a:t>esitamine</a:t>
+            </a:r>
+            <a:endParaRPr lang="en-US" sz="1800" dirty="0"/>
+          </a:p>
+          <a:p>
+            <a:pPr lvl="1"/>
+            <a:r>
+              <a:rPr lang="en-US" sz="1800" dirty="0" err="1"/>
+              <a:t>Igaks</a:t>
+            </a:r>
+            <a:r>
+              <a:rPr lang="en-US" sz="1800" dirty="0"/>
+              <a:t> </a:t>
+            </a:r>
+            <a:r>
+              <a:rPr lang="en-US" sz="1800" dirty="0" err="1"/>
+              <a:t>nädalaks</a:t>
+            </a:r>
+            <a:r>
+              <a:rPr lang="en-US" sz="1800" dirty="0"/>
+              <a:t> </a:t>
+            </a:r>
+            <a:r>
+              <a:rPr lang="en-US" sz="1800" dirty="0" err="1"/>
+              <a:t>leppige</a:t>
+            </a:r>
+            <a:r>
+              <a:rPr lang="en-US" sz="1800" dirty="0"/>
+              <a:t> </a:t>
+            </a:r>
+            <a:r>
+              <a:rPr lang="en-US" sz="1800" dirty="0" err="1"/>
+              <a:t>kokku</a:t>
+            </a:r>
+            <a:r>
+              <a:rPr lang="en-US" sz="1800" dirty="0"/>
+              <a:t> </a:t>
+            </a:r>
+            <a:r>
+              <a:rPr lang="en-US" sz="1800" dirty="0" err="1"/>
+              <a:t>spetsiaalne</a:t>
+            </a:r>
+            <a:r>
+              <a:rPr lang="en-US" sz="1800" dirty="0"/>
+              <a:t> </a:t>
+            </a:r>
+            <a:r>
+              <a:rPr lang="en-US" sz="1800" dirty="0" err="1"/>
+              <a:t>aeg</a:t>
+            </a:r>
+            <a:r>
+              <a:rPr lang="en-US" sz="1800" dirty="0"/>
+              <a:t> </a:t>
+            </a:r>
+            <a:r>
+              <a:rPr lang="en-US" sz="1800" dirty="0" err="1"/>
+              <a:t>igale</a:t>
+            </a:r>
+            <a:r>
+              <a:rPr lang="en-US" sz="1800" dirty="0"/>
+              <a:t> </a:t>
+            </a:r>
+            <a:r>
+              <a:rPr lang="en-US" sz="1800" dirty="0" err="1"/>
+              <a:t>grupile</a:t>
+            </a:r>
+            <a:endParaRPr lang="en-US" sz="1800" dirty="0"/>
+          </a:p>
+          <a:p>
+            <a:endParaRPr lang="en-US" sz="1800" dirty="0"/>
+          </a:p>
+          <a:p>
+            <a:pPr lvl="1"/>
+            <a:endParaRPr lang="et-EE" sz="1800" dirty="0"/>
           </a:p>
         </p:txBody>
       </p:sp>
@@ -28350,7 +29213,7 @@
           <a:p>
             <a:r>
               <a:rPr lang="en-GB" dirty="0">
-                <a:hlinkClick r:id="rId2"/>
+                <a:hlinkClick r:id="rId3"/>
               </a:rPr>
               <a:t>https://app.liigume.ee/api/</a:t>
             </a:r>
@@ -28592,7 +29455,27 @@
           <a:bodyPr/>
           <a:lstStyle/>
           <a:p>
-            <a:endParaRPr lang="en-GB"/>
+            <a:r>
+              <a:rPr lang="en-GB" dirty="0" err="1"/>
+              <a:t>Andmete</a:t>
+            </a:r>
+            <a:r>
+              <a:rPr lang="en-GB" dirty="0"/>
+              <a:t> </a:t>
+            </a:r>
+            <a:r>
+              <a:rPr lang="en-GB" dirty="0" err="1"/>
+              <a:t>avamine</a:t>
+            </a:r>
+            <a:r>
+              <a:rPr lang="en-GB" dirty="0"/>
+              <a:t> </a:t>
+            </a:r>
+            <a:r>
+              <a:rPr lang="en-GB" dirty="0" err="1"/>
+              <a:t>jsonist</a:t>
+            </a:r>
+            <a:endParaRPr lang="en-GB" dirty="0"/>
           </a:p>
         </p:txBody>
       </p:sp>
@@ -28623,10 +29506,92 @@
             </a:r>
           </a:p>
           <a:p>
+            <a:pPr lvl="1"/>
+            <a:r>
+              <a:rPr lang="en-GB" dirty="0"/>
+              <a:t>Expand</a:t>
+            </a:r>
+          </a:p>
+          <a:p>
+            <a:pPr lvl="1"/>
+            <a:r>
+              <a:rPr lang="en-GB" dirty="0"/>
+              <a:t>Valid </a:t>
+            </a:r>
+            <a:r>
+              <a:rPr lang="en-GB" dirty="0" err="1"/>
+              <a:t>veerud</a:t>
+            </a:r>
+            <a:endParaRPr lang="en-GB" dirty="0"/>
+          </a:p>
+          <a:p>
             <a:r>
               <a:rPr lang="en-GB" dirty="0"/>
               <a:t>List</a:t>
             </a:r>
+          </a:p>
+          <a:p>
+            <a:pPr lvl="1"/>
+            <a:r>
+              <a:rPr lang="en-GB" dirty="0"/>
+              <a:t>Expand</a:t>
+            </a:r>
+          </a:p>
+          <a:p>
+            <a:pPr lvl="2"/>
+            <a:r>
+              <a:rPr lang="en-GB" dirty="0" err="1"/>
+              <a:t>Samasse</a:t>
+            </a:r>
+            <a:r>
+              <a:rPr lang="en-GB" dirty="0"/>
+              <a:t> </a:t>
+            </a:r>
+            <a:r>
+              <a:rPr lang="en-GB" dirty="0" err="1"/>
+              <a:t>lahtrisse</a:t>
+            </a:r>
+            <a:r>
+              <a:rPr lang="en-GB" dirty="0"/>
+              <a:t> </a:t>
+            </a:r>
+            <a:r>
+              <a:rPr lang="en-GB" dirty="0" err="1"/>
+              <a:t>eraldajatega</a:t>
+            </a:r>
+            <a:endParaRPr lang="en-GB" dirty="0"/>
+          </a:p>
+          <a:p>
+            <a:pPr lvl="2"/>
+            <a:r>
+              <a:rPr lang="en-GB" dirty="0" err="1"/>
+              <a:t>Eraldi</a:t>
+            </a:r>
+            <a:r>
+              <a:rPr lang="en-GB" dirty="0"/>
+              <a:t> </a:t>
+            </a:r>
+            <a:r>
+              <a:rPr lang="en-GB" dirty="0" err="1"/>
+              <a:t>ridadena</a:t>
+            </a:r>
+            <a:r>
+              <a:rPr lang="en-GB" dirty="0"/>
+              <a:t>, </a:t>
+            </a:r>
+            <a:r>
+              <a:rPr lang="en-GB" dirty="0" err="1"/>
+              <a:t>kordistab</a:t>
+            </a:r>
+            <a:r>
+              <a:rPr lang="en-GB" dirty="0"/>
+              <a:t> </a:t>
+            </a:r>
+            <a:r>
+              <a:rPr lang="en-GB" dirty="0" err="1"/>
+              <a:t>kirjeid</a:t>
+            </a:r>
+            <a:endParaRPr lang="en-GB" dirty="0"/>
           </a:p>
         </p:txBody>
       </p:sp>
@@ -29178,7 +30143,7 @@
           <a:bodyPr/>
           <a:lstStyle/>
           <a:p>
-            <a:endParaRPr lang="en-GB"/>
+            <a:endParaRPr lang="en-GB" dirty="0"/>
           </a:p>
         </p:txBody>
       </p:sp>
@@ -29204,8 +30169,128 @@
         </p:blipFill>
         <p:spPr>
           <a:xfrm>
-            <a:off x="5556584" y="989280"/>
+            <a:off x="6485890" y="105878"/>
             <a:ext cx="5561731" cy="4353124"/>
+          </a:xfrm>
+          <a:prstGeom prst="rect">
+            <a:avLst/>
+          </a:prstGeom>
+        </p:spPr>
+      </p:pic>
+      <p:pic>
+        <p:nvPicPr>
+          <p:cNvPr id="8" name="Picture 7">
+            <a:extLst>
+              <a:ext uri="{FF2B5EF4-FFF2-40B4-BE49-F238E27FC236}">
+                <a16:creationId xmlns:a16="http://schemas.microsoft.com/office/drawing/2014/main" id="{3B3E14A8-D655-6535-5CAE-773B00E887A9}"/>
+              </a:ext>
+            </a:extLst>
+          </p:cNvPr>
+          <p:cNvPicPr>
+            <a:picLocks noChangeAspect="1"/>
+          </p:cNvPicPr>
+          <p:nvPr/>
+        </p:nvPicPr>
+        <p:blipFill>
+          <a:blip r:embed="rId3"/>
+          <a:stretch>
+            <a:fillRect/>
+          </a:stretch>
+        </p:blipFill>
+        <p:spPr>
+          <a:xfrm>
+            <a:off x="222128" y="2443046"/>
+            <a:ext cx="3858163" cy="2629267"/>
+          </a:xfrm>
+          <a:prstGeom prst="rect">
+            <a:avLst/>
+          </a:prstGeom>
+        </p:spPr>
+      </p:pic>
+      <p:pic>
+        <p:nvPicPr>
+          <p:cNvPr id="10" name="Picture 9">
+            <a:extLst>
+              <a:ext uri="{FF2B5EF4-FFF2-40B4-BE49-F238E27FC236}">
+                <a16:creationId xmlns:a16="http://schemas.microsoft.com/office/drawing/2014/main" id="{84E7FD09-ADC3-BCC4-9816-4CA33C86E709}"/>
+              </a:ext>
+            </a:extLst>
+          </p:cNvPr>
+          <p:cNvPicPr>
+            <a:picLocks noChangeAspect="1"/>
+          </p:cNvPicPr>
+          <p:nvPr/>
+        </p:nvPicPr>
+        <p:blipFill>
+          <a:blip r:embed="rId4"/>
+          <a:stretch>
+            <a:fillRect/>
+          </a:stretch>
+        </p:blipFill>
+        <p:spPr>
+          <a:xfrm>
+            <a:off x="4066580" y="2011246"/>
+            <a:ext cx="2762636" cy="1162212"/>
+          </a:xfrm>
+          <a:prstGeom prst="rect">
+            <a:avLst/>
+          </a:prstGeom>
+        </p:spPr>
+      </p:pic>
+      <p:pic>
+        <p:nvPicPr>
+          <p:cNvPr id="12" name="Picture 11">
+            <a:extLst>
+              <a:ext uri="{FF2B5EF4-FFF2-40B4-BE49-F238E27FC236}">
+                <a16:creationId xmlns:a16="http://schemas.microsoft.com/office/drawing/2014/main" id="{EC3FF94C-565C-0C4A-E84A-ADCEE2D157D3}"/>
+              </a:ext>
+            </a:extLst>
+          </p:cNvPr>
+          <p:cNvPicPr>
+            <a:picLocks noChangeAspect="1"/>
+          </p:cNvPicPr>
+          <p:nvPr/>
+        </p:nvPicPr>
+        <p:blipFill>
+          <a:blip r:embed="rId5"/>
+          <a:stretch>
+            <a:fillRect/>
+          </a:stretch>
+        </p:blipFill>
+        <p:spPr>
+          <a:xfrm>
+            <a:off x="6713402" y="4314352"/>
+            <a:ext cx="3023188" cy="2543648"/>
+          </a:xfrm>
+          <a:prstGeom prst="rect">
+            <a:avLst/>
+          </a:prstGeom>
+        </p:spPr>
+      </p:pic>
+      <p:pic>
+        <p:nvPicPr>
+          <p:cNvPr id="14" name="Picture 13">
+            <a:extLst>
+              <a:ext uri="{FF2B5EF4-FFF2-40B4-BE49-F238E27FC236}">
+                <a16:creationId xmlns:a16="http://schemas.microsoft.com/office/drawing/2014/main" id="{7668F2A5-73DC-B5E0-E895-3FC24E3468F6}"/>
+              </a:ext>
+            </a:extLst>
+          </p:cNvPr>
+          <p:cNvPicPr>
+            <a:picLocks noChangeAspect="1"/>
+          </p:cNvPicPr>
+          <p:nvPr/>
+        </p:nvPicPr>
+        <p:blipFill>
+          <a:blip r:embed="rId6"/>
+          <a:stretch>
+            <a:fillRect/>
+          </a:stretch>
+        </p:blipFill>
+        <p:spPr>
+          <a:xfrm>
+            <a:off x="9736590" y="4012496"/>
+            <a:ext cx="3460822" cy="3196826"/>
           </a:xfrm>
           <a:prstGeom prst="rect">
             <a:avLst/>
@@ -29430,7 +30515,7 @@
         </p:blipFill>
         <p:spPr>
           <a:xfrm>
-            <a:off x="0" y="3181150"/>
+            <a:off x="-107950" y="0"/>
             <a:ext cx="12192000" cy="1728335"/>
           </a:xfrm>
           <a:prstGeom prst="rect">
